--- a/Documents/Original/FlexChroma_Tour_Guide_EN.pptx
+++ b/Documents/Original/FlexChroma_Tour_Guide_EN.pptx
@@ -10,10 +10,10 @@
     <p:sldId id="258" r:id="rId4"/>
     <p:sldId id="259" r:id="rId5"/>
     <p:sldId id="265" r:id="rId6"/>
-    <p:sldId id="263" r:id="rId7"/>
-    <p:sldId id="264" r:id="rId8"/>
-    <p:sldId id="266" r:id="rId9"/>
-    <p:sldId id="267" r:id="rId10"/>
+    <p:sldId id="266" r:id="rId7"/>
+    <p:sldId id="267" r:id="rId8"/>
+    <p:sldId id="268" r:id="rId9"/>
+    <p:sldId id="269" r:id="rId10"/>
   </p:sldIdLst>
   <p:sldSz cx="6858000" cy="9144000" type="screen4x3"/>
   <p:notesSz cx="7104063" cy="10234613"/>
@@ -251,7 +251,7 @@
           <a:p>
             <a:fld id="{71132294-360C-4425-B294-91EF6E97A591}" type="datetimeFigureOut">
               <a:rPr kumimoji="1" lang="ja-JP" altLang="en-US" smtClean="0"/>
-              <a:t>2026/8/16</a:t>
+              <a:t>2026/9/16</a:t>
             </a:fld>
             <a:endParaRPr kumimoji="1" lang="ja-JP" altLang="en-US"/>
           </a:p>
@@ -453,7 +453,7 @@
           <a:p>
             <a:fld id="{71132294-360C-4425-B294-91EF6E97A591}" type="datetimeFigureOut">
               <a:rPr kumimoji="1" lang="ja-JP" altLang="en-US" smtClean="0"/>
-              <a:t>2026/8/16</a:t>
+              <a:t>2026/9/16</a:t>
             </a:fld>
             <a:endParaRPr kumimoji="1" lang="ja-JP" altLang="en-US"/>
           </a:p>
@@ -665,7 +665,7 @@
           <a:p>
             <a:fld id="{71132294-360C-4425-B294-91EF6E97A591}" type="datetimeFigureOut">
               <a:rPr kumimoji="1" lang="ja-JP" altLang="en-US" smtClean="0"/>
-              <a:t>2026/8/16</a:t>
+              <a:t>2026/9/16</a:t>
             </a:fld>
             <a:endParaRPr kumimoji="1" lang="ja-JP" altLang="en-US"/>
           </a:p>
@@ -867,7 +867,7 @@
           <a:p>
             <a:fld id="{71132294-360C-4425-B294-91EF6E97A591}" type="datetimeFigureOut">
               <a:rPr kumimoji="1" lang="ja-JP" altLang="en-US" smtClean="0"/>
-              <a:t>2026/8/16</a:t>
+              <a:t>2026/9/16</a:t>
             </a:fld>
             <a:endParaRPr kumimoji="1" lang="ja-JP" altLang="en-US"/>
           </a:p>
@@ -1113,7 +1113,7 @@
           <a:p>
             <a:fld id="{71132294-360C-4425-B294-91EF6E97A591}" type="datetimeFigureOut">
               <a:rPr kumimoji="1" lang="ja-JP" altLang="en-US" smtClean="0"/>
-              <a:t>2026/8/16</a:t>
+              <a:t>2026/9/16</a:t>
             </a:fld>
             <a:endParaRPr kumimoji="1" lang="ja-JP" altLang="en-US"/>
           </a:p>
@@ -1409,7 +1409,7 @@
           <a:p>
             <a:fld id="{71132294-360C-4425-B294-91EF6E97A591}" type="datetimeFigureOut">
               <a:rPr kumimoji="1" lang="ja-JP" altLang="en-US" smtClean="0"/>
-              <a:t>2026/8/16</a:t>
+              <a:t>2026/9/16</a:t>
             </a:fld>
             <a:endParaRPr kumimoji="1" lang="ja-JP" altLang="en-US"/>
           </a:p>
@@ -1840,7 +1840,7 @@
           <a:p>
             <a:fld id="{71132294-360C-4425-B294-91EF6E97A591}" type="datetimeFigureOut">
               <a:rPr kumimoji="1" lang="ja-JP" altLang="en-US" smtClean="0"/>
-              <a:t>2026/8/16</a:t>
+              <a:t>2026/9/16</a:t>
             </a:fld>
             <a:endParaRPr kumimoji="1" lang="ja-JP" altLang="en-US"/>
           </a:p>
@@ -1958,7 +1958,7 @@
           <a:p>
             <a:fld id="{71132294-360C-4425-B294-91EF6E97A591}" type="datetimeFigureOut">
               <a:rPr kumimoji="1" lang="ja-JP" altLang="en-US" smtClean="0"/>
-              <a:t>2026/8/16</a:t>
+              <a:t>2026/9/16</a:t>
             </a:fld>
             <a:endParaRPr kumimoji="1" lang="ja-JP" altLang="en-US"/>
           </a:p>
@@ -2053,7 +2053,7 @@
           <a:p>
             <a:fld id="{71132294-360C-4425-B294-91EF6E97A591}" type="datetimeFigureOut">
               <a:rPr kumimoji="1" lang="ja-JP" altLang="en-US" smtClean="0"/>
-              <a:t>2026/8/16</a:t>
+              <a:t>2026/9/16</a:t>
             </a:fld>
             <a:endParaRPr kumimoji="1" lang="ja-JP" altLang="en-US"/>
           </a:p>
@@ -2362,7 +2362,7 @@
           <a:p>
             <a:fld id="{71132294-360C-4425-B294-91EF6E97A591}" type="datetimeFigureOut">
               <a:rPr kumimoji="1" lang="ja-JP" altLang="en-US" smtClean="0"/>
-              <a:t>2026/8/16</a:t>
+              <a:t>2026/9/16</a:t>
             </a:fld>
             <a:endParaRPr kumimoji="1" lang="ja-JP" altLang="en-US"/>
           </a:p>
@@ -2619,7 +2619,7 @@
           <a:p>
             <a:fld id="{71132294-360C-4425-B294-91EF6E97A591}" type="datetimeFigureOut">
               <a:rPr kumimoji="1" lang="ja-JP" altLang="en-US" smtClean="0"/>
-              <a:t>2026/8/16</a:t>
+              <a:t>2026/9/16</a:t>
             </a:fld>
             <a:endParaRPr kumimoji="1" lang="ja-JP" altLang="en-US"/>
           </a:p>
@@ -2864,7 +2864,7 @@
           <a:p>
             <a:fld id="{71132294-360C-4425-B294-91EF6E97A591}" type="datetimeFigureOut">
               <a:rPr kumimoji="1" lang="ja-JP" altLang="en-US" smtClean="0"/>
-              <a:t>2026/8/16</a:t>
+              <a:t>2026/9/16</a:t>
             </a:fld>
             <a:endParaRPr kumimoji="1" lang="ja-JP" altLang="en-US"/>
           </a:p>
@@ -3874,8 +3874,8 @@
         </p:nvSpPr>
         <p:spPr>
           <a:xfrm>
-            <a:off x="0" y="0"/>
-            <a:ext cx="6858000" cy="9144000"/>
+            <a:off x="67565" y="90087"/>
+            <a:ext cx="6722870" cy="8963827"/>
           </a:xfrm>
           <a:prstGeom prst="rect">
             <a:avLst/>
@@ -3937,7 +3937,7 @@
         </p:nvSpPr>
         <p:spPr>
           <a:xfrm>
-            <a:off x="7269" y="0"/>
+            <a:off x="-7269" y="-9649"/>
             <a:ext cx="6858000" cy="9144000"/>
           </a:xfrm>
           <a:prstGeom prst="rect">
@@ -4362,10 +4362,15 @@
           <a:p>
             <a:pPr algn="ctr"/>
             <a:r>
-              <a:rPr kumimoji="1" lang="en-US" altLang="ja-JP" dirty="0"/>
+              <a:rPr kumimoji="1" lang="en-US" altLang="ja-JP" dirty="0">
+                <a:latin typeface="Jost" pitchFamily="2" charset="0"/>
+                <a:ea typeface="Jost" pitchFamily="2" charset="0"/>
+              </a:rPr>
               <a:t>1</a:t>
             </a:r>
-            <a:endParaRPr kumimoji="1" lang="ja-JP" altLang="en-US" dirty="0"/>
+            <a:endParaRPr kumimoji="1" lang="ja-JP" altLang="en-US" dirty="0">
+              <a:latin typeface="Jost" pitchFamily="2" charset="0"/>
+            </a:endParaRPr>
           </a:p>
         </p:txBody>
       </p:sp>
@@ -4430,7 +4435,7 @@
         <p:spPr>
           <a:xfrm>
             <a:off x="770844" y="3001606"/>
-            <a:ext cx="2055371" cy="400110"/>
+            <a:ext cx="1739579" cy="400110"/>
           </a:xfrm>
           <a:prstGeom prst="rect">
             <a:avLst/>
@@ -4445,13 +4450,13 @@
           <a:p>
             <a:r>
               <a:rPr lang="en-US" altLang="ja-JP" sz="2000" dirty="0">
-                <a:latin typeface="IBM Plex Sans JP SemiBold" panose="020B0703050203000203" pitchFamily="50" charset="-128"/>
-                <a:ea typeface="IBM Plex Sans JP SemiBold" panose="020B0703050203000203" pitchFamily="50" charset="-128"/>
+                <a:latin typeface="Jost" pitchFamily="2" charset="0"/>
+                <a:ea typeface="Jost" pitchFamily="2" charset="0"/>
               </a:rPr>
               <a:t>1. Introduction</a:t>
             </a:r>
             <a:endParaRPr kumimoji="1" lang="ja-JP" altLang="en-US" sz="2000" b="1" dirty="0">
-              <a:latin typeface="IBM Plex Sans JP SemiBold" panose="020B0703050203000203" pitchFamily="50" charset="-128"/>
+              <a:latin typeface="Jost" pitchFamily="2" charset="0"/>
               <a:ea typeface="IBM Plex Sans JP SemiBold" panose="020B0703050203000203" pitchFamily="50" charset="-128"/>
             </a:endParaRPr>
           </a:p>
@@ -4487,21 +4492,29 @@
           <a:p>
             <a:r>
               <a:rPr lang="en-US" altLang="ja-JP" sz="1050" dirty="0">
-                <a:latin typeface="Segoe UI Semibold" panose="020B0702040204020203" pitchFamily="34" charset="0"/>
-                <a:ea typeface="IBM Plex Sans JP" panose="020B0503050203000203" pitchFamily="50" charset="-128"/>
+                <a:latin typeface="Jost SemiBold" pitchFamily="2" charset="0"/>
+                <a:ea typeface="Jost SemiBold" pitchFamily="2" charset="0"/>
                 <a:cs typeface="Segoe UI Semibold" panose="020B0702040204020203" pitchFamily="34" charset="0"/>
               </a:rPr>
-              <a:t>FlexChroma™</a:t>
+              <a:t>FlexChroma</a:t>
             </a:r>
             <a:r>
               <a:rPr lang="en-US" altLang="ja-JP" sz="1050" dirty="0">
-                <a:latin typeface="IBM Plex Sans JP" panose="020B0503050203000203" pitchFamily="50" charset="-128"/>
-                <a:ea typeface="IBM Plex Sans JP" panose="020B0503050203000203" pitchFamily="50" charset="-128"/>
+                <a:latin typeface="Jost" pitchFamily="2" charset="0"/>
+                <a:ea typeface="Jost" pitchFamily="2" charset="0"/>
+                <a:cs typeface="Segoe UI Semibold" panose="020B0702040204020203" pitchFamily="34" charset="0"/>
+              </a:rPr>
+              <a:t>™</a:t>
+            </a:r>
+            <a:r>
+              <a:rPr lang="en-US" altLang="ja-JP" sz="1050" dirty="0">
+                <a:latin typeface="Jost" pitchFamily="2" charset="0"/>
+                <a:ea typeface="Jost" pitchFamily="2" charset="0"/>
               </a:rPr>
               <a:t> is a set of models designed to create filament itself by combining commercially available filaments. It consists of multiple Series, each designed for a different purpose. Within each Series, multiple Models are provided, along with different Profiles and Plates depending on size and usage.</a:t>
             </a:r>
             <a:endParaRPr kumimoji="1" lang="ja-JP" altLang="en-US" sz="1050" b="1" dirty="0">
-              <a:latin typeface="IBM Plex Sans JP" panose="020B0503050203000203" pitchFamily="50" charset="-128"/>
+              <a:latin typeface="Jost" pitchFamily="2" charset="0"/>
               <a:ea typeface="IBM Plex Sans JP" panose="020B0503050203000203" pitchFamily="50" charset="-128"/>
             </a:endParaRPr>
           </a:p>
@@ -4568,7 +4581,7 @@
         <p:spPr>
           <a:xfrm>
             <a:off x="770844" y="4494466"/>
-            <a:ext cx="3389069" cy="400110"/>
+            <a:ext cx="3118161" cy="400110"/>
           </a:xfrm>
           <a:prstGeom prst="rect">
             <a:avLst/>
@@ -4583,13 +4596,13 @@
           <a:p>
             <a:r>
               <a:rPr lang="en-US" altLang="ja-JP" sz="2000" dirty="0">
-                <a:latin typeface="IBM Plex Sans JP SemiBold" panose="020B0703050203000203" pitchFamily="50" charset="-128"/>
-                <a:ea typeface="IBM Plex Sans JP SemiBold" panose="020B0703050203000203" pitchFamily="50" charset="-128"/>
+                <a:latin typeface="Jost" pitchFamily="2" charset="0"/>
+                <a:ea typeface="Jost" pitchFamily="2" charset="0"/>
               </a:rPr>
               <a:t>2. How to Choose a Model</a:t>
             </a:r>
             <a:endParaRPr kumimoji="1" lang="ja-JP" altLang="en-US" sz="2400" b="1" dirty="0">
-              <a:latin typeface="IBM Plex Sans JP SemiBold" panose="020B0703050203000203" pitchFamily="50" charset="-128"/>
+              <a:latin typeface="Jost" pitchFamily="2" charset="0"/>
               <a:ea typeface="IBM Plex Sans JP SemiBold" panose="020B0703050203000203" pitchFamily="50" charset="-128"/>
             </a:endParaRPr>
           </a:p>
@@ -4625,13 +4638,13 @@
           <a:p>
             <a:r>
               <a:rPr lang="en-US" altLang="ja-JP" sz="1050" dirty="0">
-                <a:latin typeface="IBM Plex Sans JP" panose="020B0503050203000203" pitchFamily="50" charset="-128"/>
-                <a:ea typeface="IBM Plex Sans JP" panose="020B0503050203000203" pitchFamily="50" charset="-128"/>
+                <a:latin typeface="Jost" pitchFamily="2" charset="0"/>
+                <a:ea typeface="Jost" pitchFamily="2" charset="0"/>
               </a:rPr>
               <a:t>First, follow this quick selection flow to download and print the correct data.</a:t>
             </a:r>
             <a:endParaRPr kumimoji="1" lang="ja-JP" altLang="en-US" sz="1050" b="1" dirty="0">
-              <a:latin typeface="IBM Plex Sans JP" panose="020B0503050203000203" pitchFamily="50" charset="-128"/>
+              <a:latin typeface="Jost" pitchFamily="2" charset="0"/>
               <a:ea typeface="IBM Plex Sans JP" panose="020B0503050203000203" pitchFamily="50" charset="-128"/>
             </a:endParaRPr>
           </a:p>
@@ -4667,8 +4680,8 @@
           <a:p>
             <a:r>
               <a:rPr lang="en-US" altLang="ja-JP" sz="1050" dirty="0">
-                <a:latin typeface="IBM Plex Sans JP" panose="020B0503050203000203" pitchFamily="50" charset="-128"/>
-                <a:ea typeface="IBM Plex Sans JP" panose="020B0503050203000203" pitchFamily="50" charset="-128"/>
+                <a:latin typeface="Jost" pitchFamily="2" charset="0"/>
+                <a:ea typeface="Jost" pitchFamily="2" charset="0"/>
               </a:rPr>
               <a:t>When choosing a model, start by deciding what kind of filament you want to create.</a:t>
             </a:r>
@@ -4705,17 +4718,45 @@
           <a:p>
             <a:r>
               <a:rPr lang="en-US" altLang="ja-JP" sz="1000" dirty="0">
-                <a:latin typeface="IBM Plex Sans JP" panose="020B0503050203000203" pitchFamily="50" charset="-128"/>
-                <a:ea typeface="IBM Plex Sans JP" panose="020B0503050203000203" pitchFamily="50" charset="-128"/>
-              </a:rPr>
-              <a:t>1. Select a Series: Blend Filament for mixed colors, Gradient Filament for color changes.</a:t>
-            </a:r>
-          </a:p>
-          <a:p>
+                <a:latin typeface="Jost" pitchFamily="2" charset="0"/>
+                <a:ea typeface="Jost" pitchFamily="2" charset="0"/>
+              </a:rPr>
+              <a:t>1. Select a Series: </a:t>
+            </a:r>
             <a:r>
               <a:rPr lang="en-US" altLang="ja-JP" sz="1000" dirty="0">
-                <a:latin typeface="IBM Plex Sans JP" panose="020B0503050203000203" pitchFamily="50" charset="-128"/>
-                <a:ea typeface="IBM Plex Sans JP" panose="020B0503050203000203" pitchFamily="50" charset="-128"/>
+                <a:latin typeface="Jost Medium" pitchFamily="2" charset="0"/>
+                <a:ea typeface="Jost Medium" pitchFamily="2" charset="0"/>
+              </a:rPr>
+              <a:t>Blend Filament</a:t>
+            </a:r>
+            <a:r>
+              <a:rPr lang="en-US" altLang="ja-JP" sz="1000" dirty="0">
+                <a:latin typeface="Jost" pitchFamily="2" charset="0"/>
+                <a:ea typeface="Jost" pitchFamily="2" charset="0"/>
+              </a:rPr>
+              <a:t> for mixed colors, </a:t>
+            </a:r>
+            <a:r>
+              <a:rPr lang="en-US" altLang="ja-JP" sz="1000" dirty="0">
+                <a:latin typeface="Jost Medium" pitchFamily="2" charset="0"/>
+                <a:ea typeface="Jost Medium" pitchFamily="2" charset="0"/>
+              </a:rPr>
+              <a:t>Gradient Filament</a:t>
+            </a:r>
+            <a:r>
+              <a:rPr lang="en-US" altLang="ja-JP" sz="1000" dirty="0">
+                <a:latin typeface="Jost" pitchFamily="2" charset="0"/>
+                <a:ea typeface="Jost" pitchFamily="2" charset="0"/>
+              </a:rPr>
+              <a:t> for color changes.</a:t>
+            </a:r>
+          </a:p>
+          <a:p>
+            <a:r>
+              <a:rPr lang="en-US" altLang="ja-JP" sz="1000" dirty="0">
+                <a:latin typeface="Jost" pitchFamily="2" charset="0"/>
+                <a:ea typeface="Jost" pitchFamily="2" charset="0"/>
               </a:rPr>
               <a:t>2. Select a Model size: Use an S4 Model for small objects, or an M1 Model for larger prints </a:t>
             </a:r>
@@ -4723,8 +4764,8 @@
           <a:p>
             <a:r>
               <a:rPr lang="en-US" altLang="ja-JP" sz="1000" dirty="0">
-                <a:latin typeface="IBM Plex Sans JP" panose="020B0503050203000203" pitchFamily="50" charset="-128"/>
-                <a:ea typeface="IBM Plex Sans JP" panose="020B0503050203000203" pitchFamily="50" charset="-128"/>
+                <a:latin typeface="Jost" pitchFamily="2" charset="0"/>
+                <a:ea typeface="Jost" pitchFamily="2" charset="0"/>
               </a:rPr>
               <a:t>     requiring around 70g of filament.</a:t>
             </a:r>
@@ -4732,8 +4773,8 @@
           <a:p>
             <a:r>
               <a:rPr lang="en-US" altLang="ja-JP" sz="1000" dirty="0">
-                <a:latin typeface="IBM Plex Sans JP" panose="020B0503050203000203" pitchFamily="50" charset="-128"/>
-                <a:ea typeface="IBM Plex Sans JP" panose="020B0503050203000203" pitchFamily="50" charset="-128"/>
+                <a:latin typeface="Jost" pitchFamily="2" charset="0"/>
+                <a:ea typeface="Jost" pitchFamily="2" charset="0"/>
               </a:rPr>
               <a:t>3. Select a Profile and Plate: Choose the Plate that matches your desired mixing ratio or </a:t>
             </a:r>
@@ -4741,8 +4782,8 @@
           <a:p>
             <a:r>
               <a:rPr lang="en-US" altLang="ja-JP" sz="1000" dirty="0">
-                <a:latin typeface="IBM Plex Sans JP" panose="020B0503050203000203" pitchFamily="50" charset="-128"/>
-                <a:ea typeface="IBM Plex Sans JP" panose="020B0503050203000203" pitchFamily="50" charset="-128"/>
+                <a:latin typeface="Jost" pitchFamily="2" charset="0"/>
+                <a:ea typeface="Jost" pitchFamily="2" charset="0"/>
               </a:rPr>
               <a:t>     pattern.</a:t>
             </a:r>
@@ -4750,8 +4791,8 @@
           <a:p>
             <a:r>
               <a:rPr lang="en-US" altLang="ja-JP" sz="1000" dirty="0">
-                <a:latin typeface="IBM Plex Sans JP" panose="020B0503050203000203" pitchFamily="50" charset="-128"/>
-                <a:ea typeface="IBM Plex Sans JP" panose="020B0503050203000203" pitchFamily="50" charset="-128"/>
+                <a:latin typeface="Jost" pitchFamily="2" charset="0"/>
+                <a:ea typeface="Jost" pitchFamily="2" charset="0"/>
               </a:rPr>
               <a:t>4. Assign filaments and slice: Use filaments with the same or similar material, assign </a:t>
             </a:r>
@@ -4759,13 +4800,13 @@
           <a:p>
             <a:r>
               <a:rPr lang="en-US" altLang="ja-JP" sz="1000" dirty="0">
-                <a:latin typeface="IBM Plex Sans JP" panose="020B0503050203000203" pitchFamily="50" charset="-128"/>
-                <a:ea typeface="IBM Plex Sans JP" panose="020B0503050203000203" pitchFamily="50" charset="-128"/>
+                <a:latin typeface="Jost" pitchFamily="2" charset="0"/>
+                <a:ea typeface="Jost" pitchFamily="2" charset="0"/>
               </a:rPr>
               <a:t>     them, slice the model, and read the print notes before printing.</a:t>
             </a:r>
             <a:endParaRPr kumimoji="1" lang="ja-JP" altLang="en-US" sz="900" b="1" dirty="0">
-              <a:latin typeface="IBM Plex Sans JP Light" panose="020B0403050203000203" pitchFamily="50" charset="-128"/>
+              <a:latin typeface="Jost" pitchFamily="2" charset="0"/>
               <a:ea typeface="IBM Plex Sans JP Light" panose="020B0403050203000203" pitchFamily="50" charset="-128"/>
             </a:endParaRPr>
           </a:p>
@@ -4801,28 +4842,28 @@
           <a:p>
             <a:r>
               <a:rPr lang="en-US" altLang="ja-JP" sz="900" dirty="0">
-                <a:latin typeface="IBM Plex Sans JP Light" panose="020B0403050203000203" pitchFamily="50" charset="-128"/>
-                <a:ea typeface="IBM Plex Sans JP Light" panose="020B0403050203000203" pitchFamily="50" charset="-128"/>
+                <a:latin typeface="Jost" pitchFamily="2" charset="0"/>
+                <a:ea typeface="Jost" pitchFamily="2" charset="0"/>
               </a:rPr>
               <a:t>*Note: In </a:t>
             </a:r>
             <a:r>
               <a:rPr lang="en-US" altLang="ja-JP" sz="900" dirty="0">
-                <a:latin typeface="Segoe UI" panose="020B0502040204020203" pitchFamily="34" charset="0"/>
-                <a:ea typeface="IBM Plex Sans JP Light" panose="020B0403050203000203" pitchFamily="50" charset="-128"/>
+                <a:latin typeface="Jost SemiBold" pitchFamily="2" charset="0"/>
+                <a:ea typeface="Jost SemiBold" pitchFamily="2" charset="0"/>
                 <a:cs typeface="Segoe UI" panose="020B0502040204020203" pitchFamily="34" charset="0"/>
               </a:rPr>
               <a:t>FlexChroma</a:t>
             </a:r>
             <a:r>
               <a:rPr lang="en-US" altLang="ja-JP" sz="900" dirty="0">
-                <a:latin typeface="IBM Plex Sans JP Light" panose="020B0403050203000203" pitchFamily="50" charset="-128"/>
-                <a:ea typeface="IBM Plex Sans JP Light" panose="020B0403050203000203" pitchFamily="50" charset="-128"/>
+                <a:latin typeface="Jost" pitchFamily="2" charset="0"/>
+                <a:ea typeface="Jost" pitchFamily="2" charset="0"/>
               </a:rPr>
               <a:t>, “Profile” means a purpose-based classification, not different print settings.</a:t>
             </a:r>
             <a:endParaRPr kumimoji="1" lang="ja-JP" altLang="en-US" sz="900" b="1" dirty="0">
-              <a:latin typeface="IBM Plex Sans JP Light" panose="020B0403050203000203" pitchFamily="50" charset="-128"/>
+              <a:latin typeface="Jost" pitchFamily="2" charset="0"/>
               <a:ea typeface="IBM Plex Sans JP Light" panose="020B0403050203000203" pitchFamily="50" charset="-128"/>
             </a:endParaRPr>
           </a:p>
@@ -4842,7 +4883,7 @@
         </p:nvGrpSpPr>
         <p:grpSpPr>
           <a:xfrm>
-            <a:off x="1042026" y="441445"/>
+            <a:off x="1054218" y="441445"/>
             <a:ext cx="4781214" cy="377792"/>
             <a:chOff x="1042026" y="430737"/>
             <a:chExt cx="4781214" cy="377792"/>
@@ -4961,7 +5002,7 @@
         </p:nvGrpSpPr>
         <p:grpSpPr>
           <a:xfrm rot="10800000">
-            <a:off x="1042026" y="2224673"/>
+            <a:off x="1054218" y="2224673"/>
             <a:ext cx="4781214" cy="377792"/>
             <a:chOff x="1042026" y="430737"/>
             <a:chExt cx="4781214" cy="377792"/>
@@ -5081,7 +5122,7 @@
         <p:spPr>
           <a:xfrm>
             <a:off x="1515655" y="1444411"/>
-            <a:ext cx="3826689" cy="338554"/>
+            <a:ext cx="3448380" cy="338554"/>
           </a:xfrm>
           <a:prstGeom prst="rect">
             <a:avLst/>
@@ -5096,28 +5137,28 @@
           <a:p>
             <a:r>
               <a:rPr lang="en-US" altLang="ja-JP" sz="1600" dirty="0">
-                <a:latin typeface="IBM Plex Sans JP" panose="020B0503050203000203" pitchFamily="50" charset="-128"/>
-                <a:ea typeface="IBM Plex Sans JP" panose="020B0503050203000203" pitchFamily="50" charset="-128"/>
+                <a:latin typeface="Jost" pitchFamily="2" charset="0"/>
+                <a:ea typeface="Jost" pitchFamily="2" charset="0"/>
               </a:rPr>
               <a:t>- Let's Explore </a:t>
             </a:r>
             <a:r>
               <a:rPr lang="en-US" altLang="ja-JP" sz="1600" dirty="0">
-                <a:latin typeface="Segoe UI Semibold" panose="020B0702040204020203" pitchFamily="34" charset="0"/>
-                <a:ea typeface="IBM Plex Sans JP" panose="020B0503050203000203" pitchFamily="50" charset="-128"/>
+                <a:latin typeface="Jost SemiBold" pitchFamily="2" charset="0"/>
+                <a:ea typeface="Jost SemiBold" pitchFamily="2" charset="0"/>
                 <a:cs typeface="Segoe UI Semibold" panose="020B0702040204020203" pitchFamily="34" charset="0"/>
               </a:rPr>
               <a:t>FlexChroma</a:t>
             </a:r>
             <a:r>
               <a:rPr lang="en-US" altLang="ja-JP" sz="1600" dirty="0">
-                <a:latin typeface="IBM Plex Sans JP" panose="020B0503050203000203" pitchFamily="50" charset="-128"/>
-                <a:ea typeface="IBM Plex Sans JP" panose="020B0503050203000203" pitchFamily="50" charset="-128"/>
+                <a:latin typeface="Jost" pitchFamily="2" charset="0"/>
+                <a:ea typeface="Jost" pitchFamily="2" charset="0"/>
               </a:rPr>
               <a:t>'s Models -</a:t>
             </a:r>
             <a:endParaRPr kumimoji="1" lang="ja-JP" altLang="en-US" sz="1600" dirty="0">
-              <a:latin typeface="IBM Plex Sans JP" panose="020B0503050203000203" pitchFamily="50" charset="-128"/>
+              <a:latin typeface="Jost" pitchFamily="2" charset="0"/>
               <a:ea typeface="IBM Plex Sans JP" panose="020B0503050203000203" pitchFamily="50" charset="-128"/>
             </a:endParaRPr>
           </a:p>
@@ -5138,7 +5179,7 @@
         <p:spPr>
           <a:xfrm>
             <a:off x="2381276" y="1883364"/>
-            <a:ext cx="1790875" cy="307777"/>
+            <a:ext cx="1737976" cy="307777"/>
           </a:xfrm>
           <a:prstGeom prst="rect">
             <a:avLst/>
@@ -5153,13 +5194,13 @@
           <a:p>
             <a:r>
               <a:rPr lang="en-US" altLang="ja-JP" sz="1400" dirty="0">
-                <a:latin typeface="IBM Plex Sans JP" panose="020B0503050203000203" pitchFamily="50" charset="-128"/>
-                <a:ea typeface="IBM Plex Sans JP" panose="020B0503050203000203" pitchFamily="50" charset="-128"/>
-              </a:rPr>
-              <a:t>Ver.1.11  2026.8.8</a:t>
+                <a:latin typeface="Jost" pitchFamily="2" charset="0"/>
+                <a:ea typeface="Jost" pitchFamily="2" charset="0"/>
+              </a:rPr>
+              <a:t>Ver.1.12  2026.9.16</a:t>
             </a:r>
             <a:endParaRPr kumimoji="1" lang="ja-JP" altLang="en-US" sz="1400" dirty="0">
-              <a:latin typeface="IBM Plex Sans JP" panose="020B0503050203000203" pitchFamily="50" charset="-128"/>
+              <a:latin typeface="Jost" pitchFamily="2" charset="0"/>
               <a:ea typeface="IBM Plex Sans JP" panose="020B0503050203000203" pitchFamily="50" charset="-128"/>
             </a:endParaRPr>
           </a:p>
@@ -5226,8 +5267,8 @@
         </p:nvSpPr>
         <p:spPr>
           <a:xfrm>
-            <a:off x="1398979" y="840586"/>
-            <a:ext cx="4701543" cy="584775"/>
+            <a:off x="1484323" y="840586"/>
+            <a:ext cx="4395755" cy="584775"/>
           </a:xfrm>
           <a:prstGeom prst="rect">
             <a:avLst/>
@@ -5241,29 +5282,29 @@
           <a:lstStyle/>
           <a:p>
             <a:r>
-              <a:rPr lang="en-US" altLang="ja-JP" sz="3200" b="1" dirty="0">
-                <a:latin typeface="Segoe UI Semibold" panose="020B0702040204020203" pitchFamily="34" charset="0"/>
-                <a:ea typeface="IBM Plex Sans JP" panose="020B0503050203000203" pitchFamily="50" charset="-128"/>
+              <a:rPr lang="en-US" altLang="ja-JP" sz="3200" dirty="0">
+                <a:latin typeface="Jost SemiBold" pitchFamily="2" charset="0"/>
+                <a:ea typeface="Jost SemiBold" pitchFamily="2" charset="0"/>
                 <a:cs typeface="Segoe UI Semibold" panose="020B0702040204020203" pitchFamily="34" charset="0"/>
               </a:rPr>
               <a:t>FlexChroma</a:t>
             </a:r>
             <a:r>
-              <a:rPr lang="en-US" altLang="ja-JP" sz="3200" b="1" dirty="0">
-                <a:latin typeface="IBM Plex Sans JP" panose="020B0503050203000203" pitchFamily="50" charset="-128"/>
-                <a:ea typeface="IBM Plex Sans JP" panose="020B0503050203000203" pitchFamily="50" charset="-128"/>
+              <a:rPr lang="en-US" altLang="ja-JP" sz="3200" dirty="0">
+                <a:latin typeface="Jost Medium" pitchFamily="2" charset="0"/>
+                <a:ea typeface="Jost Medium" pitchFamily="2" charset="0"/>
               </a:rPr>
               <a:t> </a:t>
             </a:r>
             <a:r>
-              <a:rPr lang="en-US" altLang="ja-JP" sz="3000" b="1" dirty="0">
-                <a:latin typeface="IBM Plex Sans JP" panose="020B0503050203000203" pitchFamily="50" charset="-128"/>
-                <a:ea typeface="IBM Plex Sans JP" panose="020B0503050203000203" pitchFamily="50" charset="-128"/>
+              <a:rPr lang="en-US" altLang="ja-JP" sz="3000" dirty="0">
+                <a:latin typeface="Jost Medium" pitchFamily="2" charset="0"/>
+                <a:ea typeface="Jost Medium" pitchFamily="2" charset="0"/>
               </a:rPr>
               <a:t>Tour Guide</a:t>
             </a:r>
-            <a:endParaRPr kumimoji="1" lang="ja-JP" altLang="en-US" sz="3000" b="1" dirty="0">
-              <a:latin typeface="IBM Plex Sans JP" panose="020B0503050203000203" pitchFamily="50" charset="-128"/>
+            <a:endParaRPr kumimoji="1" lang="ja-JP" altLang="en-US" sz="3000" dirty="0">
+              <a:latin typeface="Jost Medium" pitchFamily="2" charset="0"/>
               <a:ea typeface="IBM Plex Sans JP" panose="020B0503050203000203" pitchFamily="50" charset="-128"/>
             </a:endParaRPr>
           </a:p>
@@ -5297,7 +5338,7 @@
         </p:blipFill>
         <p:spPr>
           <a:xfrm>
-            <a:off x="1051920" y="905041"/>
+            <a:off x="1076304" y="905041"/>
             <a:ext cx="406869" cy="392227"/>
           </a:xfrm>
           <a:prstGeom prst="rect">
@@ -5355,8 +5396,8 @@
         </p:nvSpPr>
         <p:spPr>
           <a:xfrm>
-            <a:off x="0" y="0"/>
-            <a:ext cx="6858000" cy="9144000"/>
+            <a:off x="67565" y="90087"/>
+            <a:ext cx="6722870" cy="8963827"/>
           </a:xfrm>
           <a:prstGeom prst="rect">
             <a:avLst/>
@@ -5418,7 +5459,7 @@
         </p:nvSpPr>
         <p:spPr>
           <a:xfrm>
-            <a:off x="7269" y="0"/>
+            <a:off x="-7269" y="-1"/>
             <a:ext cx="6858000" cy="9144000"/>
           </a:xfrm>
           <a:prstGeom prst="rect">
@@ -5735,7 +5776,7 @@
         </p:nvSpPr>
         <p:spPr>
           <a:xfrm>
-            <a:off x="554537" y="452468"/>
+            <a:off x="554537" y="440276"/>
             <a:ext cx="5756193" cy="54000"/>
           </a:xfrm>
           <a:prstGeom prst="rect">
@@ -5889,10 +5930,15 @@
           <a:p>
             <a:pPr algn="ctr"/>
             <a:r>
-              <a:rPr kumimoji="1" lang="en-US" altLang="ja-JP" dirty="0"/>
+              <a:rPr kumimoji="1" lang="en-US" altLang="ja-JP" dirty="0">
+                <a:latin typeface="Jost" pitchFamily="2" charset="0"/>
+                <a:ea typeface="Jost" pitchFamily="2" charset="0"/>
+              </a:rPr>
               <a:t>2</a:t>
             </a:r>
-            <a:endParaRPr kumimoji="1" lang="ja-JP" altLang="en-US" dirty="0"/>
+            <a:endParaRPr kumimoji="1" lang="ja-JP" altLang="en-US" dirty="0">
+              <a:latin typeface="Jost" pitchFamily="2" charset="0"/>
+            </a:endParaRPr>
           </a:p>
         </p:txBody>
       </p:sp>
@@ -6003,7 +6049,7 @@
         <p:spPr>
           <a:xfrm>
             <a:off x="770844" y="610017"/>
-            <a:ext cx="2613216" cy="400110"/>
+            <a:ext cx="2411238" cy="400110"/>
           </a:xfrm>
           <a:prstGeom prst="rect">
             <a:avLst/>
@@ -6018,13 +6064,13 @@
           <a:p>
             <a:r>
               <a:rPr lang="en-US" altLang="ja-JP" sz="2000" dirty="0">
-                <a:latin typeface="IBM Plex Sans JP SemiBold" panose="020B0703050203000203" pitchFamily="50" charset="-128"/>
-                <a:ea typeface="IBM Plex Sans JP SemiBold" panose="020B0703050203000203" pitchFamily="50" charset="-128"/>
+                <a:latin typeface="Jost Medium" pitchFamily="2" charset="0"/>
+                <a:ea typeface="Jost Medium" pitchFamily="2" charset="0"/>
               </a:rPr>
               <a:t>3. FlexChroma HUB</a:t>
             </a:r>
             <a:endParaRPr kumimoji="1" lang="ja-JP" altLang="en-US" sz="2400" b="1" dirty="0">
-              <a:latin typeface="IBM Plex Sans JP SemiBold" panose="020B0703050203000203" pitchFamily="50" charset="-128"/>
+              <a:latin typeface="Jost Medium" pitchFamily="2" charset="0"/>
               <a:ea typeface="IBM Plex Sans JP SemiBold" panose="020B0703050203000203" pitchFamily="50" charset="-128"/>
             </a:endParaRPr>
           </a:p>
@@ -6060,28 +6106,36 @@
           <a:p>
             <a:r>
               <a:rPr lang="en-US" altLang="ja-JP" sz="1000" dirty="0">
-                <a:latin typeface="IBM Plex Sans JP" panose="020B0503050203000203" pitchFamily="50" charset="-128"/>
-                <a:ea typeface="IBM Plex Sans JP" panose="020B0503050203000203" pitchFamily="50" charset="-128"/>
+                <a:latin typeface="Jost" pitchFamily="2" charset="0"/>
+                <a:ea typeface="Jost" pitchFamily="2" charset="0"/>
               </a:rPr>
               <a:t>The </a:t>
             </a:r>
             <a:r>
               <a:rPr lang="en-US" altLang="ja-JP" sz="1000" dirty="0">
-                <a:latin typeface="Segoe UI Semibold" panose="020B0702040204020203" pitchFamily="34" charset="0"/>
-                <a:ea typeface="IBM Plex Sans JP" panose="020B0503050203000203" pitchFamily="50" charset="-128"/>
+                <a:latin typeface="Jost SemiBold" pitchFamily="2" charset="0"/>
+                <a:ea typeface="Jost SemiBold" pitchFamily="2" charset="0"/>
                 <a:cs typeface="Segoe UI Semibold" panose="020B0702040204020203" pitchFamily="34" charset="0"/>
               </a:rPr>
-              <a:t>FlexChroma HUB </a:t>
+              <a:t>FlexChroma</a:t>
             </a:r>
             <a:r>
               <a:rPr lang="en-US" altLang="ja-JP" sz="1000" dirty="0">
-                <a:latin typeface="IBM Plex Sans JP" panose="020B0503050203000203" pitchFamily="50" charset="-128"/>
-                <a:ea typeface="IBM Plex Sans JP" panose="020B0503050203000203" pitchFamily="50" charset="-128"/>
+                <a:latin typeface="Jost" pitchFamily="2" charset="0"/>
+                <a:ea typeface="Jost" pitchFamily="2" charset="0"/>
+                <a:cs typeface="Segoe UI Semibold" panose="020B0702040204020203" pitchFamily="34" charset="0"/>
+              </a:rPr>
+              <a:t> HUB </a:t>
+            </a:r>
+            <a:r>
+              <a:rPr lang="en-US" altLang="ja-JP" sz="1000" dirty="0">
+                <a:latin typeface="Jost" pitchFamily="2" charset="0"/>
+                <a:ea typeface="Jost" pitchFamily="2" charset="0"/>
               </a:rPr>
               <a:t>is the main entry point on MakerWorld, providing access to all Series and external portals. If you are unsure where to start, open this model first.</a:t>
             </a:r>
             <a:endParaRPr kumimoji="1" lang="ja-JP" altLang="en-US" sz="500" b="1" dirty="0">
-              <a:latin typeface="IBM Plex Sans JP" panose="020B0503050203000203" pitchFamily="50" charset="-128"/>
+              <a:latin typeface="Jost" pitchFamily="2" charset="0"/>
               <a:ea typeface="IBM Plex Sans JP" panose="020B0503050203000203" pitchFamily="50" charset="-128"/>
             </a:endParaRPr>
           </a:p>
@@ -6102,7 +6156,7 @@
         <p:spPr>
           <a:xfrm>
             <a:off x="770844" y="2482749"/>
-            <a:ext cx="2379177" cy="400110"/>
+            <a:ext cx="2153154" cy="400110"/>
           </a:xfrm>
           <a:prstGeom prst="rect">
             <a:avLst/>
@@ -6117,13 +6171,20 @@
           <a:p>
             <a:r>
               <a:rPr lang="en-US" altLang="ja-JP" sz="2000" dirty="0">
-                <a:latin typeface="IBM Plex Sans JP SemiBold" panose="020B0703050203000203" pitchFamily="50" charset="-128"/>
-                <a:ea typeface="IBM Plex Sans JP SemiBold" panose="020B0703050203000203" pitchFamily="50" charset="-128"/>
-              </a:rPr>
-              <a:t>4. Blend Filament</a:t>
+                <a:latin typeface="Jost" pitchFamily="2" charset="0"/>
+                <a:ea typeface="Jost" pitchFamily="2" charset="0"/>
+              </a:rPr>
+              <a:t>4. </a:t>
+            </a:r>
+            <a:r>
+              <a:rPr lang="en-US" altLang="ja-JP" sz="2000" dirty="0">
+                <a:latin typeface="Jost Medium" pitchFamily="2" charset="0"/>
+                <a:ea typeface="Jost Medium" pitchFamily="2" charset="0"/>
+              </a:rPr>
+              <a:t>Blend Filament</a:t>
             </a:r>
             <a:endParaRPr kumimoji="1" lang="ja-JP" altLang="en-US" sz="2800" b="1" dirty="0">
-              <a:latin typeface="IBM Plex Sans JP SemiBold" panose="020B0703050203000203" pitchFamily="50" charset="-128"/>
+              <a:latin typeface="Jost Medium" pitchFamily="2" charset="0"/>
               <a:ea typeface="IBM Plex Sans JP SemiBold" panose="020B0703050203000203" pitchFamily="50" charset="-128"/>
             </a:endParaRPr>
           </a:p>
@@ -6159,44 +6220,72 @@
           <a:p>
             <a:r>
               <a:rPr lang="en-US" altLang="ja-JP" sz="1000" dirty="0">
-                <a:latin typeface="IBM Plex Sans JP" panose="020B0503050203000203" pitchFamily="50" charset="-128"/>
-                <a:ea typeface="IBM Plex Sans JP" panose="020B0503050203000203" pitchFamily="50" charset="-128"/>
-              </a:rPr>
-              <a:t>The Blend Filament Series is the most basic FlexChroma lineup. It allows you to mix two filaments at various ratios to create your own custom color.</a:t>
-            </a:r>
-          </a:p>
-          <a:p>
+                <a:latin typeface="Jost" pitchFamily="2" charset="0"/>
+                <a:ea typeface="Jost" pitchFamily="2" charset="0"/>
+              </a:rPr>
+              <a:t>The </a:t>
+            </a:r>
             <a:r>
               <a:rPr lang="en-US" altLang="ja-JP" sz="1000" dirty="0">
-                <a:latin typeface="IBM Plex Sans JP" panose="020B0503050203000203" pitchFamily="50" charset="-128"/>
-                <a:ea typeface="IBM Plex Sans JP" panose="020B0503050203000203" pitchFamily="50" charset="-128"/>
+                <a:latin typeface="Jost Medium" pitchFamily="2" charset="0"/>
+                <a:ea typeface="Jost Medium" pitchFamily="2" charset="0"/>
+              </a:rPr>
+              <a:t>Blend Filament</a:t>
+            </a:r>
+            <a:r>
+              <a:rPr lang="en-US" altLang="ja-JP" sz="1000" dirty="0">
+                <a:latin typeface="Jost" pitchFamily="2" charset="0"/>
+                <a:ea typeface="Jost" pitchFamily="2" charset="0"/>
+              </a:rPr>
+              <a:t> Series is the most basic </a:t>
+            </a:r>
+            <a:r>
+              <a:rPr lang="en-US" altLang="ja-JP" sz="1000" dirty="0">
+                <a:latin typeface="Jost SemiBold" pitchFamily="2" charset="0"/>
+                <a:ea typeface="Jost SemiBold" pitchFamily="2" charset="0"/>
+              </a:rPr>
+              <a:t>FlexChroma</a:t>
+            </a:r>
+            <a:r>
+              <a:rPr lang="en-US" altLang="ja-JP" sz="1000" dirty="0">
+                <a:latin typeface="Jost" pitchFamily="2" charset="0"/>
+                <a:ea typeface="Jost" pitchFamily="2" charset="0"/>
+              </a:rPr>
+              <a:t> lineup. It allows you to mix two filaments at various ratios to create your own custom color.</a:t>
+            </a:r>
+          </a:p>
+          <a:p>
+            <a:r>
+              <a:rPr lang="en-US" altLang="ja-JP" sz="1000" dirty="0">
+                <a:latin typeface="Jost" pitchFamily="2" charset="0"/>
+                <a:ea typeface="Jost" pitchFamily="2" charset="0"/>
               </a:rPr>
               <a:t>Each model supports blend ratios from 50% to 99.5</a:t>
             </a:r>
             <a:r>
               <a:rPr lang="en-US" altLang="ja-JP" sz="1000" b="1" dirty="0">
-                <a:latin typeface="IBM Plex Sans JP" panose="020B0503050203000203" pitchFamily="50" charset="-128"/>
-                <a:ea typeface="IBM Plex Sans JP" panose="020B0503050203000203" pitchFamily="50" charset="-128"/>
+                <a:latin typeface="Jost" pitchFamily="2" charset="0"/>
+                <a:ea typeface="Jost" pitchFamily="2" charset="0"/>
               </a:rPr>
               <a:t>%. For ratios below 50%, simply swap Filament A and Filament B.</a:t>
             </a:r>
           </a:p>
           <a:p>
             <a:endParaRPr lang="en-US" altLang="ja-JP" sz="600" dirty="0">
-              <a:latin typeface="IBM Plex Sans JP" panose="020B0503050203000203" pitchFamily="50" charset="-128"/>
-              <a:ea typeface="IBM Plex Sans JP" panose="020B0503050203000203" pitchFamily="50" charset="-128"/>
+              <a:latin typeface="Jost" pitchFamily="2" charset="0"/>
+              <a:ea typeface="Jost" pitchFamily="2" charset="0"/>
             </a:endParaRPr>
           </a:p>
           <a:p>
             <a:r>
               <a:rPr lang="en-US" altLang="ja-JP" sz="1000" dirty="0">
-                <a:latin typeface="IBM Plex Sans JP" panose="020B0503050203000203" pitchFamily="50" charset="-128"/>
-                <a:ea typeface="IBM Plex Sans JP" panose="020B0503050203000203" pitchFamily="50" charset="-128"/>
+                <a:latin typeface="Jost" pitchFamily="2" charset="0"/>
+                <a:ea typeface="Jost" pitchFamily="2" charset="0"/>
               </a:rPr>
               <a:t>Example: To create a filament with 25% cyan mixed into yellow, read the Plate value as the ratio of Filament A, interpret it as 75% yellow, and slice the model accordingly.</a:t>
             </a:r>
             <a:endParaRPr kumimoji="1" lang="ja-JP" altLang="en-US" sz="1000" b="1" dirty="0">
-              <a:latin typeface="IBM Plex Sans JP" panose="020B0503050203000203" pitchFamily="50" charset="-128"/>
+              <a:latin typeface="Jost" pitchFamily="2" charset="0"/>
               <a:ea typeface="IBM Plex Sans JP" panose="020B0503050203000203" pitchFamily="50" charset="-128"/>
             </a:endParaRPr>
           </a:p>
@@ -6232,10 +6321,24 @@
           <a:p>
             <a:r>
               <a:rPr lang="en-US" altLang="ja-JP" sz="1000" dirty="0">
-                <a:latin typeface="IBM Plex Sans JP" panose="020B0503050203000203" pitchFamily="50" charset="-128"/>
-                <a:ea typeface="IBM Plex Sans JP" panose="020B0503050203000203" pitchFamily="50" charset="-128"/>
-              </a:rPr>
-              <a:t>The following is the model configuration for Blend Filament.</a:t>
+                <a:latin typeface="Jost" pitchFamily="2" charset="0"/>
+                <a:ea typeface="Jost" pitchFamily="2" charset="0"/>
+              </a:rPr>
+              <a:t>The following is the model configuration for </a:t>
+            </a:r>
+            <a:r>
+              <a:rPr lang="en-US" altLang="ja-JP" sz="1000" dirty="0">
+                <a:latin typeface="Jost Medium" pitchFamily="2" charset="0"/>
+                <a:ea typeface="Jost Medium" pitchFamily="2" charset="0"/>
+              </a:rPr>
+              <a:t>Blend Filament</a:t>
+            </a:r>
+            <a:r>
+              <a:rPr lang="en-US" altLang="ja-JP" sz="1000" dirty="0">
+                <a:latin typeface="Jost" pitchFamily="2" charset="0"/>
+                <a:ea typeface="Jost" pitchFamily="2" charset="0"/>
+              </a:rPr>
+              <a:t>.</a:t>
             </a:r>
           </a:p>
         </p:txBody>
@@ -6811,7 +6914,7 @@
         </p:nvSpPr>
         <p:spPr>
           <a:xfrm>
-            <a:off x="554537" y="452468"/>
+            <a:off x="554537" y="440276"/>
             <a:ext cx="5756193" cy="54000"/>
           </a:xfrm>
           <a:prstGeom prst="rect">
@@ -6965,10 +7068,15 @@
           <a:p>
             <a:pPr algn="ctr"/>
             <a:r>
-              <a:rPr kumimoji="1" lang="en-US" altLang="ja-JP" dirty="0"/>
+              <a:rPr kumimoji="1" lang="en-US" altLang="ja-JP" dirty="0">
+                <a:latin typeface="Jost" pitchFamily="2" charset="0"/>
+                <a:ea typeface="Jost" pitchFamily="2" charset="0"/>
+              </a:rPr>
               <a:t>3</a:t>
             </a:r>
-            <a:endParaRPr kumimoji="1" lang="ja-JP" altLang="en-US" dirty="0"/>
+            <a:endParaRPr kumimoji="1" lang="ja-JP" altLang="en-US" dirty="0">
+              <a:latin typeface="Jost" pitchFamily="2" charset="0"/>
+            </a:endParaRPr>
           </a:p>
         </p:txBody>
       </p:sp>
@@ -7033,7 +7141,7 @@
         <p:spPr>
           <a:xfrm>
             <a:off x="770844" y="610017"/>
-            <a:ext cx="2739853" cy="400110"/>
+            <a:ext cx="2497800" cy="400110"/>
           </a:xfrm>
           <a:prstGeom prst="rect">
             <a:avLst/>
@@ -7048,13 +7156,13 @@
           <a:p>
             <a:r>
               <a:rPr lang="en-US" altLang="ja-JP" sz="2000" dirty="0">
-                <a:latin typeface="IBM Plex Sans JP SemiBold" panose="020B0703050203000203" pitchFamily="50" charset="-128"/>
-                <a:ea typeface="IBM Plex Sans JP SemiBold" panose="020B0703050203000203" pitchFamily="50" charset="-128"/>
+                <a:latin typeface="Jost Medium" pitchFamily="2" charset="0"/>
+                <a:ea typeface="Jost Medium" pitchFamily="2" charset="0"/>
               </a:rPr>
               <a:t>5. Gradient Filament</a:t>
             </a:r>
             <a:endParaRPr kumimoji="1" lang="ja-JP" altLang="en-US" sz="2400" b="1" dirty="0">
-              <a:latin typeface="IBM Plex Sans JP SemiBold" panose="020B0703050203000203" pitchFamily="50" charset="-128"/>
+              <a:latin typeface="Jost Medium" pitchFamily="2" charset="0"/>
               <a:ea typeface="IBM Plex Sans JP SemiBold" panose="020B0703050203000203" pitchFamily="50" charset="-128"/>
             </a:endParaRPr>
           </a:p>
@@ -7074,7 +7182,7 @@
         </p:nvSpPr>
         <p:spPr>
           <a:xfrm>
-            <a:off x="675778" y="4341274"/>
+            <a:off x="675778" y="4121818"/>
             <a:ext cx="5642222" cy="246221"/>
           </a:xfrm>
           <a:prstGeom prst="rect">
@@ -7090,10 +7198,24 @@
           <a:p>
             <a:r>
               <a:rPr lang="en-US" altLang="ja-JP" sz="1000" dirty="0">
-                <a:latin typeface="IBM Plex Sans JP" panose="020B0503050203000203" pitchFamily="50" charset="-128"/>
-                <a:ea typeface="IBM Plex Sans JP" panose="020B0503050203000203" pitchFamily="50" charset="-128"/>
-              </a:rPr>
-              <a:t>The following is the model configuration for Gradient Filament.</a:t>
+                <a:latin typeface="Jost" pitchFamily="2" charset="0"/>
+                <a:ea typeface="Jost" pitchFamily="2" charset="0"/>
+              </a:rPr>
+              <a:t>The following is the model configuration for </a:t>
+            </a:r>
+            <a:r>
+              <a:rPr lang="en-US" altLang="ja-JP" sz="1000" dirty="0">
+                <a:latin typeface="Jost Medium" pitchFamily="2" charset="0"/>
+                <a:ea typeface="Jost Medium" pitchFamily="2" charset="0"/>
+              </a:rPr>
+              <a:t>Gradient Filament</a:t>
+            </a:r>
+            <a:r>
+              <a:rPr lang="en-US" altLang="ja-JP" sz="1000" dirty="0">
+                <a:latin typeface="Jost" pitchFamily="2" charset="0"/>
+                <a:ea typeface="Jost" pitchFamily="2" charset="0"/>
+              </a:rPr>
+              <a:t>.</a:t>
             </a:r>
           </a:p>
         </p:txBody>
@@ -7120,7 +7242,7 @@
         </p:blipFill>
         <p:spPr>
           <a:xfrm>
-            <a:off x="666614" y="4667054"/>
+            <a:off x="666614" y="4447598"/>
             <a:ext cx="5521536" cy="3874587"/>
           </a:xfrm>
           <a:prstGeom prst="rect">
@@ -7143,7 +7265,7 @@
         <p:spPr>
           <a:xfrm>
             <a:off x="668508" y="1032957"/>
-            <a:ext cx="5649491" cy="2031325"/>
+            <a:ext cx="5649491" cy="1877437"/>
           </a:xfrm>
           <a:prstGeom prst="rect">
             <a:avLst/>
@@ -7158,16 +7280,30 @@
           <a:p>
             <a:r>
               <a:rPr lang="en-US" altLang="ja-JP" sz="1000" dirty="0">
-                <a:latin typeface="IBM Plex Sans JP" panose="020B0503050203000203" pitchFamily="50" charset="-128"/>
-                <a:ea typeface="IBM Plex Sans JP" panose="020B0503050203000203" pitchFamily="50" charset="-128"/>
-              </a:rPr>
-              <a:t>The Gradient Filament Series provides multiple color-changing Profiles and Plates with different cycle counts. Details vary by model, so please refer to each model’s description.</a:t>
+                <a:latin typeface="Jost" pitchFamily="2" charset="0"/>
+                <a:ea typeface="Jost" pitchFamily="2" charset="0"/>
+              </a:rPr>
+              <a:t>The </a:t>
+            </a:r>
+            <a:r>
+              <a:rPr lang="en-US" altLang="ja-JP" sz="1000" dirty="0">
+                <a:latin typeface="Jost Medium" pitchFamily="2" charset="0"/>
+                <a:ea typeface="Jost Medium" pitchFamily="2" charset="0"/>
+              </a:rPr>
+              <a:t>Gradient Filament</a:t>
+            </a:r>
+            <a:r>
+              <a:rPr lang="en-US" altLang="ja-JP" sz="1000" dirty="0">
+                <a:latin typeface="Jost" pitchFamily="2" charset="0"/>
+                <a:ea typeface="Jost" pitchFamily="2" charset="0"/>
+              </a:rPr>
+              <a:t> Series provides multiple color-changing Profiles and Plates with different cycle counts. Details vary by model, so please refer to each model’s description.</a:t>
             </a:r>
           </a:p>
           <a:p>
             <a:endParaRPr lang="en-US" altLang="ja-JP" sz="1000" dirty="0">
-              <a:latin typeface="IBM Plex Sans JP" panose="020B0503050203000203" pitchFamily="50" charset="-128"/>
-              <a:ea typeface="IBM Plex Sans JP" panose="020B0503050203000203" pitchFamily="50" charset="-128"/>
+              <a:latin typeface="Jost" pitchFamily="2" charset="0"/>
+              <a:ea typeface="Jost" pitchFamily="2" charset="0"/>
             </a:endParaRPr>
           </a:p>
           <a:p>
@@ -7177,16 +7313,16 @@
             </a:pPr>
             <a:r>
               <a:rPr lang="en-US" altLang="ja-JP" sz="1000" dirty="0">
-                <a:latin typeface="IBM Plex Sans JP" panose="020B0503050203000203" pitchFamily="50" charset="-128"/>
-                <a:ea typeface="IBM Plex Sans JP" panose="020B0503050203000203" pitchFamily="50" charset="-128"/>
+                <a:latin typeface="Jost" pitchFamily="2" charset="0"/>
+                <a:ea typeface="Jost" pitchFamily="2" charset="0"/>
               </a:rPr>
               <a:t>Color Curve: Settings based on color combinations. This option allows you to select the optimal gradient for each color—for example, “Vivid” for cyan and yellow, or “Contrast” for white and magenta.</a:t>
             </a:r>
           </a:p>
           <a:p>
             <a:endParaRPr lang="en-US" altLang="ja-JP" sz="600" dirty="0">
-              <a:latin typeface="IBM Plex Sans JP" panose="020B0503050203000203" pitchFamily="50" charset="-128"/>
-              <a:ea typeface="IBM Plex Sans JP" panose="020B0503050203000203" pitchFamily="50" charset="-128"/>
+              <a:latin typeface="Jost" pitchFamily="2" charset="0"/>
+              <a:ea typeface="Jost" pitchFamily="2" charset="0"/>
             </a:endParaRPr>
           </a:p>
           <a:p>
@@ -7196,28 +7332,42 @@
             </a:pPr>
             <a:r>
               <a:rPr lang="en-US" altLang="ja-JP" sz="1000" dirty="0">
-                <a:latin typeface="IBM Plex Sans JP" panose="020B0503050203000203" pitchFamily="50" charset="-128"/>
-                <a:ea typeface="IBM Plex Sans JP" panose="020B0503050203000203" pitchFamily="50" charset="-128"/>
+                <a:latin typeface="Jost" pitchFamily="2" charset="0"/>
+                <a:ea typeface="Jost" pitchFamily="2" charset="0"/>
               </a:rPr>
               <a:t>Number of cycles: The number that determines the frequency of the gradient. One cycle is counted as one complete cycle in which the filament changes from A to B to A and back.</a:t>
             </a:r>
           </a:p>
           <a:p>
             <a:endParaRPr lang="en-US" altLang="ja-JP" sz="1000" dirty="0">
-              <a:latin typeface="IBM Plex Sans JP" panose="020B0503050203000203" pitchFamily="50" charset="-128"/>
-              <a:ea typeface="IBM Plex Sans JP" panose="020B0503050203000203" pitchFamily="50" charset="-128"/>
+              <a:latin typeface="Jost" pitchFamily="2" charset="0"/>
+              <a:ea typeface="Jost" pitchFamily="2" charset="0"/>
             </a:endParaRPr>
           </a:p>
           <a:p>
             <a:r>
               <a:rPr lang="en-US" altLang="ja-JP" sz="1000" dirty="0">
-                <a:latin typeface="IBM Plex Sans JP" panose="020B0503050203000203" pitchFamily="50" charset="-128"/>
-                <a:ea typeface="IBM Plex Sans JP" panose="020B0503050203000203" pitchFamily="50" charset="-128"/>
-              </a:rPr>
-              <a:t>Example: To create a fast-cycle gradient filament using cyan and magenta, select an S4 Model, choose a 4-cycle Plate, and use the Vivid curve Profile due to the high color contrast.</a:t>
+                <a:latin typeface="Jost" pitchFamily="2" charset="0"/>
+                <a:ea typeface="Jost" pitchFamily="2" charset="0"/>
+              </a:rPr>
+              <a:t>Example: To create a fast-cycle </a:t>
+            </a:r>
+            <a:r>
+              <a:rPr lang="en-US" altLang="ja-JP" sz="1000" dirty="0">
+                <a:latin typeface="Jost Medium" pitchFamily="2" charset="0"/>
+                <a:ea typeface="Jost Medium" pitchFamily="2" charset="0"/>
+              </a:rPr>
+              <a:t>gradient filament</a:t>
+            </a:r>
+            <a:r>
+              <a:rPr lang="en-US" altLang="ja-JP" sz="1000" dirty="0">
+                <a:latin typeface="Jost" pitchFamily="2" charset="0"/>
+                <a:ea typeface="Jost" pitchFamily="2" charset="0"/>
+              </a:rPr>
+              <a:t> using cyan and magenta, select an S4 Model, choose a 4-cycle Plate, and use the Vivid curve Profile due to the high color contrast.</a:t>
             </a:r>
             <a:endParaRPr kumimoji="1" lang="ja-JP" altLang="en-US" sz="1000" b="1" dirty="0">
-              <a:latin typeface="IBM Plex Sans JP" panose="020B0503050203000203" pitchFamily="50" charset="-128"/>
+              <a:latin typeface="Jost" pitchFamily="2" charset="0"/>
               <a:ea typeface="IBM Plex Sans JP" panose="020B0503050203000203" pitchFamily="50" charset="-128"/>
             </a:endParaRPr>
           </a:p>
@@ -7252,7 +7402,7 @@
         </p:blipFill>
         <p:spPr bwMode="auto">
           <a:xfrm>
-            <a:off x="620249" y="3243238"/>
+            <a:off x="620249" y="3048166"/>
             <a:ext cx="5614266" cy="919080"/>
           </a:xfrm>
           <a:prstGeom prst="rect">
@@ -7700,7 +7850,7 @@
         </p:nvSpPr>
         <p:spPr>
           <a:xfrm>
-            <a:off x="554537" y="452468"/>
+            <a:off x="554537" y="440276"/>
             <a:ext cx="5756193" cy="54000"/>
           </a:xfrm>
           <a:prstGeom prst="rect">
@@ -7854,10 +8004,15 @@
           <a:p>
             <a:pPr algn="ctr"/>
             <a:r>
-              <a:rPr kumimoji="1" lang="en-US" altLang="ja-JP" dirty="0"/>
+              <a:rPr kumimoji="1" lang="en-US" altLang="ja-JP" dirty="0">
+                <a:latin typeface="Jost" pitchFamily="2" charset="0"/>
+                <a:ea typeface="Jost" pitchFamily="2" charset="0"/>
+              </a:rPr>
               <a:t>4</a:t>
             </a:r>
-            <a:endParaRPr kumimoji="1" lang="ja-JP" altLang="en-US" dirty="0"/>
+            <a:endParaRPr kumimoji="1" lang="ja-JP" altLang="en-US" dirty="0">
+              <a:latin typeface="Jost" pitchFamily="2" charset="0"/>
+            </a:endParaRPr>
           </a:p>
         </p:txBody>
       </p:sp>
@@ -7922,7 +8077,7 @@
         <p:spPr>
           <a:xfrm>
             <a:off x="778114" y="784294"/>
-            <a:ext cx="1923925" cy="338554"/>
+            <a:ext cx="1715534" cy="338554"/>
           </a:xfrm>
           <a:prstGeom prst="rect">
             <a:avLst/>
@@ -7937,13 +8092,13 @@
           <a:p>
             <a:r>
               <a:rPr lang="en-US" altLang="ja-JP" sz="1600" dirty="0">
-                <a:latin typeface="IBM Plex Sans JP SemiBold" panose="020B0703050203000203" pitchFamily="50" charset="-128"/>
-                <a:ea typeface="IBM Plex Sans JP SemiBold" panose="020B0703050203000203" pitchFamily="50" charset="-128"/>
+                <a:latin typeface="Jost" pitchFamily="2" charset="0"/>
+                <a:ea typeface="Jost" pitchFamily="2" charset="0"/>
               </a:rPr>
               <a:t>6. Update History</a:t>
             </a:r>
             <a:endParaRPr kumimoji="1" lang="ja-JP" altLang="en-US" b="1" dirty="0">
-              <a:latin typeface="IBM Plex Sans JP SemiBold" panose="020B0703050203000203" pitchFamily="50" charset="-128"/>
+              <a:latin typeface="Jost" pitchFamily="2" charset="0"/>
               <a:ea typeface="IBM Plex Sans JP SemiBold" panose="020B0703050203000203" pitchFamily="50" charset="-128"/>
             </a:endParaRPr>
           </a:p>
@@ -7964,7 +8119,7 @@
         <p:spPr>
           <a:xfrm>
             <a:off x="638323" y="1115240"/>
-            <a:ext cx="5649491" cy="507831"/>
+            <a:ext cx="5649491" cy="646331"/>
           </a:xfrm>
           <a:prstGeom prst="rect">
             <a:avLst/>
@@ -7979,8 +8134,8 @@
           <a:p>
             <a:r>
               <a:rPr lang="en-US" altLang="ja-JP" sz="900" dirty="0">
-                <a:latin typeface="IBM Plex Sans JP" panose="020B0503050203000203" pitchFamily="50" charset="-128"/>
-                <a:ea typeface="IBM Plex Sans JP" panose="020B0503050203000203" pitchFamily="50" charset="-128"/>
+                <a:latin typeface="Jost" pitchFamily="2" charset="0"/>
+                <a:ea typeface="Jost" pitchFamily="2" charset="0"/>
               </a:rPr>
               <a:t>Ver.1.00  2026-07-02  First Edition Published</a:t>
             </a:r>
@@ -7988,8 +8143,8 @@
           <a:p>
             <a:r>
               <a:rPr lang="en-US" altLang="ja-JP" sz="900" dirty="0">
-                <a:latin typeface="IBM Plex Sans JP" panose="020B0503050203000203" pitchFamily="50" charset="-128"/>
-                <a:ea typeface="IBM Plex Sans JP" panose="020B0503050203000203" pitchFamily="50" charset="-128"/>
+                <a:latin typeface="Jost" pitchFamily="2" charset="0"/>
+                <a:ea typeface="Jost" pitchFamily="2" charset="0"/>
               </a:rPr>
               <a:t>Ver.1.10  2026-07-22  Revisions for Integrated Design</a:t>
             </a:r>
@@ -7997,10 +8152,19 @@
           <a:p>
             <a:r>
               <a:rPr lang="en-US" altLang="ja-JP" sz="900" dirty="0">
-                <a:latin typeface="IBM Plex Sans JP" panose="020B0503050203000203" pitchFamily="50" charset="-128"/>
-                <a:ea typeface="IBM Plex Sans JP" panose="020B0503050203000203" pitchFamily="50" charset="-128"/>
+                <a:latin typeface="Jost" pitchFamily="2" charset="0"/>
+                <a:ea typeface="Jost" pitchFamily="2" charset="0"/>
               </a:rPr>
               <a:t>Ver.1.11  2026-08-08  Revisions to align with the Japanese version</a:t>
+            </a:r>
+          </a:p>
+          <a:p>
+            <a:r>
+              <a:rPr lang="en-US" altLang="ja-JP" sz="900" dirty="0">
+                <a:latin typeface="Jost" pitchFamily="2" charset="0"/>
+                <a:ea typeface="Jost" pitchFamily="2" charset="0"/>
+              </a:rPr>
+              <a:t>Ver.1.12  2026-09-16  Applying the Brand Typeface</a:t>
             </a:r>
           </a:p>
         </p:txBody>
@@ -8026,7 +8190,7 @@
         <p:cNvPr id="1" name="">
           <a:extLst>
             <a:ext uri="{FF2B5EF4-FFF2-40B4-BE49-F238E27FC236}">
-              <a16:creationId xmlns:a16="http://schemas.microsoft.com/office/drawing/2014/main" id="{CD5DA673-1F6D-3E89-385D-51C4D771A791}"/>
+              <a16:creationId xmlns:a16="http://schemas.microsoft.com/office/drawing/2014/main" id="{E49CB6A8-B889-5444-93D3-6168C8E52E5C}"/>
             </a:ext>
           </a:extLst>
         </p:cNvPr>
@@ -8043,10 +8207,10 @@
       </p:grpSpPr>
       <p:sp>
         <p:nvSpPr>
-          <p:cNvPr id="3" name="正方形/長方形 2">
+          <p:cNvPr id="32" name="正方形/長方形 31">
             <a:extLst>
               <a:ext uri="{FF2B5EF4-FFF2-40B4-BE49-F238E27FC236}">
-                <a16:creationId xmlns:a16="http://schemas.microsoft.com/office/drawing/2014/main" id="{1DEFF187-2596-B65B-91B7-01BEB260E707}"/>
+                <a16:creationId xmlns:a16="http://schemas.microsoft.com/office/drawing/2014/main" id="{84B34C20-B364-7D3E-74AF-7A5625154FCE}"/>
               </a:ext>
             </a:extLst>
           </p:cNvPr>
@@ -8055,8 +8219,8 @@
         </p:nvSpPr>
         <p:spPr>
           <a:xfrm>
-            <a:off x="33951" y="45268"/>
-            <a:ext cx="6790099" cy="9053465"/>
+            <a:off x="67565" y="90087"/>
+            <a:ext cx="6722870" cy="8963827"/>
           </a:xfrm>
           <a:prstGeom prst="rect">
             <a:avLst/>
@@ -8106,10 +8270,10 @@
       </p:sp>
       <p:sp>
         <p:nvSpPr>
-          <p:cNvPr id="37" name="フリーフォーム: 図形 36">
+          <p:cNvPr id="39" name="フリーフォーム: 図形 38">
             <a:extLst>
               <a:ext uri="{FF2B5EF4-FFF2-40B4-BE49-F238E27FC236}">
-                <a16:creationId xmlns:a16="http://schemas.microsoft.com/office/drawing/2014/main" id="{79E6D1D4-A113-BFE0-3263-F0A91EBC473E}"/>
+                <a16:creationId xmlns:a16="http://schemas.microsoft.com/office/drawing/2014/main" id="{76045807-046C-D311-D831-2B78C19F2411}"/>
               </a:ext>
             </a:extLst>
           </p:cNvPr>
@@ -8118,367 +8282,363 @@
         </p:nvSpPr>
         <p:spPr>
           <a:xfrm>
-            <a:off x="-1" y="9938"/>
+            <a:off x="-7269" y="-9649"/>
             <a:ext cx="6858000" cy="9144000"/>
           </a:xfrm>
           <a:custGeom>
             <a:avLst/>
             <a:gdLst>
-              <a:gd name="connsiteX0" fmla="*/ 3734844 w 6858000"/>
-              <a:gd name="connsiteY0" fmla="*/ 8661917 h 9144000"/>
-              <a:gd name="connsiteX1" fmla="*/ 3734844 w 6858000"/>
-              <a:gd name="connsiteY1" fmla="*/ 8715917 h 9144000"/>
-              <a:gd name="connsiteX2" fmla="*/ 6326844 w 6858000"/>
-              <a:gd name="connsiteY2" fmla="*/ 8715917 h 9144000"/>
-              <a:gd name="connsiteX3" fmla="*/ 6326844 w 6858000"/>
-              <a:gd name="connsiteY3" fmla="*/ 8661917 h 9144000"/>
-              <a:gd name="connsiteX4" fmla="*/ 554538 w 6858000"/>
-              <a:gd name="connsiteY4" fmla="*/ 8661917 h 9144000"/>
-              <a:gd name="connsiteX5" fmla="*/ 554538 w 6858000"/>
-              <a:gd name="connsiteY5" fmla="*/ 8715917 h 9144000"/>
-              <a:gd name="connsiteX6" fmla="*/ 3146538 w 6858000"/>
-              <a:gd name="connsiteY6" fmla="*/ 8715917 h 9144000"/>
-              <a:gd name="connsiteX7" fmla="*/ 3146538 w 6858000"/>
-              <a:gd name="connsiteY7" fmla="*/ 8661917 h 9144000"/>
-              <a:gd name="connsiteX8" fmla="*/ 668510 w 6858000"/>
-              <a:gd name="connsiteY8" fmla="*/ 4562351 h 9144000"/>
-              <a:gd name="connsiteX9" fmla="*/ 566175 w 6858000"/>
-              <a:gd name="connsiteY9" fmla="*/ 4664686 h 9144000"/>
-              <a:gd name="connsiteX10" fmla="*/ 668510 w 6858000"/>
-              <a:gd name="connsiteY10" fmla="*/ 4767021 h 9144000"/>
-              <a:gd name="connsiteX11" fmla="*/ 770845 w 6858000"/>
-              <a:gd name="connsiteY11" fmla="*/ 4664686 h 9144000"/>
-              <a:gd name="connsiteX12" fmla="*/ 668510 w 6858000"/>
-              <a:gd name="connsiteY12" fmla="*/ 4562351 h 9144000"/>
-              <a:gd name="connsiteX13" fmla="*/ 668510 w 6858000"/>
-              <a:gd name="connsiteY13" fmla="*/ 3069491 h 9144000"/>
-              <a:gd name="connsiteX14" fmla="*/ 566175 w 6858000"/>
-              <a:gd name="connsiteY14" fmla="*/ 3171826 h 9144000"/>
-              <a:gd name="connsiteX15" fmla="*/ 668510 w 6858000"/>
-              <a:gd name="connsiteY15" fmla="*/ 3274161 h 9144000"/>
-              <a:gd name="connsiteX16" fmla="*/ 770845 w 6858000"/>
-              <a:gd name="connsiteY16" fmla="*/ 3171826 h 9144000"/>
-              <a:gd name="connsiteX17" fmla="*/ 668510 w 6858000"/>
-              <a:gd name="connsiteY17" fmla="*/ 3069491 h 9144000"/>
-              <a:gd name="connsiteX18" fmla="*/ 1042027 w 6858000"/>
-              <a:gd name="connsiteY18" fmla="*/ 2161529 h 9144000"/>
-              <a:gd name="connsiteX19" fmla="*/ 1042026 w 6858000"/>
-              <a:gd name="connsiteY19" fmla="*/ 2308230 h 9144000"/>
-              <a:gd name="connsiteX20" fmla="*/ 1188728 w 6858000"/>
-              <a:gd name="connsiteY20" fmla="*/ 2454932 h 9144000"/>
-              <a:gd name="connsiteX21" fmla="*/ 5676539 w 6858000"/>
-              <a:gd name="connsiteY21" fmla="*/ 2454932 h 9144000"/>
-              <a:gd name="connsiteX22" fmla="*/ 5823241 w 6858000"/>
-              <a:gd name="connsiteY22" fmla="*/ 2308230 h 9144000"/>
-              <a:gd name="connsiteX23" fmla="*/ 5823241 w 6858000"/>
-              <a:gd name="connsiteY23" fmla="*/ 2163830 h 9144000"/>
-              <a:gd name="connsiteX24" fmla="*/ 5760740 w 6858000"/>
-              <a:gd name="connsiteY24" fmla="*/ 2226331 h 9144000"/>
-              <a:gd name="connsiteX25" fmla="*/ 1104528 w 6858000"/>
-              <a:gd name="connsiteY25" fmla="*/ 2226331 h 9144000"/>
-              <a:gd name="connsiteX26" fmla="*/ 1042027 w 6858000"/>
-              <a:gd name="connsiteY26" fmla="*/ 2163830 h 9144000"/>
-              <a:gd name="connsiteX27" fmla="*/ 1188728 w 6858000"/>
-              <a:gd name="connsiteY27" fmla="*/ 437295 h 9144000"/>
-              <a:gd name="connsiteX28" fmla="*/ 1042026 w 6858000"/>
-              <a:gd name="connsiteY28" fmla="*/ 583997 h 9144000"/>
-              <a:gd name="connsiteX29" fmla="*/ 1042026 w 6858000"/>
-              <a:gd name="connsiteY29" fmla="*/ 728397 h 9144000"/>
-              <a:gd name="connsiteX30" fmla="*/ 1104527 w 6858000"/>
-              <a:gd name="connsiteY30" fmla="*/ 665896 h 9144000"/>
-              <a:gd name="connsiteX31" fmla="*/ 5760739 w 6858000"/>
-              <a:gd name="connsiteY31" fmla="*/ 665896 h 9144000"/>
-              <a:gd name="connsiteX32" fmla="*/ 5823240 w 6858000"/>
-              <a:gd name="connsiteY32" fmla="*/ 728397 h 9144000"/>
-              <a:gd name="connsiteX33" fmla="*/ 5823240 w 6858000"/>
-              <a:gd name="connsiteY33" fmla="*/ 730698 h 9144000"/>
-              <a:gd name="connsiteX34" fmla="*/ 5823241 w 6858000"/>
-              <a:gd name="connsiteY34" fmla="*/ 583997 h 9144000"/>
-              <a:gd name="connsiteX35" fmla="*/ 5676539 w 6858000"/>
-              <a:gd name="connsiteY35" fmla="*/ 437295 h 9144000"/>
-              <a:gd name="connsiteX36" fmla="*/ 0 w 6858000"/>
-              <a:gd name="connsiteY36" fmla="*/ 0 h 9144000"/>
-              <a:gd name="connsiteX37" fmla="*/ 6858000 w 6858000"/>
-              <a:gd name="connsiteY37" fmla="*/ 0 h 9144000"/>
-              <a:gd name="connsiteX38" fmla="*/ 6858000 w 6858000"/>
-              <a:gd name="connsiteY38" fmla="*/ 9144000 h 9144000"/>
-              <a:gd name="connsiteX39" fmla="*/ 0 w 6858000"/>
-              <a:gd name="connsiteY39" fmla="*/ 9144000 h 9144000"/>
+              <a:gd name="csX0" fmla="*/ 3742113 w 6858000"/>
+              <a:gd name="csY0" fmla="*/ 8671566 h 9144000"/>
+              <a:gd name="csX1" fmla="*/ 3742113 w 6858000"/>
+              <a:gd name="csY1" fmla="*/ 8725566 h 9144000"/>
+              <a:gd name="csX2" fmla="*/ 6334113 w 6858000"/>
+              <a:gd name="csY2" fmla="*/ 8725566 h 9144000"/>
+              <a:gd name="csX3" fmla="*/ 6334113 w 6858000"/>
+              <a:gd name="csY3" fmla="*/ 8671566 h 9144000"/>
+              <a:gd name="csX4" fmla="*/ 561807 w 6858000"/>
+              <a:gd name="csY4" fmla="*/ 8671566 h 9144000"/>
+              <a:gd name="csX5" fmla="*/ 561807 w 6858000"/>
+              <a:gd name="csY5" fmla="*/ 8725566 h 9144000"/>
+              <a:gd name="csX6" fmla="*/ 3153807 w 6858000"/>
+              <a:gd name="csY6" fmla="*/ 8725566 h 9144000"/>
+              <a:gd name="csX7" fmla="*/ 3153807 w 6858000"/>
+              <a:gd name="csY7" fmla="*/ 8671566 h 9144000"/>
+              <a:gd name="csX8" fmla="*/ 675779 w 6858000"/>
+              <a:gd name="csY8" fmla="*/ 4572000 h 9144000"/>
+              <a:gd name="csX9" fmla="*/ 573444 w 6858000"/>
+              <a:gd name="csY9" fmla="*/ 4674335 h 9144000"/>
+              <a:gd name="csX10" fmla="*/ 675779 w 6858000"/>
+              <a:gd name="csY10" fmla="*/ 4776670 h 9144000"/>
+              <a:gd name="csX11" fmla="*/ 778114 w 6858000"/>
+              <a:gd name="csY11" fmla="*/ 4674335 h 9144000"/>
+              <a:gd name="csX12" fmla="*/ 675779 w 6858000"/>
+              <a:gd name="csY12" fmla="*/ 4572000 h 9144000"/>
+              <a:gd name="csX13" fmla="*/ 675779 w 6858000"/>
+              <a:gd name="csY13" fmla="*/ 3079140 h 9144000"/>
+              <a:gd name="csX14" fmla="*/ 573444 w 6858000"/>
+              <a:gd name="csY14" fmla="*/ 3181475 h 9144000"/>
+              <a:gd name="csX15" fmla="*/ 675779 w 6858000"/>
+              <a:gd name="csY15" fmla="*/ 3283810 h 9144000"/>
+              <a:gd name="csX16" fmla="*/ 778114 w 6858000"/>
+              <a:gd name="csY16" fmla="*/ 3181475 h 9144000"/>
+              <a:gd name="csX17" fmla="*/ 675779 w 6858000"/>
+              <a:gd name="csY17" fmla="*/ 3079140 h 9144000"/>
+              <a:gd name="csX18" fmla="*/ 5842701 w 6858000"/>
+              <a:gd name="csY18" fmla="*/ 2289626 h 9144000"/>
+              <a:gd name="csX19" fmla="*/ 5787396 w 6858000"/>
+              <a:gd name="csY19" fmla="*/ 2344931 h 9144000"/>
+              <a:gd name="csX20" fmla="*/ 1116791 w 6858000"/>
+              <a:gd name="csY20" fmla="*/ 2344931 h 9144000"/>
+              <a:gd name="csX21" fmla="*/ 1077684 w 6858000"/>
+              <a:gd name="csY21" fmla="*/ 2328732 h 9144000"/>
+              <a:gd name="csX22" fmla="*/ 1061487 w 6858000"/>
+              <a:gd name="csY22" fmla="*/ 2289628 h 9144000"/>
+              <a:gd name="csX23" fmla="*/ 1061487 w 6858000"/>
+              <a:gd name="csY23" fmla="*/ 2423218 h 9144000"/>
+              <a:gd name="csX24" fmla="*/ 1250383 w 6858000"/>
+              <a:gd name="csY24" fmla="*/ 2612114 h 9144000"/>
+              <a:gd name="csX25" fmla="*/ 5653805 w 6858000"/>
+              <a:gd name="csY25" fmla="*/ 2612114 h 9144000"/>
+              <a:gd name="csX26" fmla="*/ 5842701 w 6858000"/>
+              <a:gd name="csY26" fmla="*/ 2423218 h 9144000"/>
+              <a:gd name="csX27" fmla="*/ 1250383 w 6858000"/>
+              <a:gd name="csY27" fmla="*/ 451094 h 9144000"/>
+              <a:gd name="csX28" fmla="*/ 1061487 w 6858000"/>
+              <a:gd name="csY28" fmla="*/ 639990 h 9144000"/>
+              <a:gd name="csX29" fmla="*/ 1061487 w 6858000"/>
+              <a:gd name="csY29" fmla="*/ 773582 h 9144000"/>
+              <a:gd name="csX30" fmla="*/ 1116792 w 6858000"/>
+              <a:gd name="csY30" fmla="*/ 718277 h 9144000"/>
+              <a:gd name="csX31" fmla="*/ 5787397 w 6858000"/>
+              <a:gd name="csY31" fmla="*/ 718277 h 9144000"/>
+              <a:gd name="csX32" fmla="*/ 5826504 w 6858000"/>
+              <a:gd name="csY32" fmla="*/ 734476 h 9144000"/>
+              <a:gd name="csX33" fmla="*/ 5842701 w 6858000"/>
+              <a:gd name="csY33" fmla="*/ 773580 h 9144000"/>
+              <a:gd name="csX34" fmla="*/ 5842701 w 6858000"/>
+              <a:gd name="csY34" fmla="*/ 639990 h 9144000"/>
+              <a:gd name="csX35" fmla="*/ 5653805 w 6858000"/>
+              <a:gd name="csY35" fmla="*/ 451094 h 9144000"/>
+              <a:gd name="csX36" fmla="*/ 0 w 6858000"/>
+              <a:gd name="csY36" fmla="*/ 0 h 9144000"/>
+              <a:gd name="csX37" fmla="*/ 6858000 w 6858000"/>
+              <a:gd name="csY37" fmla="*/ 0 h 9144000"/>
+              <a:gd name="csX38" fmla="*/ 6858000 w 6858000"/>
+              <a:gd name="csY38" fmla="*/ 9144000 h 9144000"/>
+              <a:gd name="csX39" fmla="*/ 0 w 6858000"/>
+              <a:gd name="csY39" fmla="*/ 9144000 h 9144000"/>
             </a:gdLst>
             <a:ahLst/>
             <a:cxnLst>
               <a:cxn ang="0">
-                <a:pos x="connsiteX0" y="connsiteY0"/>
+                <a:pos x="csX0" y="csY0"/>
               </a:cxn>
               <a:cxn ang="0">
-                <a:pos x="connsiteX1" y="connsiteY1"/>
+                <a:pos x="csX1" y="csY1"/>
               </a:cxn>
               <a:cxn ang="0">
-                <a:pos x="connsiteX2" y="connsiteY2"/>
+                <a:pos x="csX2" y="csY2"/>
               </a:cxn>
               <a:cxn ang="0">
-                <a:pos x="connsiteX3" y="connsiteY3"/>
+                <a:pos x="csX3" y="csY3"/>
               </a:cxn>
               <a:cxn ang="0">
-                <a:pos x="connsiteX4" y="connsiteY4"/>
+                <a:pos x="csX4" y="csY4"/>
               </a:cxn>
               <a:cxn ang="0">
-                <a:pos x="connsiteX5" y="connsiteY5"/>
+                <a:pos x="csX5" y="csY5"/>
               </a:cxn>
               <a:cxn ang="0">
-                <a:pos x="connsiteX6" y="connsiteY6"/>
+                <a:pos x="csX6" y="csY6"/>
               </a:cxn>
               <a:cxn ang="0">
-                <a:pos x="connsiteX7" y="connsiteY7"/>
+                <a:pos x="csX7" y="csY7"/>
               </a:cxn>
               <a:cxn ang="0">
-                <a:pos x="connsiteX8" y="connsiteY8"/>
+                <a:pos x="csX8" y="csY8"/>
               </a:cxn>
               <a:cxn ang="0">
-                <a:pos x="connsiteX9" y="connsiteY9"/>
+                <a:pos x="csX9" y="csY9"/>
               </a:cxn>
               <a:cxn ang="0">
-                <a:pos x="connsiteX10" y="connsiteY10"/>
+                <a:pos x="csX10" y="csY10"/>
               </a:cxn>
               <a:cxn ang="0">
-                <a:pos x="connsiteX11" y="connsiteY11"/>
+                <a:pos x="csX11" y="csY11"/>
               </a:cxn>
               <a:cxn ang="0">
-                <a:pos x="connsiteX12" y="connsiteY12"/>
+                <a:pos x="csX12" y="csY12"/>
               </a:cxn>
               <a:cxn ang="0">
-                <a:pos x="connsiteX13" y="connsiteY13"/>
+                <a:pos x="csX13" y="csY13"/>
               </a:cxn>
               <a:cxn ang="0">
-                <a:pos x="connsiteX14" y="connsiteY14"/>
+                <a:pos x="csX14" y="csY14"/>
               </a:cxn>
               <a:cxn ang="0">
-                <a:pos x="connsiteX15" y="connsiteY15"/>
+                <a:pos x="csX15" y="csY15"/>
               </a:cxn>
               <a:cxn ang="0">
-                <a:pos x="connsiteX16" y="connsiteY16"/>
+                <a:pos x="csX16" y="csY16"/>
               </a:cxn>
               <a:cxn ang="0">
-                <a:pos x="connsiteX17" y="connsiteY17"/>
+                <a:pos x="csX17" y="csY17"/>
               </a:cxn>
               <a:cxn ang="0">
-                <a:pos x="connsiteX18" y="connsiteY18"/>
+                <a:pos x="csX18" y="csY18"/>
               </a:cxn>
               <a:cxn ang="0">
-                <a:pos x="connsiteX19" y="connsiteY19"/>
+                <a:pos x="csX19" y="csY19"/>
               </a:cxn>
               <a:cxn ang="0">
-                <a:pos x="connsiteX20" y="connsiteY20"/>
+                <a:pos x="csX20" y="csY20"/>
               </a:cxn>
               <a:cxn ang="0">
-                <a:pos x="connsiteX21" y="connsiteY21"/>
+                <a:pos x="csX21" y="csY21"/>
               </a:cxn>
               <a:cxn ang="0">
-                <a:pos x="connsiteX22" y="connsiteY22"/>
+                <a:pos x="csX22" y="csY22"/>
               </a:cxn>
               <a:cxn ang="0">
-                <a:pos x="connsiteX23" y="connsiteY23"/>
+                <a:pos x="csX23" y="csY23"/>
               </a:cxn>
               <a:cxn ang="0">
-                <a:pos x="connsiteX24" y="connsiteY24"/>
+                <a:pos x="csX24" y="csY24"/>
               </a:cxn>
               <a:cxn ang="0">
-                <a:pos x="connsiteX25" y="connsiteY25"/>
+                <a:pos x="csX25" y="csY25"/>
               </a:cxn>
               <a:cxn ang="0">
-                <a:pos x="connsiteX26" y="connsiteY26"/>
+                <a:pos x="csX26" y="csY26"/>
               </a:cxn>
               <a:cxn ang="0">
-                <a:pos x="connsiteX27" y="connsiteY27"/>
+                <a:pos x="csX27" y="csY27"/>
               </a:cxn>
               <a:cxn ang="0">
-                <a:pos x="connsiteX28" y="connsiteY28"/>
+                <a:pos x="csX28" y="csY28"/>
               </a:cxn>
               <a:cxn ang="0">
-                <a:pos x="connsiteX29" y="connsiteY29"/>
+                <a:pos x="csX29" y="csY29"/>
               </a:cxn>
               <a:cxn ang="0">
-                <a:pos x="connsiteX30" y="connsiteY30"/>
+                <a:pos x="csX30" y="csY30"/>
               </a:cxn>
               <a:cxn ang="0">
-                <a:pos x="connsiteX31" y="connsiteY31"/>
+                <a:pos x="csX31" y="csY31"/>
               </a:cxn>
               <a:cxn ang="0">
-                <a:pos x="connsiteX32" y="connsiteY32"/>
+                <a:pos x="csX32" y="csY32"/>
               </a:cxn>
               <a:cxn ang="0">
-                <a:pos x="connsiteX33" y="connsiteY33"/>
+                <a:pos x="csX33" y="csY33"/>
               </a:cxn>
               <a:cxn ang="0">
-                <a:pos x="connsiteX34" y="connsiteY34"/>
+                <a:pos x="csX34" y="csY34"/>
               </a:cxn>
               <a:cxn ang="0">
-                <a:pos x="connsiteX35" y="connsiteY35"/>
+                <a:pos x="csX35" y="csY35"/>
               </a:cxn>
               <a:cxn ang="0">
-                <a:pos x="connsiteX36" y="connsiteY36"/>
+                <a:pos x="csX36" y="csY36"/>
               </a:cxn>
               <a:cxn ang="0">
-                <a:pos x="connsiteX37" y="connsiteY37"/>
+                <a:pos x="csX37" y="csY37"/>
               </a:cxn>
               <a:cxn ang="0">
-                <a:pos x="connsiteX38" y="connsiteY38"/>
+                <a:pos x="csX38" y="csY38"/>
               </a:cxn>
               <a:cxn ang="0">
-                <a:pos x="connsiteX39" y="connsiteY39"/>
+                <a:pos x="csX39" y="csY39"/>
               </a:cxn>
             </a:cxnLst>
             <a:rect l="l" t="t" r="r" b="b"/>
             <a:pathLst>
               <a:path w="6858000" h="9144000">
                 <a:moveTo>
-                  <a:pt x="3734844" y="8661917"/>
+                  <a:pt x="3742113" y="8671566"/>
                 </a:moveTo>
                 <a:lnTo>
-                  <a:pt x="3734844" y="8715917"/>
+                  <a:pt x="3742113" y="8725566"/>
                 </a:lnTo>
                 <a:lnTo>
-                  <a:pt x="6326844" y="8715917"/>
+                  <a:pt x="6334113" y="8725566"/>
                 </a:lnTo>
                 <a:lnTo>
-                  <a:pt x="6326844" y="8661917"/>
+                  <a:pt x="6334113" y="8671566"/>
                 </a:lnTo>
                 <a:close/>
                 <a:moveTo>
-                  <a:pt x="554538" y="8661917"/>
+                  <a:pt x="561807" y="8671566"/>
                 </a:moveTo>
                 <a:lnTo>
-                  <a:pt x="554538" y="8715917"/>
+                  <a:pt x="561807" y="8725566"/>
                 </a:lnTo>
                 <a:lnTo>
-                  <a:pt x="3146538" y="8715917"/>
+                  <a:pt x="3153807" y="8725566"/>
                 </a:lnTo>
                 <a:lnTo>
-                  <a:pt x="3146538" y="8661917"/>
+                  <a:pt x="3153807" y="8671566"/>
                 </a:lnTo>
                 <a:close/>
                 <a:moveTo>
-                  <a:pt x="668510" y="4562351"/>
+                  <a:pt x="675779" y="4572000"/>
                 </a:moveTo>
                 <a:cubicBezTo>
-                  <a:pt x="611992" y="4562351"/>
-                  <a:pt x="566175" y="4608168"/>
-                  <a:pt x="566175" y="4664686"/>
+                  <a:pt x="619261" y="4572000"/>
+                  <a:pt x="573444" y="4617817"/>
+                  <a:pt x="573444" y="4674335"/>
                 </a:cubicBezTo>
                 <a:cubicBezTo>
-                  <a:pt x="566175" y="4721204"/>
-                  <a:pt x="611992" y="4767021"/>
-                  <a:pt x="668510" y="4767021"/>
+                  <a:pt x="573444" y="4730853"/>
+                  <a:pt x="619261" y="4776670"/>
+                  <a:pt x="675779" y="4776670"/>
                 </a:cubicBezTo>
                 <a:cubicBezTo>
-                  <a:pt x="725028" y="4767021"/>
-                  <a:pt x="770845" y="4721204"/>
-                  <a:pt x="770845" y="4664686"/>
+                  <a:pt x="732297" y="4776670"/>
+                  <a:pt x="778114" y="4730853"/>
+                  <a:pt x="778114" y="4674335"/>
                 </a:cubicBezTo>
                 <a:cubicBezTo>
-                  <a:pt x="770845" y="4608168"/>
-                  <a:pt x="725028" y="4562351"/>
-                  <a:pt x="668510" y="4562351"/>
+                  <a:pt x="778114" y="4617817"/>
+                  <a:pt x="732297" y="4572000"/>
+                  <a:pt x="675779" y="4572000"/>
                 </a:cubicBezTo>
                 <a:close/>
                 <a:moveTo>
-                  <a:pt x="668510" y="3069491"/>
+                  <a:pt x="675779" y="3079140"/>
                 </a:moveTo>
                 <a:cubicBezTo>
-                  <a:pt x="611992" y="3069491"/>
-                  <a:pt x="566175" y="3115308"/>
-                  <a:pt x="566175" y="3171826"/>
+                  <a:pt x="619261" y="3079140"/>
+                  <a:pt x="573444" y="3124957"/>
+                  <a:pt x="573444" y="3181475"/>
                 </a:cubicBezTo>
                 <a:cubicBezTo>
-                  <a:pt x="566175" y="3228344"/>
-                  <a:pt x="611992" y="3274161"/>
-                  <a:pt x="668510" y="3274161"/>
+                  <a:pt x="573444" y="3237993"/>
+                  <a:pt x="619261" y="3283810"/>
+                  <a:pt x="675779" y="3283810"/>
                 </a:cubicBezTo>
                 <a:cubicBezTo>
-                  <a:pt x="725028" y="3274161"/>
-                  <a:pt x="770845" y="3228344"/>
-                  <a:pt x="770845" y="3171826"/>
+                  <a:pt x="732297" y="3283810"/>
+                  <a:pt x="778114" y="3237993"/>
+                  <a:pt x="778114" y="3181475"/>
                 </a:cubicBezTo>
                 <a:cubicBezTo>
-                  <a:pt x="770845" y="3115308"/>
-                  <a:pt x="725028" y="3069491"/>
-                  <a:pt x="668510" y="3069491"/>
+                  <a:pt x="778114" y="3124957"/>
+                  <a:pt x="732297" y="3079140"/>
+                  <a:pt x="675779" y="3079140"/>
                 </a:cubicBezTo>
                 <a:close/>
                 <a:moveTo>
-                  <a:pt x="1042027" y="2161529"/>
+                  <a:pt x="5842701" y="2289626"/>
                 </a:moveTo>
                 <a:cubicBezTo>
-                  <a:pt x="1042027" y="2210429"/>
-                  <a:pt x="1042026" y="2259330"/>
-                  <a:pt x="1042026" y="2308230"/>
-                </a:cubicBezTo>
-                <a:cubicBezTo>
-                  <a:pt x="1042026" y="2389251"/>
-                  <a:pt x="1107707" y="2454932"/>
-                  <a:pt x="1188728" y="2454932"/>
+                  <a:pt x="5842701" y="2320170"/>
+                  <a:pt x="5817940" y="2344931"/>
+                  <a:pt x="5787396" y="2344931"/>
                 </a:cubicBezTo>
                 <a:lnTo>
-                  <a:pt x="5676539" y="2454932"/>
+                  <a:pt x="1116791" y="2344931"/>
                 </a:lnTo>
                 <a:cubicBezTo>
-                  <a:pt x="5757560" y="2454932"/>
-                  <a:pt x="5823241" y="2389251"/>
-                  <a:pt x="5823241" y="2308230"/>
+                  <a:pt x="1101519" y="2344931"/>
+                  <a:pt x="1087693" y="2338741"/>
+                  <a:pt x="1077684" y="2328732"/>
                 </a:cubicBezTo>
                 <a:lnTo>
-                  <a:pt x="5823241" y="2163830"/>
+                  <a:pt x="1061487" y="2289628"/>
+                </a:lnTo>
+                <a:lnTo>
+                  <a:pt x="1061487" y="2423218"/>
                 </a:lnTo>
                 <a:cubicBezTo>
-                  <a:pt x="5823241" y="2198348"/>
-                  <a:pt x="5795258" y="2226331"/>
-                  <a:pt x="5760740" y="2226331"/>
+                  <a:pt x="1061487" y="2527542"/>
+                  <a:pt x="1146059" y="2612114"/>
+                  <a:pt x="1250383" y="2612114"/>
                 </a:cubicBezTo>
                 <a:lnTo>
-                  <a:pt x="1104528" y="2226331"/>
+                  <a:pt x="5653805" y="2612114"/>
                 </a:lnTo>
                 <a:cubicBezTo>
-                  <a:pt x="1070010" y="2226331"/>
-                  <a:pt x="1042027" y="2198348"/>
-                  <a:pt x="1042027" y="2163830"/>
+                  <a:pt x="5758129" y="2612114"/>
+                  <a:pt x="5842701" y="2527542"/>
+                  <a:pt x="5842701" y="2423218"/>
                 </a:cubicBezTo>
                 <a:close/>
                 <a:moveTo>
-                  <a:pt x="1188728" y="437295"/>
+                  <a:pt x="1250383" y="451094"/>
                 </a:moveTo>
                 <a:cubicBezTo>
-                  <a:pt x="1107707" y="437295"/>
-                  <a:pt x="1042026" y="502976"/>
-                  <a:pt x="1042026" y="583997"/>
+                  <a:pt x="1146059" y="451094"/>
+                  <a:pt x="1061487" y="535666"/>
+                  <a:pt x="1061487" y="639990"/>
                 </a:cubicBezTo>
                 <a:lnTo>
-                  <a:pt x="1042026" y="728397"/>
+                  <a:pt x="1061487" y="773582"/>
                 </a:lnTo>
                 <a:cubicBezTo>
-                  <a:pt x="1042026" y="693879"/>
-                  <a:pt x="1070009" y="665896"/>
-                  <a:pt x="1104527" y="665896"/>
+                  <a:pt x="1061487" y="743038"/>
+                  <a:pt x="1086248" y="718277"/>
+                  <a:pt x="1116792" y="718277"/>
                 </a:cubicBezTo>
                 <a:lnTo>
-                  <a:pt x="5760739" y="665896"/>
+                  <a:pt x="5787397" y="718277"/>
                 </a:lnTo>
                 <a:cubicBezTo>
-                  <a:pt x="5795257" y="665896"/>
-                  <a:pt x="5823240" y="693879"/>
-                  <a:pt x="5823240" y="728397"/>
+                  <a:pt x="5802669" y="718277"/>
+                  <a:pt x="5816495" y="724467"/>
+                  <a:pt x="5826504" y="734476"/>
                 </a:cubicBezTo>
                 <a:lnTo>
-                  <a:pt x="5823240" y="730698"/>
+                  <a:pt x="5842701" y="773580"/>
+                </a:lnTo>
+                <a:lnTo>
+                  <a:pt x="5842701" y="639990"/>
                 </a:lnTo>
                 <a:cubicBezTo>
-                  <a:pt x="5823240" y="681798"/>
-                  <a:pt x="5823241" y="632897"/>
-                  <a:pt x="5823241" y="583997"/>
-                </a:cubicBezTo>
-                <a:cubicBezTo>
-                  <a:pt x="5823241" y="502976"/>
-                  <a:pt x="5757560" y="437295"/>
-                  <a:pt x="5676539" y="437295"/>
+                  <a:pt x="5842701" y="535666"/>
+                  <a:pt x="5758129" y="451094"/>
+                  <a:pt x="5653805" y="451094"/>
                 </a:cubicBezTo>
                 <a:close/>
                 <a:moveTo>
@@ -8536,7 +8696,7 @@
           <p:cNvPr id="17" name="テキスト ボックス 16">
             <a:extLst>
               <a:ext uri="{FF2B5EF4-FFF2-40B4-BE49-F238E27FC236}">
-                <a16:creationId xmlns:a16="http://schemas.microsoft.com/office/drawing/2014/main" id="{F7724E97-9138-2231-87A0-68E3693C9BDD}"/>
+                <a16:creationId xmlns:a16="http://schemas.microsoft.com/office/drawing/2014/main" id="{06DDDAF2-1407-ACEF-C6A6-F64CB4D7EA4E}"/>
               </a:ext>
             </a:extLst>
           </p:cNvPr>
@@ -8561,19 +8721,24 @@
           <a:p>
             <a:pPr algn="ctr"/>
             <a:r>
-              <a:rPr kumimoji="1" lang="en-US" altLang="ja-JP" dirty="0"/>
+              <a:rPr kumimoji="1" lang="en-US" altLang="ja-JP" dirty="0">
+                <a:latin typeface="Jost" pitchFamily="2" charset="0"/>
+                <a:ea typeface="Jost" pitchFamily="2" charset="0"/>
+              </a:rPr>
               <a:t>1</a:t>
             </a:r>
-            <a:endParaRPr kumimoji="1" lang="ja-JP" altLang="en-US" dirty="0"/>
-          </a:p>
-        </p:txBody>
-      </p:sp>
-      <p:sp>
-        <p:nvSpPr>
-          <p:cNvPr id="2" name="テキスト ボックス 1">
+            <a:endParaRPr kumimoji="1" lang="ja-JP" altLang="en-US" dirty="0">
+              <a:latin typeface="Jost" pitchFamily="2" charset="0"/>
+            </a:endParaRPr>
+          </a:p>
+        </p:txBody>
+      </p:sp>
+      <p:sp>
+        <p:nvSpPr>
+          <p:cNvPr id="18" name="テキスト ボックス 17">
             <a:extLst>
               <a:ext uri="{FF2B5EF4-FFF2-40B4-BE49-F238E27FC236}">
-                <a16:creationId xmlns:a16="http://schemas.microsoft.com/office/drawing/2014/main" id="{037648C1-2F45-40CF-3D7A-6FB960705994}"/>
+                <a16:creationId xmlns:a16="http://schemas.microsoft.com/office/drawing/2014/main" id="{A4DA7DF6-55E8-6BA4-3CBC-A6484C4E9FF4}"/>
               </a:ext>
             </a:extLst>
           </p:cNvPr>
@@ -8582,8 +8747,8 @@
         </p:nvSpPr>
         <p:spPr>
           <a:xfrm>
-            <a:off x="1398979" y="840586"/>
-            <a:ext cx="4701543" cy="584775"/>
+            <a:off x="770844" y="3001606"/>
+            <a:ext cx="1739579" cy="400110"/>
           </a:xfrm>
           <a:prstGeom prst="rect">
             <a:avLst/>
@@ -8597,40 +8762,25 @@
           <a:lstStyle/>
           <a:p>
             <a:r>
-              <a:rPr lang="en-US" altLang="ja-JP" sz="3200" b="1" dirty="0">
-                <a:latin typeface="Segoe UI Semibold" panose="020B0702040204020203" pitchFamily="34" charset="0"/>
-                <a:ea typeface="IBM Plex Sans JP" panose="020B0503050203000203" pitchFamily="50" charset="-128"/>
-                <a:cs typeface="Segoe UI Semibold" panose="020B0702040204020203" pitchFamily="34" charset="0"/>
-              </a:rPr>
-              <a:t>FlexChroma</a:t>
-            </a:r>
-            <a:r>
-              <a:rPr lang="en-US" altLang="ja-JP" sz="3200" b="1" dirty="0">
-                <a:latin typeface="IBM Plex Sans JP" panose="020B0503050203000203" pitchFamily="50" charset="-128"/>
-                <a:ea typeface="IBM Plex Sans JP" panose="020B0503050203000203" pitchFamily="50" charset="-128"/>
-              </a:rPr>
-              <a:t> </a:t>
-            </a:r>
-            <a:r>
-              <a:rPr lang="en-US" altLang="ja-JP" sz="3000" b="1" dirty="0">
-                <a:latin typeface="IBM Plex Sans JP" panose="020B0503050203000203" pitchFamily="50" charset="-128"/>
-                <a:ea typeface="IBM Plex Sans JP" panose="020B0503050203000203" pitchFamily="50" charset="-128"/>
-              </a:rPr>
-              <a:t>Tour Guide</a:t>
-            </a:r>
-            <a:endParaRPr kumimoji="1" lang="ja-JP" altLang="en-US" sz="3000" b="1" dirty="0">
-              <a:latin typeface="IBM Plex Sans JP" panose="020B0503050203000203" pitchFamily="50" charset="-128"/>
-              <a:ea typeface="IBM Plex Sans JP" panose="020B0503050203000203" pitchFamily="50" charset="-128"/>
+              <a:rPr lang="en-US" altLang="ja-JP" sz="2000" dirty="0">
+                <a:latin typeface="Jost" pitchFamily="2" charset="0"/>
+                <a:ea typeface="Jost" pitchFamily="2" charset="0"/>
+              </a:rPr>
+              <a:t>1. Introduction</a:t>
+            </a:r>
+            <a:endParaRPr kumimoji="1" lang="ja-JP" altLang="en-US" sz="2000" b="1" dirty="0">
+              <a:latin typeface="Jost" pitchFamily="2" charset="0"/>
+              <a:ea typeface="IBM Plex Sans JP SemiBold" panose="020B0703050203000203" pitchFamily="50" charset="-128"/>
             </a:endParaRPr>
           </a:p>
         </p:txBody>
       </p:sp>
       <p:sp>
         <p:nvSpPr>
-          <p:cNvPr id="11" name="テキスト ボックス 10">
+          <p:cNvPr id="19" name="テキスト ボックス 18">
             <a:extLst>
               <a:ext uri="{FF2B5EF4-FFF2-40B4-BE49-F238E27FC236}">
-                <a16:creationId xmlns:a16="http://schemas.microsoft.com/office/drawing/2014/main" id="{B588B2EE-0B49-3321-079A-EAA300945E47}"/>
+                <a16:creationId xmlns:a16="http://schemas.microsoft.com/office/drawing/2014/main" id="{CF8CC763-14E1-FD71-0C36-FE11DB3F29FC}"/>
               </a:ext>
             </a:extLst>
           </p:cNvPr>
@@ -8639,8 +8789,8 @@
         </p:nvSpPr>
         <p:spPr>
           <a:xfrm>
-            <a:off x="1515655" y="1444411"/>
-            <a:ext cx="3826689" cy="338554"/>
+            <a:off x="668508" y="3424546"/>
+            <a:ext cx="5649491" cy="738664"/>
           </a:xfrm>
           <a:prstGeom prst="rect">
             <a:avLst/>
@@ -8648,35 +8798,36 @@
           <a:noFill/>
         </p:spPr>
         <p:txBody>
-          <a:bodyPr wrap="none" rtlCol="0">
+          <a:bodyPr wrap="square" rtlCol="0">
             <a:spAutoFit/>
           </a:bodyPr>
           <a:lstStyle/>
           <a:p>
             <a:r>
-              <a:rPr lang="en-US" altLang="ja-JP" sz="1600" dirty="0">
-                <a:latin typeface="IBM Plex Sans JP" panose="020B0503050203000203" pitchFamily="50" charset="-128"/>
-                <a:ea typeface="IBM Plex Sans JP" panose="020B0503050203000203" pitchFamily="50" charset="-128"/>
-              </a:rPr>
-              <a:t>- Let's Explore </a:t>
-            </a:r>
-            <a:r>
-              <a:rPr lang="en-US" altLang="ja-JP" sz="1600" dirty="0">
-                <a:latin typeface="Segoe UI Semibold" panose="020B0702040204020203" pitchFamily="34" charset="0"/>
-                <a:ea typeface="IBM Plex Sans JP" panose="020B0503050203000203" pitchFamily="50" charset="-128"/>
+              <a:rPr lang="en-US" altLang="ja-JP" sz="1050" dirty="0">
+                <a:latin typeface="Jost SemiBold" pitchFamily="2" charset="0"/>
+                <a:ea typeface="Jost SemiBold" pitchFamily="2" charset="0"/>
                 <a:cs typeface="Segoe UI Semibold" panose="020B0702040204020203" pitchFamily="34" charset="0"/>
               </a:rPr>
               <a:t>FlexChroma</a:t>
             </a:r>
             <a:r>
-              <a:rPr lang="en-US" altLang="ja-JP" sz="1600" dirty="0">
-                <a:latin typeface="IBM Plex Sans JP" panose="020B0503050203000203" pitchFamily="50" charset="-128"/>
-                <a:ea typeface="IBM Plex Sans JP" panose="020B0503050203000203" pitchFamily="50" charset="-128"/>
-              </a:rPr>
-              <a:t>'s Models -</a:t>
-            </a:r>
-            <a:endParaRPr kumimoji="1" lang="ja-JP" altLang="en-US" sz="1600" dirty="0">
-              <a:latin typeface="IBM Plex Sans JP" panose="020B0503050203000203" pitchFamily="50" charset="-128"/>
+              <a:rPr lang="en-US" altLang="ja-JP" sz="1050" dirty="0">
+                <a:latin typeface="Jost" pitchFamily="2" charset="0"/>
+                <a:ea typeface="Jost" pitchFamily="2" charset="0"/>
+                <a:cs typeface="Segoe UI Semibold" panose="020B0702040204020203" pitchFamily="34" charset="0"/>
+              </a:rPr>
+              <a:t>™</a:t>
+            </a:r>
+            <a:r>
+              <a:rPr lang="en-US" altLang="ja-JP" sz="1050" dirty="0">
+                <a:latin typeface="Jost" pitchFamily="2" charset="0"/>
+                <a:ea typeface="Jost" pitchFamily="2" charset="0"/>
+              </a:rPr>
+              <a:t> is a set of models designed to create filament itself by combining commercially available filaments. It consists of multiple Series, each designed for a different purpose. Within each Series, multiple Models are provided, along with different Profiles and Plates depending on size and usage.</a:t>
+            </a:r>
+            <a:endParaRPr kumimoji="1" lang="ja-JP" altLang="en-US" sz="1050" b="1" dirty="0">
+              <a:latin typeface="Jost" pitchFamily="2" charset="0"/>
               <a:ea typeface="IBM Plex Sans JP" panose="020B0503050203000203" pitchFamily="50" charset="-128"/>
             </a:endParaRPr>
           </a:p>
@@ -8684,10 +8835,10 @@
       </p:sp>
       <p:sp>
         <p:nvSpPr>
-          <p:cNvPr id="12" name="テキスト ボックス 11">
+          <p:cNvPr id="21" name="テキスト ボックス 20">
             <a:extLst>
               <a:ext uri="{FF2B5EF4-FFF2-40B4-BE49-F238E27FC236}">
-                <a16:creationId xmlns:a16="http://schemas.microsoft.com/office/drawing/2014/main" id="{70F1A14B-8154-E747-C82B-183E692F092B}"/>
+                <a16:creationId xmlns:a16="http://schemas.microsoft.com/office/drawing/2014/main" id="{876B90F0-6B6D-43E7-6AFD-0274BCEDB14D}"/>
               </a:ext>
             </a:extLst>
           </p:cNvPr>
@@ -8696,8 +8847,8 @@
         </p:nvSpPr>
         <p:spPr>
           <a:xfrm>
-            <a:off x="2381276" y="1883364"/>
-            <a:ext cx="1790875" cy="307777"/>
+            <a:off x="770844" y="4494466"/>
+            <a:ext cx="3118161" cy="400110"/>
           </a:xfrm>
           <a:prstGeom prst="rect">
             <a:avLst/>
@@ -8711,25 +8862,25 @@
           <a:lstStyle/>
           <a:p>
             <a:r>
-              <a:rPr lang="en-US" altLang="ja-JP" sz="1400" dirty="0">
-                <a:latin typeface="IBM Plex Sans JP" panose="020B0503050203000203" pitchFamily="50" charset="-128"/>
-                <a:ea typeface="IBM Plex Sans JP" panose="020B0503050203000203" pitchFamily="50" charset="-128"/>
-              </a:rPr>
-              <a:t>Ver.1.11  2026.8.8</a:t>
-            </a:r>
-            <a:endParaRPr kumimoji="1" lang="ja-JP" altLang="en-US" sz="1400" dirty="0">
-              <a:latin typeface="IBM Plex Sans JP" panose="020B0503050203000203" pitchFamily="50" charset="-128"/>
-              <a:ea typeface="IBM Plex Sans JP" panose="020B0503050203000203" pitchFamily="50" charset="-128"/>
+              <a:rPr lang="en-US" altLang="ja-JP" sz="2000" dirty="0">
+                <a:latin typeface="Jost" pitchFamily="2" charset="0"/>
+                <a:ea typeface="Jost" pitchFamily="2" charset="0"/>
+              </a:rPr>
+              <a:t>2. How to Choose a Model</a:t>
+            </a:r>
+            <a:endParaRPr kumimoji="1" lang="ja-JP" altLang="en-US" sz="2400" b="1" dirty="0">
+              <a:latin typeface="Jost" pitchFamily="2" charset="0"/>
+              <a:ea typeface="IBM Plex Sans JP SemiBold" panose="020B0703050203000203" pitchFamily="50" charset="-128"/>
             </a:endParaRPr>
           </a:p>
         </p:txBody>
       </p:sp>
       <p:sp>
         <p:nvSpPr>
-          <p:cNvPr id="18" name="テキスト ボックス 17">
+          <p:cNvPr id="22" name="テキスト ボックス 21">
             <a:extLst>
               <a:ext uri="{FF2B5EF4-FFF2-40B4-BE49-F238E27FC236}">
-                <a16:creationId xmlns:a16="http://schemas.microsoft.com/office/drawing/2014/main" id="{B58B679E-EED2-37D5-F878-0982B577C9F1}"/>
+                <a16:creationId xmlns:a16="http://schemas.microsoft.com/office/drawing/2014/main" id="{0034A0D2-5DF3-199F-65FD-2880A96149F8}"/>
               </a:ext>
             </a:extLst>
           </p:cNvPr>
@@ -8738,8 +8889,8 @@
         </p:nvSpPr>
         <p:spPr>
           <a:xfrm>
-            <a:off x="770844" y="3001606"/>
-            <a:ext cx="2055371" cy="400110"/>
+            <a:off x="661239" y="4917406"/>
+            <a:ext cx="5649492" cy="253916"/>
           </a:xfrm>
           <a:prstGeom prst="rect">
             <a:avLst/>
@@ -8747,31 +8898,31 @@
           <a:noFill/>
         </p:spPr>
         <p:txBody>
-          <a:bodyPr wrap="none" rtlCol="0">
+          <a:bodyPr wrap="square" rtlCol="0">
             <a:spAutoFit/>
           </a:bodyPr>
           <a:lstStyle/>
           <a:p>
             <a:r>
-              <a:rPr lang="en-US" altLang="ja-JP" sz="2000" dirty="0">
-                <a:latin typeface="IBM Plex Sans JP SemiBold" panose="020B0703050203000203" pitchFamily="50" charset="-128"/>
-                <a:ea typeface="IBM Plex Sans JP SemiBold" panose="020B0703050203000203" pitchFamily="50" charset="-128"/>
-              </a:rPr>
-              <a:t>1. Introduction</a:t>
-            </a:r>
-            <a:endParaRPr kumimoji="1" lang="ja-JP" altLang="en-US" sz="2000" b="1" dirty="0">
-              <a:latin typeface="IBM Plex Sans JP SemiBold" panose="020B0703050203000203" pitchFamily="50" charset="-128"/>
-              <a:ea typeface="IBM Plex Sans JP SemiBold" panose="020B0703050203000203" pitchFamily="50" charset="-128"/>
+              <a:rPr lang="en-US" altLang="ja-JP" sz="1050" dirty="0">
+                <a:latin typeface="Jost" pitchFamily="2" charset="0"/>
+                <a:ea typeface="Jost" pitchFamily="2" charset="0"/>
+              </a:rPr>
+              <a:t>First, follow this quick selection flow to download and print the correct data.</a:t>
+            </a:r>
+            <a:endParaRPr kumimoji="1" lang="ja-JP" altLang="en-US" sz="1050" b="1" dirty="0">
+              <a:latin typeface="Jost" pitchFamily="2" charset="0"/>
+              <a:ea typeface="IBM Plex Sans JP" panose="020B0503050203000203" pitchFamily="50" charset="-128"/>
             </a:endParaRPr>
           </a:p>
         </p:txBody>
       </p:sp>
       <p:sp>
         <p:nvSpPr>
-          <p:cNvPr id="19" name="テキスト ボックス 18">
+          <p:cNvPr id="25" name="テキスト ボックス 24">
             <a:extLst>
               <a:ext uri="{FF2B5EF4-FFF2-40B4-BE49-F238E27FC236}">
-                <a16:creationId xmlns:a16="http://schemas.microsoft.com/office/drawing/2014/main" id="{C6DEFA1D-CF68-E4F9-BA2D-64447AA15B5D}"/>
+                <a16:creationId xmlns:a16="http://schemas.microsoft.com/office/drawing/2014/main" id="{1FE09D5F-AFD0-0E6B-9E26-D8E4ECEE2809}"/>
               </a:ext>
             </a:extLst>
           </p:cNvPr>
@@ -8780,8 +8931,8 @@
         </p:nvSpPr>
         <p:spPr>
           <a:xfrm>
-            <a:off x="668508" y="3424546"/>
-            <a:ext cx="5649491" cy="738664"/>
+            <a:off x="661238" y="6573178"/>
+            <a:ext cx="5656761" cy="258083"/>
           </a:xfrm>
           <a:prstGeom prst="rect">
             <a:avLst/>
@@ -8796,32 +8947,20 @@
           <a:p>
             <a:r>
               <a:rPr lang="en-US" altLang="ja-JP" sz="1050" dirty="0">
-                <a:latin typeface="Segoe UI Semibold" panose="020B0702040204020203" pitchFamily="34" charset="0"/>
-                <a:ea typeface="IBM Plex Sans JP" panose="020B0503050203000203" pitchFamily="50" charset="-128"/>
-                <a:cs typeface="Segoe UI Semibold" panose="020B0702040204020203" pitchFamily="34" charset="0"/>
-              </a:rPr>
-              <a:t>FlexChroma™</a:t>
-            </a:r>
-            <a:r>
-              <a:rPr lang="en-US" altLang="ja-JP" sz="1050" dirty="0">
-                <a:latin typeface="IBM Plex Sans JP" panose="020B0503050203000203" pitchFamily="50" charset="-128"/>
-                <a:ea typeface="IBM Plex Sans JP" panose="020B0503050203000203" pitchFamily="50" charset="-128"/>
-              </a:rPr>
-              <a:t> is a set of models designed to create filament itself by combining commercially available filaments. It consists of multiple Series, each designed for a different purpose. Within each Series, multiple Models are provided, along with different Profiles and Plates depending on size and usage.</a:t>
-            </a:r>
-            <a:endParaRPr kumimoji="1" lang="ja-JP" altLang="en-US" sz="1050" b="1" dirty="0">
-              <a:latin typeface="IBM Plex Sans JP" panose="020B0503050203000203" pitchFamily="50" charset="-128"/>
-              <a:ea typeface="IBM Plex Sans JP" panose="020B0503050203000203" pitchFamily="50" charset="-128"/>
-            </a:endParaRPr>
-          </a:p>
-        </p:txBody>
-      </p:sp>
-      <p:sp>
-        <p:nvSpPr>
-          <p:cNvPr id="21" name="テキスト ボックス 20">
+                <a:latin typeface="Jost" pitchFamily="2" charset="0"/>
+                <a:ea typeface="Jost" pitchFamily="2" charset="0"/>
+              </a:rPr>
+              <a:t>When choosing a model, start by deciding what kind of filament you want to create.</a:t>
+            </a:r>
+          </a:p>
+        </p:txBody>
+      </p:sp>
+      <p:sp>
+        <p:nvSpPr>
+          <p:cNvPr id="26" name="テキスト ボックス 25">
             <a:extLst>
               <a:ext uri="{FF2B5EF4-FFF2-40B4-BE49-F238E27FC236}">
-                <a16:creationId xmlns:a16="http://schemas.microsoft.com/office/drawing/2014/main" id="{904DB38D-B7D0-BAB7-C051-CE44D494214D}"/>
+                <a16:creationId xmlns:a16="http://schemas.microsoft.com/office/drawing/2014/main" id="{4275629B-880D-2761-780C-5A291B49AECC}"/>
               </a:ext>
             </a:extLst>
           </p:cNvPr>
@@ -8830,8 +8969,8 @@
         </p:nvSpPr>
         <p:spPr>
           <a:xfrm>
-            <a:off x="770844" y="4494466"/>
-            <a:ext cx="3389069" cy="400110"/>
+            <a:off x="770843" y="6836315"/>
+            <a:ext cx="5554425" cy="1169551"/>
           </a:xfrm>
           <a:prstGeom prst="rect">
             <a:avLst/>
@@ -8839,31 +8978,113 @@
           <a:noFill/>
         </p:spPr>
         <p:txBody>
-          <a:bodyPr wrap="none" rtlCol="0">
+          <a:bodyPr wrap="square" rtlCol="0">
             <a:spAutoFit/>
           </a:bodyPr>
           <a:lstStyle/>
           <a:p>
             <a:r>
-              <a:rPr lang="en-US" altLang="ja-JP" sz="2000" dirty="0">
-                <a:latin typeface="IBM Plex Sans JP SemiBold" panose="020B0703050203000203" pitchFamily="50" charset="-128"/>
-                <a:ea typeface="IBM Plex Sans JP SemiBold" panose="020B0703050203000203" pitchFamily="50" charset="-128"/>
-              </a:rPr>
-              <a:t>2. How to Choose a Model</a:t>
-            </a:r>
-            <a:endParaRPr kumimoji="1" lang="ja-JP" altLang="en-US" sz="2400" b="1" dirty="0">
-              <a:latin typeface="IBM Plex Sans JP SemiBold" panose="020B0703050203000203" pitchFamily="50" charset="-128"/>
-              <a:ea typeface="IBM Plex Sans JP SemiBold" panose="020B0703050203000203" pitchFamily="50" charset="-128"/>
+              <a:rPr lang="en-US" altLang="ja-JP" sz="1000" dirty="0">
+                <a:latin typeface="Jost" pitchFamily="2" charset="0"/>
+                <a:ea typeface="Jost" pitchFamily="2" charset="0"/>
+              </a:rPr>
+              <a:t>1. Select a Series: </a:t>
+            </a:r>
+            <a:r>
+              <a:rPr lang="en-US" altLang="ja-JP" sz="1000" dirty="0">
+                <a:latin typeface="Jost Medium" pitchFamily="2" charset="0"/>
+                <a:ea typeface="Jost Medium" pitchFamily="2" charset="0"/>
+              </a:rPr>
+              <a:t>Blend Filament</a:t>
+            </a:r>
+            <a:r>
+              <a:rPr lang="en-US" altLang="ja-JP" sz="1000" dirty="0">
+                <a:latin typeface="Jost" pitchFamily="2" charset="0"/>
+                <a:ea typeface="Jost" pitchFamily="2" charset="0"/>
+              </a:rPr>
+              <a:t> for mixed colors, </a:t>
+            </a:r>
+            <a:r>
+              <a:rPr lang="en-US" altLang="ja-JP" sz="1000" dirty="0">
+                <a:latin typeface="Jost Medium" pitchFamily="2" charset="0"/>
+                <a:ea typeface="Jost Medium" pitchFamily="2" charset="0"/>
+              </a:rPr>
+              <a:t>Gradient Filament</a:t>
+            </a:r>
+            <a:r>
+              <a:rPr lang="en-US" altLang="ja-JP" sz="1000" dirty="0">
+                <a:latin typeface="Jost" pitchFamily="2" charset="0"/>
+                <a:ea typeface="Jost" pitchFamily="2" charset="0"/>
+              </a:rPr>
+              <a:t> for color changes.</a:t>
+            </a:r>
+          </a:p>
+          <a:p>
+            <a:r>
+              <a:rPr lang="en-US" altLang="ja-JP" sz="1000" dirty="0">
+                <a:latin typeface="Jost" pitchFamily="2" charset="0"/>
+                <a:ea typeface="Jost" pitchFamily="2" charset="0"/>
+              </a:rPr>
+              <a:t>2. Select a Model size: Use an S4 Model for small objects, or an M1 Model for larger prints </a:t>
+            </a:r>
+          </a:p>
+          <a:p>
+            <a:r>
+              <a:rPr lang="en-US" altLang="ja-JP" sz="1000" dirty="0">
+                <a:latin typeface="Jost" pitchFamily="2" charset="0"/>
+                <a:ea typeface="Jost" pitchFamily="2" charset="0"/>
+              </a:rPr>
+              <a:t>     requiring around 70g of filament.</a:t>
+            </a:r>
+          </a:p>
+          <a:p>
+            <a:r>
+              <a:rPr lang="en-US" altLang="ja-JP" sz="1000" dirty="0">
+                <a:latin typeface="Jost" pitchFamily="2" charset="0"/>
+                <a:ea typeface="Jost" pitchFamily="2" charset="0"/>
+              </a:rPr>
+              <a:t>3. Select a Profile and Plate: Choose the Plate that matches your desired mixing ratio or </a:t>
+            </a:r>
+          </a:p>
+          <a:p>
+            <a:r>
+              <a:rPr lang="en-US" altLang="ja-JP" sz="1000" dirty="0">
+                <a:latin typeface="Jost" pitchFamily="2" charset="0"/>
+                <a:ea typeface="Jost" pitchFamily="2" charset="0"/>
+              </a:rPr>
+              <a:t>     pattern.</a:t>
+            </a:r>
+          </a:p>
+          <a:p>
+            <a:r>
+              <a:rPr lang="en-US" altLang="ja-JP" sz="1000" dirty="0">
+                <a:latin typeface="Jost" pitchFamily="2" charset="0"/>
+                <a:ea typeface="Jost" pitchFamily="2" charset="0"/>
+              </a:rPr>
+              <a:t>4. Assign filaments and slice: Use filaments with the same or similar material, assign </a:t>
+            </a:r>
+          </a:p>
+          <a:p>
+            <a:r>
+              <a:rPr lang="en-US" altLang="ja-JP" sz="1000" dirty="0">
+                <a:latin typeface="Jost" pitchFamily="2" charset="0"/>
+                <a:ea typeface="Jost" pitchFamily="2" charset="0"/>
+              </a:rPr>
+              <a:t>     them, slice the model, and read the print notes before printing.</a:t>
+            </a:r>
+            <a:endParaRPr kumimoji="1" lang="ja-JP" altLang="en-US" sz="900" b="1" dirty="0">
+              <a:latin typeface="Jost" pitchFamily="2" charset="0"/>
+              <a:ea typeface="IBM Plex Sans JP Light" panose="020B0403050203000203" pitchFamily="50" charset="-128"/>
             </a:endParaRPr>
           </a:p>
         </p:txBody>
       </p:sp>
       <p:sp>
         <p:nvSpPr>
-          <p:cNvPr id="22" name="テキスト ボックス 21">
+          <p:cNvPr id="27" name="テキスト ボックス 26">
             <a:extLst>
               <a:ext uri="{FF2B5EF4-FFF2-40B4-BE49-F238E27FC236}">
-                <a16:creationId xmlns:a16="http://schemas.microsoft.com/office/drawing/2014/main" id="{0D6CFBE2-A4A0-54C6-80FE-E0E055BADBAB}"/>
+                <a16:creationId xmlns:a16="http://schemas.microsoft.com/office/drawing/2014/main" id="{1A99EEC5-F6D2-8DA9-EABD-3BCD757766D3}"/>
               </a:ext>
             </a:extLst>
           </p:cNvPr>
@@ -8872,8 +9093,8 @@
         </p:nvSpPr>
         <p:spPr>
           <a:xfrm>
-            <a:off x="661239" y="4917406"/>
-            <a:ext cx="5649492" cy="253916"/>
+            <a:off x="770842" y="8115753"/>
+            <a:ext cx="5464000" cy="230832"/>
           </a:xfrm>
           <a:prstGeom prst="rect">
             <a:avLst/>
@@ -8887,25 +9108,40 @@
           <a:lstStyle/>
           <a:p>
             <a:r>
-              <a:rPr lang="en-US" altLang="ja-JP" sz="1050" dirty="0">
-                <a:latin typeface="IBM Plex Sans JP" panose="020B0503050203000203" pitchFamily="50" charset="-128"/>
-                <a:ea typeface="IBM Plex Sans JP" panose="020B0503050203000203" pitchFamily="50" charset="-128"/>
-              </a:rPr>
-              <a:t>First, follow this quick selection flow to download and print the correct data.</a:t>
-            </a:r>
-            <a:endParaRPr kumimoji="1" lang="ja-JP" altLang="en-US" sz="1050" b="1" dirty="0">
-              <a:latin typeface="IBM Plex Sans JP" panose="020B0503050203000203" pitchFamily="50" charset="-128"/>
-              <a:ea typeface="IBM Plex Sans JP" panose="020B0503050203000203" pitchFamily="50" charset="-128"/>
+              <a:rPr lang="en-US" altLang="ja-JP" sz="900" dirty="0">
+                <a:latin typeface="Jost" pitchFamily="2" charset="0"/>
+                <a:ea typeface="Jost" pitchFamily="2" charset="0"/>
+              </a:rPr>
+              <a:t>*Note: In </a:t>
+            </a:r>
+            <a:r>
+              <a:rPr lang="en-US" altLang="ja-JP" sz="900" dirty="0">
+                <a:latin typeface="Jost SemiBold" pitchFamily="2" charset="0"/>
+                <a:ea typeface="Jost SemiBold" pitchFamily="2" charset="0"/>
+                <a:cs typeface="Segoe UI" panose="020B0502040204020203" pitchFamily="34" charset="0"/>
+              </a:rPr>
+              <a:t>FlexChroma</a:t>
+            </a:r>
+            <a:r>
+              <a:rPr lang="en-US" altLang="ja-JP" sz="900" dirty="0">
+                <a:latin typeface="Jost" pitchFamily="2" charset="0"/>
+                <a:ea typeface="Jost" pitchFamily="2" charset="0"/>
+              </a:rPr>
+              <a:t>, “Profile” means a purpose-based classification, not different print settings.</a:t>
+            </a:r>
+            <a:endParaRPr kumimoji="1" lang="ja-JP" altLang="en-US" sz="900" b="1" dirty="0">
+              <a:latin typeface="Jost" pitchFamily="2" charset="0"/>
+              <a:ea typeface="IBM Plex Sans JP Light" panose="020B0403050203000203" pitchFamily="50" charset="-128"/>
             </a:endParaRPr>
           </a:p>
         </p:txBody>
       </p:sp>
       <p:sp>
         <p:nvSpPr>
-          <p:cNvPr id="25" name="テキスト ボックス 24">
+          <p:cNvPr id="31" name="テキスト ボックス 30">
             <a:extLst>
               <a:ext uri="{FF2B5EF4-FFF2-40B4-BE49-F238E27FC236}">
-                <a16:creationId xmlns:a16="http://schemas.microsoft.com/office/drawing/2014/main" id="{08407871-7712-1714-53D0-42420BDF6422}"/>
+                <a16:creationId xmlns:a16="http://schemas.microsoft.com/office/drawing/2014/main" id="{99BB0602-AA10-079A-F9BF-6BF72D05E1C8}"/>
               </a:ext>
             </a:extLst>
           </p:cNvPr>
@@ -8914,8 +9150,8 @@
         </p:nvSpPr>
         <p:spPr>
           <a:xfrm>
-            <a:off x="661238" y="6573178"/>
-            <a:ext cx="5656761" cy="258083"/>
+            <a:off x="1515655" y="1444411"/>
+            <a:ext cx="3448380" cy="338554"/>
           </a:xfrm>
           <a:prstGeom prst="rect">
             <a:avLst/>
@@ -8923,27 +9159,46 @@
           <a:noFill/>
         </p:spPr>
         <p:txBody>
-          <a:bodyPr wrap="square" rtlCol="0">
+          <a:bodyPr wrap="none" rtlCol="0">
             <a:spAutoFit/>
           </a:bodyPr>
           <a:lstStyle/>
           <a:p>
             <a:r>
-              <a:rPr lang="en-US" altLang="ja-JP" sz="1050" dirty="0">
-                <a:latin typeface="IBM Plex Sans JP" panose="020B0503050203000203" pitchFamily="50" charset="-128"/>
-                <a:ea typeface="IBM Plex Sans JP" panose="020B0503050203000203" pitchFamily="50" charset="-128"/>
-              </a:rPr>
-              <a:t>When choosing a model, start by deciding what kind of filament you want to create.</a:t>
-            </a:r>
-          </a:p>
-        </p:txBody>
-      </p:sp>
-      <p:sp>
-        <p:nvSpPr>
-          <p:cNvPr id="26" name="テキスト ボックス 25">
+              <a:rPr lang="en-US" altLang="ja-JP" sz="1600" dirty="0">
+                <a:latin typeface="Jost" pitchFamily="2" charset="0"/>
+                <a:ea typeface="Jost" pitchFamily="2" charset="0"/>
+              </a:rPr>
+              <a:t>- Let's Explore </a:t>
+            </a:r>
+            <a:r>
+              <a:rPr lang="en-US" altLang="ja-JP" sz="1600" dirty="0">
+                <a:latin typeface="Jost SemiBold" pitchFamily="2" charset="0"/>
+                <a:ea typeface="Jost SemiBold" pitchFamily="2" charset="0"/>
+                <a:cs typeface="Segoe UI Semibold" panose="020B0702040204020203" pitchFamily="34" charset="0"/>
+              </a:rPr>
+              <a:t>FlexChroma</a:t>
+            </a:r>
+            <a:r>
+              <a:rPr lang="en-US" altLang="ja-JP" sz="1600" dirty="0">
+                <a:latin typeface="Jost" pitchFamily="2" charset="0"/>
+                <a:ea typeface="Jost" pitchFamily="2" charset="0"/>
+              </a:rPr>
+              <a:t>'s Models -</a:t>
+            </a:r>
+            <a:endParaRPr kumimoji="1" lang="ja-JP" altLang="en-US" sz="1600" dirty="0">
+              <a:latin typeface="Jost" pitchFamily="2" charset="0"/>
+              <a:ea typeface="IBM Plex Sans JP" panose="020B0503050203000203" pitchFamily="50" charset="-128"/>
+            </a:endParaRPr>
+          </a:p>
+        </p:txBody>
+      </p:sp>
+      <p:sp>
+        <p:nvSpPr>
+          <p:cNvPr id="34" name="テキスト ボックス 33">
             <a:extLst>
               <a:ext uri="{FF2B5EF4-FFF2-40B4-BE49-F238E27FC236}">
-                <a16:creationId xmlns:a16="http://schemas.microsoft.com/office/drawing/2014/main" id="{54428E43-7065-CB5F-8C19-67DF85808B38}"/>
+                <a16:creationId xmlns:a16="http://schemas.microsoft.com/office/drawing/2014/main" id="{4670B59E-4888-7C24-ECC9-80C24E14A32F}"/>
               </a:ext>
             </a:extLst>
           </p:cNvPr>
@@ -8952,8 +9207,8 @@
         </p:nvSpPr>
         <p:spPr>
           <a:xfrm>
-            <a:off x="770843" y="6836315"/>
-            <a:ext cx="5554425" cy="1169551"/>
+            <a:off x="2381276" y="1883364"/>
+            <a:ext cx="1737976" cy="307777"/>
           </a:xfrm>
           <a:prstGeom prst="rect">
             <a:avLst/>
@@ -8961,142 +9216,31 @@
           <a:noFill/>
         </p:spPr>
         <p:txBody>
-          <a:bodyPr wrap="square" rtlCol="0">
+          <a:bodyPr wrap="none" rtlCol="0">
             <a:spAutoFit/>
           </a:bodyPr>
           <a:lstStyle/>
           <a:p>
             <a:r>
-              <a:rPr lang="en-US" altLang="ja-JP" sz="1000" dirty="0">
-                <a:latin typeface="IBM Plex Sans JP" panose="020B0503050203000203" pitchFamily="50" charset="-128"/>
-                <a:ea typeface="IBM Plex Sans JP" panose="020B0503050203000203" pitchFamily="50" charset="-128"/>
-              </a:rPr>
-              <a:t>1. Select a Series: Blend Filament for mixed colors, Gradient Filament for color changes.</a:t>
-            </a:r>
-          </a:p>
-          <a:p>
-            <a:r>
-              <a:rPr lang="en-US" altLang="ja-JP" sz="1000" dirty="0">
-                <a:latin typeface="IBM Plex Sans JP" panose="020B0503050203000203" pitchFamily="50" charset="-128"/>
-                <a:ea typeface="IBM Plex Sans JP" panose="020B0503050203000203" pitchFamily="50" charset="-128"/>
-              </a:rPr>
-              <a:t>2. Select a Model size: Use an S4 Model for small objects, or an M1 Model for larger prints </a:t>
-            </a:r>
-          </a:p>
-          <a:p>
-            <a:r>
-              <a:rPr lang="en-US" altLang="ja-JP" sz="1000" dirty="0">
-                <a:latin typeface="IBM Plex Sans JP" panose="020B0503050203000203" pitchFamily="50" charset="-128"/>
-                <a:ea typeface="IBM Plex Sans JP" panose="020B0503050203000203" pitchFamily="50" charset="-128"/>
-              </a:rPr>
-              <a:t>     requiring around 70g of filament.</a:t>
-            </a:r>
-          </a:p>
-          <a:p>
-            <a:r>
-              <a:rPr lang="en-US" altLang="ja-JP" sz="1000" dirty="0">
-                <a:latin typeface="IBM Plex Sans JP" panose="020B0503050203000203" pitchFamily="50" charset="-128"/>
-                <a:ea typeface="IBM Plex Sans JP" panose="020B0503050203000203" pitchFamily="50" charset="-128"/>
-              </a:rPr>
-              <a:t>3. Select a Profile and Plate: Choose the Plate that matches your desired mixing ratio or </a:t>
-            </a:r>
-          </a:p>
-          <a:p>
-            <a:r>
-              <a:rPr lang="en-US" altLang="ja-JP" sz="1000" dirty="0">
-                <a:latin typeface="IBM Plex Sans JP" panose="020B0503050203000203" pitchFamily="50" charset="-128"/>
-                <a:ea typeface="IBM Plex Sans JP" panose="020B0503050203000203" pitchFamily="50" charset="-128"/>
-              </a:rPr>
-              <a:t>     pattern.</a:t>
-            </a:r>
-          </a:p>
-          <a:p>
-            <a:r>
-              <a:rPr lang="en-US" altLang="ja-JP" sz="1000" dirty="0">
-                <a:latin typeface="IBM Plex Sans JP" panose="020B0503050203000203" pitchFamily="50" charset="-128"/>
-                <a:ea typeface="IBM Plex Sans JP" panose="020B0503050203000203" pitchFamily="50" charset="-128"/>
-              </a:rPr>
-              <a:t>4. Assign filaments and slice: Use filaments with the same or similar material, assign </a:t>
-            </a:r>
-          </a:p>
-          <a:p>
-            <a:r>
-              <a:rPr lang="en-US" altLang="ja-JP" sz="1000" dirty="0">
-                <a:latin typeface="IBM Plex Sans JP" panose="020B0503050203000203" pitchFamily="50" charset="-128"/>
-                <a:ea typeface="IBM Plex Sans JP" panose="020B0503050203000203" pitchFamily="50" charset="-128"/>
-              </a:rPr>
-              <a:t>     them, slice the model, and read the print notes before printing.</a:t>
-            </a:r>
-            <a:endParaRPr kumimoji="1" lang="ja-JP" altLang="en-US" sz="900" b="1" dirty="0">
-              <a:latin typeface="IBM Plex Sans JP Light" panose="020B0403050203000203" pitchFamily="50" charset="-128"/>
-              <a:ea typeface="IBM Plex Sans JP Light" panose="020B0403050203000203" pitchFamily="50" charset="-128"/>
-            </a:endParaRPr>
-          </a:p>
-        </p:txBody>
-      </p:sp>
-      <p:sp>
-        <p:nvSpPr>
-          <p:cNvPr id="27" name="テキスト ボックス 26">
-            <a:extLst>
-              <a:ext uri="{FF2B5EF4-FFF2-40B4-BE49-F238E27FC236}">
-                <a16:creationId xmlns:a16="http://schemas.microsoft.com/office/drawing/2014/main" id="{DE739D59-FAEF-B68A-41EA-3512C3BC39FD}"/>
-              </a:ext>
-            </a:extLst>
-          </p:cNvPr>
-          <p:cNvSpPr txBox="1"/>
-          <p:nvPr/>
-        </p:nvSpPr>
-        <p:spPr>
-          <a:xfrm>
-            <a:off x="770842" y="8115753"/>
-            <a:ext cx="5464000" cy="230832"/>
-          </a:xfrm>
-          <a:prstGeom prst="rect">
-            <a:avLst/>
-          </a:prstGeom>
-          <a:noFill/>
-        </p:spPr>
-        <p:txBody>
-          <a:bodyPr wrap="square" rtlCol="0">
-            <a:spAutoFit/>
-          </a:bodyPr>
-          <a:lstStyle/>
-          <a:p>
-            <a:r>
-              <a:rPr lang="en-US" altLang="ja-JP" sz="900" dirty="0">
-                <a:latin typeface="IBM Plex Sans JP Light" panose="020B0403050203000203" pitchFamily="50" charset="-128"/>
-                <a:ea typeface="IBM Plex Sans JP Light" panose="020B0403050203000203" pitchFamily="50" charset="-128"/>
-              </a:rPr>
-              <a:t>*Note: In </a:t>
-            </a:r>
-            <a:r>
-              <a:rPr lang="en-US" altLang="ja-JP" sz="900" dirty="0">
-                <a:latin typeface="Segoe UI" panose="020B0502040204020203" pitchFamily="34" charset="0"/>
-                <a:ea typeface="IBM Plex Sans JP Light" panose="020B0403050203000203" pitchFamily="50" charset="-128"/>
-                <a:cs typeface="Segoe UI" panose="020B0502040204020203" pitchFamily="34" charset="0"/>
-              </a:rPr>
-              <a:t>FlexChroma</a:t>
-            </a:r>
-            <a:r>
-              <a:rPr lang="en-US" altLang="ja-JP" sz="900" dirty="0">
-                <a:latin typeface="IBM Plex Sans JP Light" panose="020B0403050203000203" pitchFamily="50" charset="-128"/>
-                <a:ea typeface="IBM Plex Sans JP Light" panose="020B0403050203000203" pitchFamily="50" charset="-128"/>
-              </a:rPr>
-              <a:t>, “Profile” means a purpose-based classification, not different print settings.</a:t>
-            </a:r>
-            <a:endParaRPr kumimoji="1" lang="ja-JP" altLang="en-US" sz="900" b="1" dirty="0">
-              <a:latin typeface="IBM Plex Sans JP Light" panose="020B0403050203000203" pitchFamily="50" charset="-128"/>
-              <a:ea typeface="IBM Plex Sans JP Light" panose="020B0403050203000203" pitchFamily="50" charset="-128"/>
+              <a:rPr lang="en-US" altLang="ja-JP" sz="1400" dirty="0">
+                <a:latin typeface="Jost" pitchFamily="2" charset="0"/>
+                <a:ea typeface="Jost" pitchFamily="2" charset="0"/>
+              </a:rPr>
+              <a:t>Ver.1.12  2026.9.16</a:t>
+            </a:r>
+            <a:endParaRPr kumimoji="1" lang="ja-JP" altLang="en-US" sz="1400" dirty="0">
+              <a:latin typeface="Jost" pitchFamily="2" charset="0"/>
+              <a:ea typeface="IBM Plex Sans JP" panose="020B0503050203000203" pitchFamily="50" charset="-128"/>
             </a:endParaRPr>
           </a:p>
         </p:txBody>
       </p:sp>
       <p:pic>
         <p:nvPicPr>
-          <p:cNvPr id="6" name="図 5">
+          <p:cNvPr id="12" name="図 11">
             <a:extLst>
               <a:ext uri="{FF2B5EF4-FFF2-40B4-BE49-F238E27FC236}">
-                <a16:creationId xmlns:a16="http://schemas.microsoft.com/office/drawing/2014/main" id="{B714522D-D813-2462-0161-A0C7F73B894B}"/>
+                <a16:creationId xmlns:a16="http://schemas.microsoft.com/office/drawing/2014/main" id="{5F56F43A-6F17-1423-BEE9-B9EBD3C0BEF4}"/>
               </a:ext>
             </a:extLst>
           </p:cNvPr>
@@ -9138,12 +9282,69 @@
           </a:extLst>
         </p:spPr>
       </p:pic>
+      <p:sp>
+        <p:nvSpPr>
+          <p:cNvPr id="13" name="テキスト ボックス 12">
+            <a:extLst>
+              <a:ext uri="{FF2B5EF4-FFF2-40B4-BE49-F238E27FC236}">
+                <a16:creationId xmlns:a16="http://schemas.microsoft.com/office/drawing/2014/main" id="{842F2DE8-E24F-455D-3B50-E9285B47A029}"/>
+              </a:ext>
+            </a:extLst>
+          </p:cNvPr>
+          <p:cNvSpPr txBox="1"/>
+          <p:nvPr/>
+        </p:nvSpPr>
+        <p:spPr>
+          <a:xfrm>
+            <a:off x="1484323" y="840586"/>
+            <a:ext cx="4395755" cy="584775"/>
+          </a:xfrm>
+          <a:prstGeom prst="rect">
+            <a:avLst/>
+          </a:prstGeom>
+          <a:noFill/>
+        </p:spPr>
+        <p:txBody>
+          <a:bodyPr wrap="none" rtlCol="0">
+            <a:spAutoFit/>
+          </a:bodyPr>
+          <a:lstStyle/>
+          <a:p>
+            <a:r>
+              <a:rPr lang="en-US" altLang="ja-JP" sz="3200" dirty="0">
+                <a:latin typeface="Jost SemiBold" pitchFamily="2" charset="0"/>
+                <a:ea typeface="Jost SemiBold" pitchFamily="2" charset="0"/>
+                <a:cs typeface="Segoe UI Semibold" panose="020B0702040204020203" pitchFamily="34" charset="0"/>
+              </a:rPr>
+              <a:t>FlexChroma</a:t>
+            </a:r>
+            <a:r>
+              <a:rPr lang="en-US" altLang="ja-JP" sz="3200" dirty="0">
+                <a:latin typeface="Jost Medium" pitchFamily="2" charset="0"/>
+                <a:ea typeface="Jost Medium" pitchFamily="2" charset="0"/>
+              </a:rPr>
+              <a:t> </a:t>
+            </a:r>
+            <a:r>
+              <a:rPr lang="en-US" altLang="ja-JP" sz="3000" dirty="0">
+                <a:latin typeface="Jost Medium" pitchFamily="2" charset="0"/>
+                <a:ea typeface="Jost Medium" pitchFamily="2" charset="0"/>
+              </a:rPr>
+              <a:t>Tour Guide</a:t>
+            </a:r>
+            <a:endParaRPr kumimoji="1" lang="ja-JP" altLang="en-US" sz="3000" dirty="0">
+              <a:latin typeface="Jost Medium" pitchFamily="2" charset="0"/>
+              <a:ea typeface="IBM Plex Sans JP" panose="020B0503050203000203" pitchFamily="50" charset="-128"/>
+            </a:endParaRPr>
+          </a:p>
+        </p:txBody>
+      </p:sp>
       <p:pic>
         <p:nvPicPr>
-          <p:cNvPr id="8" name="図 7">
+          <p:cNvPr id="33" name="図 32">
             <a:extLst>
               <a:ext uri="{FF2B5EF4-FFF2-40B4-BE49-F238E27FC236}">
-                <a16:creationId xmlns:a16="http://schemas.microsoft.com/office/drawing/2014/main" id="{3AE1B5FE-5164-7D3A-A4F5-C86E387B70FD}"/>
+                <a16:creationId xmlns:a16="http://schemas.microsoft.com/office/drawing/2014/main" id="{3E021905-DD3B-23F3-14B2-C64B24799CDA}"/>
               </a:ext>
             </a:extLst>
           </p:cNvPr>
@@ -9166,7 +9367,7 @@
         </p:blipFill>
         <p:spPr>
           <a:xfrm>
-            <a:off x="1051920" y="905041"/>
+            <a:off x="1076304" y="905041"/>
             <a:ext cx="406869" cy="392227"/>
           </a:xfrm>
           <a:prstGeom prst="rect">
@@ -9177,7 +9378,7 @@
     </p:spTree>
     <p:extLst>
       <p:ext uri="{BB962C8B-B14F-4D97-AF65-F5344CB8AC3E}">
-        <p14:creationId xmlns:p14="http://schemas.microsoft.com/office/powerpoint/2010/main" val="17367200"/>
+        <p14:creationId xmlns:p14="http://schemas.microsoft.com/office/powerpoint/2010/main" val="3465751298"/>
       </p:ext>
     </p:extLst>
   </p:cSld>
@@ -9195,7 +9396,7 @@
         <p:cNvPr id="1" name="">
           <a:extLst>
             <a:ext uri="{FF2B5EF4-FFF2-40B4-BE49-F238E27FC236}">
-              <a16:creationId xmlns:a16="http://schemas.microsoft.com/office/drawing/2014/main" id="{FDED8CF6-698C-0611-6FE9-D8447E17F739}"/>
+              <a16:creationId xmlns:a16="http://schemas.microsoft.com/office/drawing/2014/main" id="{DEAE034E-96CF-FC68-5095-0683021BD814}"/>
             </a:ext>
           </a:extLst>
         </p:cNvPr>
@@ -9212,10 +9413,10 @@
       </p:grpSpPr>
       <p:sp>
         <p:nvSpPr>
-          <p:cNvPr id="6" name="正方形/長方形 5">
+          <p:cNvPr id="2" name="正方形/長方形 1">
             <a:extLst>
               <a:ext uri="{FF2B5EF4-FFF2-40B4-BE49-F238E27FC236}">
-                <a16:creationId xmlns:a16="http://schemas.microsoft.com/office/drawing/2014/main" id="{5776EC83-5487-B904-9A4C-0C56AF1763D8}"/>
+                <a16:creationId xmlns:a16="http://schemas.microsoft.com/office/drawing/2014/main" id="{3C1C5BDF-4EFD-D32E-8D11-D70E5AB7D184}"/>
               </a:ext>
             </a:extLst>
           </p:cNvPr>
@@ -9224,8 +9425,8 @@
         </p:nvSpPr>
         <p:spPr>
           <a:xfrm>
-            <a:off x="33951" y="45268"/>
-            <a:ext cx="6790099" cy="9053465"/>
+            <a:off x="67565" y="90087"/>
+            <a:ext cx="6722870" cy="8963827"/>
           </a:xfrm>
           <a:prstGeom prst="rect">
             <a:avLst/>
@@ -9275,10 +9476,10 @@
       </p:sp>
       <p:sp>
         <p:nvSpPr>
-          <p:cNvPr id="35" name="フリーフォーム: 図形 34">
+          <p:cNvPr id="27" name="フリーフォーム: 図形 26">
             <a:extLst>
               <a:ext uri="{FF2B5EF4-FFF2-40B4-BE49-F238E27FC236}">
-                <a16:creationId xmlns:a16="http://schemas.microsoft.com/office/drawing/2014/main" id="{3AFC7783-D5E1-ECCC-D344-D4ECFBFDECDF}"/>
+                <a16:creationId xmlns:a16="http://schemas.microsoft.com/office/drawing/2014/main" id="{E1E23794-9C87-9E4A-197A-F3579131211B}"/>
               </a:ext>
             </a:extLst>
           </p:cNvPr>
@@ -9287,244 +9488,244 @@
         </p:nvSpPr>
         <p:spPr>
           <a:xfrm>
-            <a:off x="-2195" y="0"/>
-            <a:ext cx="6862389" cy="9144000"/>
+            <a:off x="-7269" y="-1"/>
+            <a:ext cx="6858000" cy="9144000"/>
           </a:xfrm>
           <a:custGeom>
             <a:avLst/>
             <a:gdLst>
-              <a:gd name="connsiteX0" fmla="*/ 3739233 w 6862389"/>
-              <a:gd name="connsiteY0" fmla="*/ 8661917 h 9144000"/>
-              <a:gd name="connsiteX1" fmla="*/ 3739233 w 6862389"/>
-              <a:gd name="connsiteY1" fmla="*/ 8715917 h 9144000"/>
-              <a:gd name="connsiteX2" fmla="*/ 6331233 w 6862389"/>
-              <a:gd name="connsiteY2" fmla="*/ 8715917 h 9144000"/>
-              <a:gd name="connsiteX3" fmla="*/ 6331233 w 6862389"/>
-              <a:gd name="connsiteY3" fmla="*/ 8661917 h 9144000"/>
-              <a:gd name="connsiteX4" fmla="*/ 558927 w 6862389"/>
-              <a:gd name="connsiteY4" fmla="*/ 8661917 h 9144000"/>
-              <a:gd name="connsiteX5" fmla="*/ 558927 w 6862389"/>
-              <a:gd name="connsiteY5" fmla="*/ 8715917 h 9144000"/>
-              <a:gd name="connsiteX6" fmla="*/ 3150927 w 6862389"/>
-              <a:gd name="connsiteY6" fmla="*/ 8715917 h 9144000"/>
-              <a:gd name="connsiteX7" fmla="*/ 3150927 w 6862389"/>
-              <a:gd name="connsiteY7" fmla="*/ 8661917 h 9144000"/>
-              <a:gd name="connsiteX8" fmla="*/ 672899 w 6862389"/>
-              <a:gd name="connsiteY8" fmla="*/ 2635259 h 9144000"/>
-              <a:gd name="connsiteX9" fmla="*/ 570564 w 6862389"/>
-              <a:gd name="connsiteY9" fmla="*/ 2737594 h 9144000"/>
-              <a:gd name="connsiteX10" fmla="*/ 672899 w 6862389"/>
-              <a:gd name="connsiteY10" fmla="*/ 2839929 h 9144000"/>
-              <a:gd name="connsiteX11" fmla="*/ 775234 w 6862389"/>
-              <a:gd name="connsiteY11" fmla="*/ 2737594 h 9144000"/>
-              <a:gd name="connsiteX12" fmla="*/ 672899 w 6862389"/>
-              <a:gd name="connsiteY12" fmla="*/ 2635259 h 9144000"/>
-              <a:gd name="connsiteX13" fmla="*/ 672899 w 6862389"/>
-              <a:gd name="connsiteY13" fmla="*/ 671552 h 9144000"/>
-              <a:gd name="connsiteX14" fmla="*/ 570564 w 6862389"/>
-              <a:gd name="connsiteY14" fmla="*/ 773887 h 9144000"/>
-              <a:gd name="connsiteX15" fmla="*/ 672899 w 6862389"/>
-              <a:gd name="connsiteY15" fmla="*/ 876222 h 9144000"/>
-              <a:gd name="connsiteX16" fmla="*/ 775234 w 6862389"/>
-              <a:gd name="connsiteY16" fmla="*/ 773887 h 9144000"/>
-              <a:gd name="connsiteX17" fmla="*/ 672899 w 6862389"/>
-              <a:gd name="connsiteY17" fmla="*/ 671552 h 9144000"/>
-              <a:gd name="connsiteX18" fmla="*/ 558926 w 6862389"/>
-              <a:gd name="connsiteY18" fmla="*/ 452468 h 9144000"/>
-              <a:gd name="connsiteX19" fmla="*/ 558926 w 6862389"/>
-              <a:gd name="connsiteY19" fmla="*/ 506468 h 9144000"/>
-              <a:gd name="connsiteX20" fmla="*/ 6315119 w 6862389"/>
-              <a:gd name="connsiteY20" fmla="*/ 506468 h 9144000"/>
-              <a:gd name="connsiteX21" fmla="*/ 6315119 w 6862389"/>
-              <a:gd name="connsiteY21" fmla="*/ 452468 h 9144000"/>
-              <a:gd name="connsiteX22" fmla="*/ 0 w 6862389"/>
-              <a:gd name="connsiteY22" fmla="*/ 0 h 9144000"/>
-              <a:gd name="connsiteX23" fmla="*/ 6862389 w 6862389"/>
-              <a:gd name="connsiteY23" fmla="*/ 0 h 9144000"/>
-              <a:gd name="connsiteX24" fmla="*/ 6862389 w 6862389"/>
-              <a:gd name="connsiteY24" fmla="*/ 9144000 h 9144000"/>
-              <a:gd name="connsiteX25" fmla="*/ 0 w 6862389"/>
-              <a:gd name="connsiteY25" fmla="*/ 9144000 h 9144000"/>
+              <a:gd name="csX0" fmla="*/ 3742113 w 6858000"/>
+              <a:gd name="csY0" fmla="*/ 8661918 h 9144000"/>
+              <a:gd name="csX1" fmla="*/ 3742113 w 6858000"/>
+              <a:gd name="csY1" fmla="*/ 8715918 h 9144000"/>
+              <a:gd name="csX2" fmla="*/ 6334113 w 6858000"/>
+              <a:gd name="csY2" fmla="*/ 8715918 h 9144000"/>
+              <a:gd name="csX3" fmla="*/ 6334113 w 6858000"/>
+              <a:gd name="csY3" fmla="*/ 8661918 h 9144000"/>
+              <a:gd name="csX4" fmla="*/ 561807 w 6858000"/>
+              <a:gd name="csY4" fmla="*/ 8661918 h 9144000"/>
+              <a:gd name="csX5" fmla="*/ 561807 w 6858000"/>
+              <a:gd name="csY5" fmla="*/ 8715918 h 9144000"/>
+              <a:gd name="csX6" fmla="*/ 3153807 w 6858000"/>
+              <a:gd name="csY6" fmla="*/ 8715918 h 9144000"/>
+              <a:gd name="csX7" fmla="*/ 3153807 w 6858000"/>
+              <a:gd name="csY7" fmla="*/ 8661918 h 9144000"/>
+              <a:gd name="csX8" fmla="*/ 675779 w 6858000"/>
+              <a:gd name="csY8" fmla="*/ 2537171 h 9144000"/>
+              <a:gd name="csX9" fmla="*/ 573444 w 6858000"/>
+              <a:gd name="csY9" fmla="*/ 2639506 h 9144000"/>
+              <a:gd name="csX10" fmla="*/ 675779 w 6858000"/>
+              <a:gd name="csY10" fmla="*/ 2741841 h 9144000"/>
+              <a:gd name="csX11" fmla="*/ 778114 w 6858000"/>
+              <a:gd name="csY11" fmla="*/ 2639506 h 9144000"/>
+              <a:gd name="csX12" fmla="*/ 675779 w 6858000"/>
+              <a:gd name="csY12" fmla="*/ 2537171 h 9144000"/>
+              <a:gd name="csX13" fmla="*/ 675779 w 6858000"/>
+              <a:gd name="csY13" fmla="*/ 667145 h 9144000"/>
+              <a:gd name="csX14" fmla="*/ 573444 w 6858000"/>
+              <a:gd name="csY14" fmla="*/ 769480 h 9144000"/>
+              <a:gd name="csX15" fmla="*/ 675779 w 6858000"/>
+              <a:gd name="csY15" fmla="*/ 871815 h 9144000"/>
+              <a:gd name="csX16" fmla="*/ 778114 w 6858000"/>
+              <a:gd name="csY16" fmla="*/ 769480 h 9144000"/>
+              <a:gd name="csX17" fmla="*/ 675779 w 6858000"/>
+              <a:gd name="csY17" fmla="*/ 667145 h 9144000"/>
+              <a:gd name="csX18" fmla="*/ 561806 w 6858000"/>
+              <a:gd name="csY18" fmla="*/ 440277 h 9144000"/>
+              <a:gd name="csX19" fmla="*/ 561806 w 6858000"/>
+              <a:gd name="csY19" fmla="*/ 494277 h 9144000"/>
+              <a:gd name="csX20" fmla="*/ 6317999 w 6858000"/>
+              <a:gd name="csY20" fmla="*/ 494277 h 9144000"/>
+              <a:gd name="csX21" fmla="*/ 6317999 w 6858000"/>
+              <a:gd name="csY21" fmla="*/ 440277 h 9144000"/>
+              <a:gd name="csX22" fmla="*/ 0 w 6858000"/>
+              <a:gd name="csY22" fmla="*/ 0 h 9144000"/>
+              <a:gd name="csX23" fmla="*/ 6858000 w 6858000"/>
+              <a:gd name="csY23" fmla="*/ 0 h 9144000"/>
+              <a:gd name="csX24" fmla="*/ 6858000 w 6858000"/>
+              <a:gd name="csY24" fmla="*/ 9144000 h 9144000"/>
+              <a:gd name="csX25" fmla="*/ 0 w 6858000"/>
+              <a:gd name="csY25" fmla="*/ 9144000 h 9144000"/>
             </a:gdLst>
             <a:ahLst/>
             <a:cxnLst>
               <a:cxn ang="0">
-                <a:pos x="connsiteX0" y="connsiteY0"/>
+                <a:pos x="csX0" y="csY0"/>
               </a:cxn>
               <a:cxn ang="0">
-                <a:pos x="connsiteX1" y="connsiteY1"/>
+                <a:pos x="csX1" y="csY1"/>
               </a:cxn>
               <a:cxn ang="0">
-                <a:pos x="connsiteX2" y="connsiteY2"/>
+                <a:pos x="csX2" y="csY2"/>
               </a:cxn>
               <a:cxn ang="0">
-                <a:pos x="connsiteX3" y="connsiteY3"/>
+                <a:pos x="csX3" y="csY3"/>
               </a:cxn>
               <a:cxn ang="0">
-                <a:pos x="connsiteX4" y="connsiteY4"/>
+                <a:pos x="csX4" y="csY4"/>
               </a:cxn>
               <a:cxn ang="0">
-                <a:pos x="connsiteX5" y="connsiteY5"/>
+                <a:pos x="csX5" y="csY5"/>
               </a:cxn>
               <a:cxn ang="0">
-                <a:pos x="connsiteX6" y="connsiteY6"/>
+                <a:pos x="csX6" y="csY6"/>
               </a:cxn>
               <a:cxn ang="0">
-                <a:pos x="connsiteX7" y="connsiteY7"/>
+                <a:pos x="csX7" y="csY7"/>
               </a:cxn>
               <a:cxn ang="0">
-                <a:pos x="connsiteX8" y="connsiteY8"/>
+                <a:pos x="csX8" y="csY8"/>
               </a:cxn>
               <a:cxn ang="0">
-                <a:pos x="connsiteX9" y="connsiteY9"/>
+                <a:pos x="csX9" y="csY9"/>
               </a:cxn>
               <a:cxn ang="0">
-                <a:pos x="connsiteX10" y="connsiteY10"/>
+                <a:pos x="csX10" y="csY10"/>
               </a:cxn>
               <a:cxn ang="0">
-                <a:pos x="connsiteX11" y="connsiteY11"/>
+                <a:pos x="csX11" y="csY11"/>
               </a:cxn>
               <a:cxn ang="0">
-                <a:pos x="connsiteX12" y="connsiteY12"/>
+                <a:pos x="csX12" y="csY12"/>
               </a:cxn>
               <a:cxn ang="0">
-                <a:pos x="connsiteX13" y="connsiteY13"/>
+                <a:pos x="csX13" y="csY13"/>
               </a:cxn>
               <a:cxn ang="0">
-                <a:pos x="connsiteX14" y="connsiteY14"/>
+                <a:pos x="csX14" y="csY14"/>
               </a:cxn>
               <a:cxn ang="0">
-                <a:pos x="connsiteX15" y="connsiteY15"/>
+                <a:pos x="csX15" y="csY15"/>
               </a:cxn>
               <a:cxn ang="0">
-                <a:pos x="connsiteX16" y="connsiteY16"/>
+                <a:pos x="csX16" y="csY16"/>
               </a:cxn>
               <a:cxn ang="0">
-                <a:pos x="connsiteX17" y="connsiteY17"/>
+                <a:pos x="csX17" y="csY17"/>
               </a:cxn>
               <a:cxn ang="0">
-                <a:pos x="connsiteX18" y="connsiteY18"/>
+                <a:pos x="csX18" y="csY18"/>
               </a:cxn>
               <a:cxn ang="0">
-                <a:pos x="connsiteX19" y="connsiteY19"/>
+                <a:pos x="csX19" y="csY19"/>
               </a:cxn>
               <a:cxn ang="0">
-                <a:pos x="connsiteX20" y="connsiteY20"/>
+                <a:pos x="csX20" y="csY20"/>
               </a:cxn>
               <a:cxn ang="0">
-                <a:pos x="connsiteX21" y="connsiteY21"/>
+                <a:pos x="csX21" y="csY21"/>
               </a:cxn>
               <a:cxn ang="0">
-                <a:pos x="connsiteX22" y="connsiteY22"/>
+                <a:pos x="csX22" y="csY22"/>
               </a:cxn>
               <a:cxn ang="0">
-                <a:pos x="connsiteX23" y="connsiteY23"/>
+                <a:pos x="csX23" y="csY23"/>
               </a:cxn>
               <a:cxn ang="0">
-                <a:pos x="connsiteX24" y="connsiteY24"/>
+                <a:pos x="csX24" y="csY24"/>
               </a:cxn>
               <a:cxn ang="0">
-                <a:pos x="connsiteX25" y="connsiteY25"/>
+                <a:pos x="csX25" y="csY25"/>
               </a:cxn>
             </a:cxnLst>
             <a:rect l="l" t="t" r="r" b="b"/>
             <a:pathLst>
-              <a:path w="6862389" h="9144000">
+              <a:path w="6858000" h="9144000">
                 <a:moveTo>
-                  <a:pt x="3739233" y="8661917"/>
+                  <a:pt x="3742113" y="8661918"/>
                 </a:moveTo>
                 <a:lnTo>
-                  <a:pt x="3739233" y="8715917"/>
+                  <a:pt x="3742113" y="8715918"/>
                 </a:lnTo>
                 <a:lnTo>
-                  <a:pt x="6331233" y="8715917"/>
+                  <a:pt x="6334113" y="8715918"/>
                 </a:lnTo>
                 <a:lnTo>
-                  <a:pt x="6331233" y="8661917"/>
+                  <a:pt x="6334113" y="8661918"/>
                 </a:lnTo>
                 <a:close/>
                 <a:moveTo>
-                  <a:pt x="558927" y="8661917"/>
+                  <a:pt x="561807" y="8661918"/>
                 </a:moveTo>
                 <a:lnTo>
-                  <a:pt x="558927" y="8715917"/>
+                  <a:pt x="561807" y="8715918"/>
                 </a:lnTo>
                 <a:lnTo>
-                  <a:pt x="3150927" y="8715917"/>
+                  <a:pt x="3153807" y="8715918"/>
                 </a:lnTo>
                 <a:lnTo>
-                  <a:pt x="3150927" y="8661917"/>
+                  <a:pt x="3153807" y="8661918"/>
                 </a:lnTo>
                 <a:close/>
                 <a:moveTo>
-                  <a:pt x="672899" y="2635259"/>
+                  <a:pt x="675779" y="2537171"/>
                 </a:moveTo>
                 <a:cubicBezTo>
-                  <a:pt x="616381" y="2635259"/>
-                  <a:pt x="570564" y="2681076"/>
-                  <a:pt x="570564" y="2737594"/>
+                  <a:pt x="619261" y="2537171"/>
+                  <a:pt x="573444" y="2582988"/>
+                  <a:pt x="573444" y="2639506"/>
                 </a:cubicBezTo>
                 <a:cubicBezTo>
-                  <a:pt x="570564" y="2794112"/>
-                  <a:pt x="616381" y="2839929"/>
-                  <a:pt x="672899" y="2839929"/>
+                  <a:pt x="573444" y="2696024"/>
+                  <a:pt x="619261" y="2741841"/>
+                  <a:pt x="675779" y="2741841"/>
                 </a:cubicBezTo>
                 <a:cubicBezTo>
-                  <a:pt x="729417" y="2839929"/>
-                  <a:pt x="775234" y="2794112"/>
-                  <a:pt x="775234" y="2737594"/>
+                  <a:pt x="732297" y="2741841"/>
+                  <a:pt x="778114" y="2696024"/>
+                  <a:pt x="778114" y="2639506"/>
                 </a:cubicBezTo>
                 <a:cubicBezTo>
-                  <a:pt x="775234" y="2681076"/>
-                  <a:pt x="729417" y="2635259"/>
-                  <a:pt x="672899" y="2635259"/>
+                  <a:pt x="778114" y="2582988"/>
+                  <a:pt x="732297" y="2537171"/>
+                  <a:pt x="675779" y="2537171"/>
                 </a:cubicBezTo>
                 <a:close/>
                 <a:moveTo>
-                  <a:pt x="672899" y="671552"/>
+                  <a:pt x="675779" y="667145"/>
                 </a:moveTo>
                 <a:cubicBezTo>
-                  <a:pt x="616381" y="671552"/>
-                  <a:pt x="570564" y="717369"/>
-                  <a:pt x="570564" y="773887"/>
+                  <a:pt x="619261" y="667145"/>
+                  <a:pt x="573444" y="712962"/>
+                  <a:pt x="573444" y="769480"/>
                 </a:cubicBezTo>
                 <a:cubicBezTo>
-                  <a:pt x="570564" y="830405"/>
-                  <a:pt x="616381" y="876222"/>
-                  <a:pt x="672899" y="876222"/>
+                  <a:pt x="573444" y="825998"/>
+                  <a:pt x="619261" y="871815"/>
+                  <a:pt x="675779" y="871815"/>
                 </a:cubicBezTo>
                 <a:cubicBezTo>
-                  <a:pt x="729417" y="876222"/>
-                  <a:pt x="775234" y="830405"/>
-                  <a:pt x="775234" y="773887"/>
+                  <a:pt x="732297" y="871815"/>
+                  <a:pt x="778114" y="825998"/>
+                  <a:pt x="778114" y="769480"/>
                 </a:cubicBezTo>
                 <a:cubicBezTo>
-                  <a:pt x="775234" y="717369"/>
-                  <a:pt x="729417" y="671552"/>
-                  <a:pt x="672899" y="671552"/>
+                  <a:pt x="778114" y="712962"/>
+                  <a:pt x="732297" y="667145"/>
+                  <a:pt x="675779" y="667145"/>
                 </a:cubicBezTo>
                 <a:close/>
                 <a:moveTo>
-                  <a:pt x="558926" y="452468"/>
+                  <a:pt x="561806" y="440277"/>
                 </a:moveTo>
                 <a:lnTo>
-                  <a:pt x="558926" y="506468"/>
+                  <a:pt x="561806" y="494277"/>
                 </a:lnTo>
                 <a:lnTo>
-                  <a:pt x="6315119" y="506468"/>
+                  <a:pt x="6317999" y="494277"/>
                 </a:lnTo>
                 <a:lnTo>
-                  <a:pt x="6315119" y="452468"/>
+                  <a:pt x="6317999" y="440277"/>
                 </a:lnTo>
                 <a:close/>
                 <a:moveTo>
                   <a:pt x="0" y="0"/>
                 </a:moveTo>
                 <a:lnTo>
-                  <a:pt x="6862389" y="0"/>
+                  <a:pt x="6858000" y="0"/>
                 </a:lnTo>
                 <a:lnTo>
-                  <a:pt x="6862389" y="9144000"/>
+                  <a:pt x="6858000" y="9144000"/>
                 </a:lnTo>
                 <a:lnTo>
                   <a:pt x="0" y="9144000"/>
@@ -9572,7 +9773,7 @@
           <p:cNvPr id="17" name="テキスト ボックス 16">
             <a:extLst>
               <a:ext uri="{FF2B5EF4-FFF2-40B4-BE49-F238E27FC236}">
-                <a16:creationId xmlns:a16="http://schemas.microsoft.com/office/drawing/2014/main" id="{981E22E0-F0C3-8FD5-9B53-0AE823C53A48}"/>
+                <a16:creationId xmlns:a16="http://schemas.microsoft.com/office/drawing/2014/main" id="{4E81D05A-D858-D5EC-C492-C552F333E4D7}"/>
               </a:ext>
             </a:extLst>
           </p:cNvPr>
@@ -9581,7 +9782,7 @@
         </p:nvSpPr>
         <p:spPr>
           <a:xfrm>
-            <a:off x="3150021" y="8521283"/>
+            <a:off x="3163826" y="8511531"/>
             <a:ext cx="575734" cy="369332"/>
           </a:xfrm>
           <a:prstGeom prst="rect">
@@ -9597,19 +9798,24 @@
           <a:p>
             <a:pPr algn="ctr"/>
             <a:r>
-              <a:rPr kumimoji="1" lang="en-US" altLang="ja-JP" dirty="0"/>
+              <a:rPr kumimoji="1" lang="en-US" altLang="ja-JP" dirty="0">
+                <a:latin typeface="Jost" pitchFamily="2" charset="0"/>
+                <a:ea typeface="Jost" pitchFamily="2" charset="0"/>
+              </a:rPr>
               <a:t>2</a:t>
             </a:r>
-            <a:endParaRPr kumimoji="1" lang="ja-JP" altLang="en-US" dirty="0"/>
-          </a:p>
-        </p:txBody>
-      </p:sp>
-      <p:sp>
-        <p:nvSpPr>
-          <p:cNvPr id="2" name="テキスト ボックス 1">
+            <a:endParaRPr kumimoji="1" lang="ja-JP" altLang="en-US" dirty="0">
+              <a:latin typeface="Jost" pitchFamily="2" charset="0"/>
+            </a:endParaRPr>
+          </a:p>
+        </p:txBody>
+      </p:sp>
+      <p:sp>
+        <p:nvSpPr>
+          <p:cNvPr id="3" name="テキスト ボックス 2">
             <a:extLst>
               <a:ext uri="{FF2B5EF4-FFF2-40B4-BE49-F238E27FC236}">
-                <a16:creationId xmlns:a16="http://schemas.microsoft.com/office/drawing/2014/main" id="{E9D719DD-DE7E-DED6-A18B-B084A027B2DE}"/>
+                <a16:creationId xmlns:a16="http://schemas.microsoft.com/office/drawing/2014/main" id="{48D593E1-AFC5-F28D-4557-9A0CB190328D}"/>
               </a:ext>
             </a:extLst>
           </p:cNvPr>
@@ -9619,7 +9825,7 @@
         <p:spPr>
           <a:xfrm>
             <a:off x="770844" y="610017"/>
-            <a:ext cx="2613216" cy="400110"/>
+            <a:ext cx="2411238" cy="400110"/>
           </a:xfrm>
           <a:prstGeom prst="rect">
             <a:avLst/>
@@ -9634,13 +9840,13 @@
           <a:p>
             <a:r>
               <a:rPr lang="en-US" altLang="ja-JP" sz="2000" dirty="0">
-                <a:latin typeface="IBM Plex Sans JP SemiBold" panose="020B0703050203000203" pitchFamily="50" charset="-128"/>
-                <a:ea typeface="IBM Plex Sans JP SemiBold" panose="020B0703050203000203" pitchFamily="50" charset="-128"/>
+                <a:latin typeface="Jost Medium" pitchFamily="2" charset="0"/>
+                <a:ea typeface="Jost Medium" pitchFamily="2" charset="0"/>
               </a:rPr>
               <a:t>3. FlexChroma HUB</a:t>
             </a:r>
             <a:endParaRPr kumimoji="1" lang="ja-JP" altLang="en-US" sz="2400" b="1" dirty="0">
-              <a:latin typeface="IBM Plex Sans JP SemiBold" panose="020B0703050203000203" pitchFamily="50" charset="-128"/>
+              <a:latin typeface="Jost Medium" pitchFamily="2" charset="0"/>
               <a:ea typeface="IBM Plex Sans JP SemiBold" panose="020B0703050203000203" pitchFamily="50" charset="-128"/>
             </a:endParaRPr>
           </a:p>
@@ -9648,10 +9854,10 @@
       </p:sp>
       <p:sp>
         <p:nvSpPr>
-          <p:cNvPr id="3" name="テキスト ボックス 2">
+          <p:cNvPr id="11" name="テキスト ボックス 10">
             <a:extLst>
               <a:ext uri="{FF2B5EF4-FFF2-40B4-BE49-F238E27FC236}">
-                <a16:creationId xmlns:a16="http://schemas.microsoft.com/office/drawing/2014/main" id="{9F86F671-02C9-9E9B-5F0D-DC2FAC11DD2F}"/>
+                <a16:creationId xmlns:a16="http://schemas.microsoft.com/office/drawing/2014/main" id="{A2D9A138-D740-7FC7-285F-7BC489AD1880}"/>
               </a:ext>
             </a:extLst>
           </p:cNvPr>
@@ -9676,28 +9882,36 @@
           <a:p>
             <a:r>
               <a:rPr lang="en-US" altLang="ja-JP" sz="1000" dirty="0">
-                <a:latin typeface="IBM Plex Sans JP" panose="020B0503050203000203" pitchFamily="50" charset="-128"/>
-                <a:ea typeface="IBM Plex Sans JP" panose="020B0503050203000203" pitchFamily="50" charset="-128"/>
+                <a:latin typeface="Jost" pitchFamily="2" charset="0"/>
+                <a:ea typeface="Jost" pitchFamily="2" charset="0"/>
               </a:rPr>
               <a:t>The </a:t>
             </a:r>
             <a:r>
               <a:rPr lang="en-US" altLang="ja-JP" sz="1000" dirty="0">
-                <a:latin typeface="Segoe UI Semibold" panose="020B0702040204020203" pitchFamily="34" charset="0"/>
-                <a:ea typeface="IBM Plex Sans JP" panose="020B0503050203000203" pitchFamily="50" charset="-128"/>
+                <a:latin typeface="Jost SemiBold" pitchFamily="2" charset="0"/>
+                <a:ea typeface="Jost SemiBold" pitchFamily="2" charset="0"/>
                 <a:cs typeface="Segoe UI Semibold" panose="020B0702040204020203" pitchFamily="34" charset="0"/>
               </a:rPr>
-              <a:t>FlexChroma HUB </a:t>
+              <a:t>FlexChroma</a:t>
             </a:r>
             <a:r>
               <a:rPr lang="en-US" altLang="ja-JP" sz="1000" dirty="0">
-                <a:latin typeface="IBM Plex Sans JP" panose="020B0503050203000203" pitchFamily="50" charset="-128"/>
-                <a:ea typeface="IBM Plex Sans JP" panose="020B0503050203000203" pitchFamily="50" charset="-128"/>
+                <a:latin typeface="Jost" pitchFamily="2" charset="0"/>
+                <a:ea typeface="Jost" pitchFamily="2" charset="0"/>
+                <a:cs typeface="Segoe UI Semibold" panose="020B0702040204020203" pitchFamily="34" charset="0"/>
+              </a:rPr>
+              <a:t> HUB </a:t>
+            </a:r>
+            <a:r>
+              <a:rPr lang="en-US" altLang="ja-JP" sz="1000" dirty="0">
+                <a:latin typeface="Jost" pitchFamily="2" charset="0"/>
+                <a:ea typeface="Jost" pitchFamily="2" charset="0"/>
               </a:rPr>
               <a:t>is the main entry point on MakerWorld, providing access to all Series and external portals. If you are unsure where to start, open this model first.</a:t>
             </a:r>
             <a:endParaRPr kumimoji="1" lang="ja-JP" altLang="en-US" sz="500" b="1" dirty="0">
-              <a:latin typeface="IBM Plex Sans JP" panose="020B0503050203000203" pitchFamily="50" charset="-128"/>
+              <a:latin typeface="Jost" pitchFamily="2" charset="0"/>
               <a:ea typeface="IBM Plex Sans JP" panose="020B0503050203000203" pitchFamily="50" charset="-128"/>
             </a:endParaRPr>
           </a:p>
@@ -9705,10 +9919,10 @@
       </p:sp>
       <p:sp>
         <p:nvSpPr>
-          <p:cNvPr id="11" name="テキスト ボックス 10">
+          <p:cNvPr id="12" name="テキスト ボックス 11">
             <a:extLst>
               <a:ext uri="{FF2B5EF4-FFF2-40B4-BE49-F238E27FC236}">
-                <a16:creationId xmlns:a16="http://schemas.microsoft.com/office/drawing/2014/main" id="{9331D375-CC72-3463-7EBE-AD9BD8A9AFDD}"/>
+                <a16:creationId xmlns:a16="http://schemas.microsoft.com/office/drawing/2014/main" id="{06872703-F4A6-0524-CE15-035DB1EFF6BC}"/>
               </a:ext>
             </a:extLst>
           </p:cNvPr>
@@ -9717,8 +9931,8 @@
         </p:nvSpPr>
         <p:spPr>
           <a:xfrm>
-            <a:off x="770844" y="2574192"/>
-            <a:ext cx="2379177" cy="400110"/>
+            <a:off x="770844" y="2482749"/>
+            <a:ext cx="2153154" cy="400110"/>
           </a:xfrm>
           <a:prstGeom prst="rect">
             <a:avLst/>
@@ -9733,13 +9947,20 @@
           <a:p>
             <a:r>
               <a:rPr lang="en-US" altLang="ja-JP" sz="2000" dirty="0">
-                <a:latin typeface="IBM Plex Sans JP SemiBold" panose="020B0703050203000203" pitchFamily="50" charset="-128"/>
-                <a:ea typeface="IBM Plex Sans JP SemiBold" panose="020B0703050203000203" pitchFamily="50" charset="-128"/>
-              </a:rPr>
-              <a:t>4. Blend Filament</a:t>
+                <a:latin typeface="Jost" pitchFamily="2" charset="0"/>
+                <a:ea typeface="Jost" pitchFamily="2" charset="0"/>
+              </a:rPr>
+              <a:t>4. </a:t>
+            </a:r>
+            <a:r>
+              <a:rPr lang="en-US" altLang="ja-JP" sz="2000" dirty="0">
+                <a:latin typeface="Jost Medium" pitchFamily="2" charset="0"/>
+                <a:ea typeface="Jost Medium" pitchFamily="2" charset="0"/>
+              </a:rPr>
+              <a:t>Blend Filament</a:t>
             </a:r>
             <a:endParaRPr kumimoji="1" lang="ja-JP" altLang="en-US" sz="2800" b="1" dirty="0">
-              <a:latin typeface="IBM Plex Sans JP SemiBold" panose="020B0703050203000203" pitchFamily="50" charset="-128"/>
+              <a:latin typeface="Jost Medium" pitchFamily="2" charset="0"/>
               <a:ea typeface="IBM Plex Sans JP SemiBold" panose="020B0703050203000203" pitchFamily="50" charset="-128"/>
             </a:endParaRPr>
           </a:p>
@@ -9747,10 +9968,10 @@
       </p:sp>
       <p:sp>
         <p:nvSpPr>
-          <p:cNvPr id="12" name="テキスト ボックス 11">
+          <p:cNvPr id="23" name="テキスト ボックス 22">
             <a:extLst>
               <a:ext uri="{FF2B5EF4-FFF2-40B4-BE49-F238E27FC236}">
-                <a16:creationId xmlns:a16="http://schemas.microsoft.com/office/drawing/2014/main" id="{53F77DD3-6423-8DE1-AC87-0DD7AF777795}"/>
+                <a16:creationId xmlns:a16="http://schemas.microsoft.com/office/drawing/2014/main" id="{1DCA0FD3-2AD6-8196-0CA2-8A9BA0C58C07}"/>
               </a:ext>
             </a:extLst>
           </p:cNvPr>
@@ -9759,8 +9980,8 @@
         </p:nvSpPr>
         <p:spPr>
           <a:xfrm>
-            <a:off x="668509" y="2953843"/>
-            <a:ext cx="5642222" cy="1107996"/>
+            <a:off x="668509" y="2862400"/>
+            <a:ext cx="5642222" cy="1123384"/>
           </a:xfrm>
           <a:prstGeom prst="rect">
             <a:avLst/>
@@ -9775,55 +9996,83 @@
           <a:p>
             <a:r>
               <a:rPr lang="en-US" altLang="ja-JP" sz="1000" dirty="0">
-                <a:latin typeface="IBM Plex Sans JP" panose="020B0503050203000203" pitchFamily="50" charset="-128"/>
-                <a:ea typeface="IBM Plex Sans JP" panose="020B0503050203000203" pitchFamily="50" charset="-128"/>
-              </a:rPr>
-              <a:t>The Blend Filament Series is the most basic FlexChroma lineup. It allows you to mix two filaments at various ratios to create your own custom color.</a:t>
-            </a:r>
-          </a:p>
-          <a:p>
+                <a:latin typeface="Jost" pitchFamily="2" charset="0"/>
+                <a:ea typeface="Jost" pitchFamily="2" charset="0"/>
+              </a:rPr>
+              <a:t>The </a:t>
+            </a:r>
             <a:r>
               <a:rPr lang="en-US" altLang="ja-JP" sz="1000" dirty="0">
-                <a:latin typeface="IBM Plex Sans JP" panose="020B0503050203000203" pitchFamily="50" charset="-128"/>
-                <a:ea typeface="IBM Plex Sans JP" panose="020B0503050203000203" pitchFamily="50" charset="-128"/>
+                <a:latin typeface="Jost Medium" pitchFamily="2" charset="0"/>
+                <a:ea typeface="Jost Medium" pitchFamily="2" charset="0"/>
+              </a:rPr>
+              <a:t>Blend Filament</a:t>
+            </a:r>
+            <a:r>
+              <a:rPr lang="en-US" altLang="ja-JP" sz="1000" dirty="0">
+                <a:latin typeface="Jost" pitchFamily="2" charset="0"/>
+                <a:ea typeface="Jost" pitchFamily="2" charset="0"/>
+              </a:rPr>
+              <a:t> Series is the most basic </a:t>
+            </a:r>
+            <a:r>
+              <a:rPr lang="en-US" altLang="ja-JP" sz="1000" dirty="0">
+                <a:latin typeface="Jost SemiBold" pitchFamily="2" charset="0"/>
+                <a:ea typeface="Jost SemiBold" pitchFamily="2" charset="0"/>
+              </a:rPr>
+              <a:t>FlexChroma</a:t>
+            </a:r>
+            <a:r>
+              <a:rPr lang="en-US" altLang="ja-JP" sz="1000" dirty="0">
+                <a:latin typeface="Jost" pitchFamily="2" charset="0"/>
+                <a:ea typeface="Jost" pitchFamily="2" charset="0"/>
+              </a:rPr>
+              <a:t> lineup. It allows you to mix two filaments at various ratios to create your own custom color.</a:t>
+            </a:r>
+          </a:p>
+          <a:p>
+            <a:r>
+              <a:rPr lang="en-US" altLang="ja-JP" sz="1000" dirty="0">
+                <a:latin typeface="Jost" pitchFamily="2" charset="0"/>
+                <a:ea typeface="Jost" pitchFamily="2" charset="0"/>
               </a:rPr>
               <a:t>Each model supports blend ratios from 50% to 99.5</a:t>
             </a:r>
             <a:r>
               <a:rPr lang="en-US" altLang="ja-JP" sz="1000" b="1" dirty="0">
-                <a:latin typeface="IBM Plex Sans JP" panose="020B0503050203000203" pitchFamily="50" charset="-128"/>
-                <a:ea typeface="IBM Plex Sans JP" panose="020B0503050203000203" pitchFamily="50" charset="-128"/>
+                <a:latin typeface="Jost" pitchFamily="2" charset="0"/>
+                <a:ea typeface="Jost" pitchFamily="2" charset="0"/>
               </a:rPr>
               <a:t>%. For ratios below 50%, simply swap Filament A and Filament B.</a:t>
             </a:r>
           </a:p>
           <a:p>
             <a:endParaRPr lang="en-US" altLang="ja-JP" sz="600" dirty="0">
-              <a:latin typeface="IBM Plex Sans JP" panose="020B0503050203000203" pitchFamily="50" charset="-128"/>
+              <a:latin typeface="Jost" pitchFamily="2" charset="0"/>
+              <a:ea typeface="Jost" pitchFamily="2" charset="0"/>
+            </a:endParaRPr>
+          </a:p>
+          <a:p>
+            <a:r>
+              <a:rPr lang="en-US" altLang="ja-JP" sz="1000" dirty="0">
+                <a:latin typeface="Jost" pitchFamily="2" charset="0"/>
+                <a:ea typeface="Jost" pitchFamily="2" charset="0"/>
+              </a:rPr>
+              <a:t>Example: To create a filament with 25% cyan mixed into yellow, read the Plate value as the ratio of Filament A, interpret it as 75% yellow, and slice the model accordingly.</a:t>
+            </a:r>
+            <a:endParaRPr kumimoji="1" lang="ja-JP" altLang="en-US" sz="1000" b="1" dirty="0">
+              <a:latin typeface="Jost" pitchFamily="2" charset="0"/>
               <a:ea typeface="IBM Plex Sans JP" panose="020B0503050203000203" pitchFamily="50" charset="-128"/>
             </a:endParaRPr>
           </a:p>
-          <a:p>
-            <a:r>
-              <a:rPr lang="en-US" altLang="ja-JP" sz="1000" dirty="0">
-                <a:latin typeface="IBM Plex Sans JP" panose="020B0503050203000203" pitchFamily="50" charset="-128"/>
-                <a:ea typeface="IBM Plex Sans JP" panose="020B0503050203000203" pitchFamily="50" charset="-128"/>
-              </a:rPr>
-              <a:t>Example: To create a filament with 25% cyan mixed into yellow, read the Plate value as the ratio of Filament A, interpret it as 75% yellow, and slice the model accordingly.</a:t>
-            </a:r>
-            <a:endParaRPr kumimoji="1" lang="ja-JP" altLang="en-US" sz="1000" b="1" dirty="0">
-              <a:latin typeface="IBM Plex Sans JP" panose="020B0503050203000203" pitchFamily="50" charset="-128"/>
-              <a:ea typeface="IBM Plex Sans JP" panose="020B0503050203000203" pitchFamily="50" charset="-128"/>
-            </a:endParaRPr>
-          </a:p>
-        </p:txBody>
-      </p:sp>
-      <p:sp>
-        <p:nvSpPr>
-          <p:cNvPr id="23" name="テキスト ボックス 22">
+        </p:txBody>
+      </p:sp>
+      <p:sp>
+        <p:nvSpPr>
+          <p:cNvPr id="24" name="テキスト ボックス 23">
             <a:extLst>
               <a:ext uri="{FF2B5EF4-FFF2-40B4-BE49-F238E27FC236}">
-                <a16:creationId xmlns:a16="http://schemas.microsoft.com/office/drawing/2014/main" id="{4115F0A8-4267-0FEB-9B1F-41BC20F962C4}"/>
+                <a16:creationId xmlns:a16="http://schemas.microsoft.com/office/drawing/2014/main" id="{75635CF7-D051-AD54-1962-B3F88F0CD91D}"/>
               </a:ext>
             </a:extLst>
           </p:cNvPr>
@@ -9848,20 +10097,34 @@
           <a:p>
             <a:r>
               <a:rPr lang="en-US" altLang="ja-JP" sz="1000" dirty="0">
-                <a:latin typeface="IBM Plex Sans JP" panose="020B0503050203000203" pitchFamily="50" charset="-128"/>
-                <a:ea typeface="IBM Plex Sans JP" panose="020B0503050203000203" pitchFamily="50" charset="-128"/>
-              </a:rPr>
-              <a:t>The following is the model configuration for Blend Filament.</a:t>
+                <a:latin typeface="Jost" pitchFamily="2" charset="0"/>
+                <a:ea typeface="Jost" pitchFamily="2" charset="0"/>
+              </a:rPr>
+              <a:t>The following is the model configuration for </a:t>
+            </a:r>
+            <a:r>
+              <a:rPr lang="en-US" altLang="ja-JP" sz="1000" dirty="0">
+                <a:latin typeface="Jost Medium" pitchFamily="2" charset="0"/>
+                <a:ea typeface="Jost Medium" pitchFamily="2" charset="0"/>
+              </a:rPr>
+              <a:t>Blend Filament</a:t>
+            </a:r>
+            <a:r>
+              <a:rPr lang="en-US" altLang="ja-JP" sz="1000" dirty="0">
+                <a:latin typeface="Jost" pitchFamily="2" charset="0"/>
+                <a:ea typeface="Jost" pitchFamily="2" charset="0"/>
+              </a:rPr>
+              <a:t>.</a:t>
             </a:r>
           </a:p>
         </p:txBody>
       </p:sp>
       <p:pic>
         <p:nvPicPr>
-          <p:cNvPr id="9" name="図 8">
+          <p:cNvPr id="4" name="図 3">
             <a:extLst>
               <a:ext uri="{FF2B5EF4-FFF2-40B4-BE49-F238E27FC236}">
-                <a16:creationId xmlns:a16="http://schemas.microsoft.com/office/drawing/2014/main" id="{DA01F81B-7D5D-1705-0678-04FC6D100831}"/>
+                <a16:creationId xmlns:a16="http://schemas.microsoft.com/office/drawing/2014/main" id="{55A0E303-44A6-B424-79E0-F48B5D56A266}"/>
               </a:ext>
             </a:extLst>
           </p:cNvPr>
@@ -9885,7 +10148,7 @@
         </p:blipFill>
         <p:spPr bwMode="auto">
           <a:xfrm>
-            <a:off x="709943" y="4074574"/>
+            <a:off x="709883" y="4074574"/>
             <a:ext cx="5438111" cy="844458"/>
           </a:xfrm>
           <a:prstGeom prst="rect">
@@ -9905,10 +10168,10 @@
       </p:pic>
       <p:pic>
         <p:nvPicPr>
-          <p:cNvPr id="13" name="図 12">
+          <p:cNvPr id="18" name="図 17">
             <a:extLst>
               <a:ext uri="{FF2B5EF4-FFF2-40B4-BE49-F238E27FC236}">
-                <a16:creationId xmlns:a16="http://schemas.microsoft.com/office/drawing/2014/main" id="{5609B2BD-AD57-48F0-51D0-1811DE157760}"/>
+                <a16:creationId xmlns:a16="http://schemas.microsoft.com/office/drawing/2014/main" id="{BE949B37-6222-F9ED-D7E1-A6E32CBDB492}"/>
               </a:ext>
             </a:extLst>
           </p:cNvPr>
@@ -9952,10 +10215,10 @@
       </p:pic>
       <p:pic>
         <p:nvPicPr>
-          <p:cNvPr id="5" name="図 4">
+          <p:cNvPr id="19" name="図 18">
             <a:extLst>
               <a:ext uri="{FF2B5EF4-FFF2-40B4-BE49-F238E27FC236}">
-                <a16:creationId xmlns:a16="http://schemas.microsoft.com/office/drawing/2014/main" id="{D0285320-9EA6-1332-51CF-5053CEB5A9FB}"/>
+                <a16:creationId xmlns:a16="http://schemas.microsoft.com/office/drawing/2014/main" id="{3CEC233C-4402-A35E-A355-327A0C73CBF8}"/>
               </a:ext>
             </a:extLst>
           </p:cNvPr>
@@ -10000,7 +10263,7 @@
     </p:spTree>
     <p:extLst>
       <p:ext uri="{BB962C8B-B14F-4D97-AF65-F5344CB8AC3E}">
-        <p14:creationId xmlns:p14="http://schemas.microsoft.com/office/powerpoint/2010/main" val="1711923920"/>
+        <p14:creationId xmlns:p14="http://schemas.microsoft.com/office/powerpoint/2010/main" val="300106545"/>
       </p:ext>
     </p:extLst>
   </p:cSld>
@@ -10018,7 +10281,7 @@
         <p:cNvPr id="1" name="">
           <a:extLst>
             <a:ext uri="{FF2B5EF4-FFF2-40B4-BE49-F238E27FC236}">
-              <a16:creationId xmlns:a16="http://schemas.microsoft.com/office/drawing/2014/main" id="{3F39D162-0972-E73B-EA5B-12D928783FAF}"/>
+              <a16:creationId xmlns:a16="http://schemas.microsoft.com/office/drawing/2014/main" id="{42867864-7223-A35A-8885-9847934B391F}"/>
             </a:ext>
           </a:extLst>
         </p:cNvPr>
@@ -10038,7 +10301,7 @@
           <p:cNvPr id="30" name="正方形/長方形 29">
             <a:extLst>
               <a:ext uri="{FF2B5EF4-FFF2-40B4-BE49-F238E27FC236}">
-                <a16:creationId xmlns:a16="http://schemas.microsoft.com/office/drawing/2014/main" id="{41C40E49-5FA1-E53B-CA28-AD02E4FA19E1}"/>
+                <a16:creationId xmlns:a16="http://schemas.microsoft.com/office/drawing/2014/main" id="{8BF79675-6756-A9B6-2AA6-D70C7255927C}"/>
               </a:ext>
             </a:extLst>
           </p:cNvPr>
@@ -10101,7 +10364,7 @@
           <p:cNvPr id="18" name="フリーフォーム: 図形 17">
             <a:extLst>
               <a:ext uri="{FF2B5EF4-FFF2-40B4-BE49-F238E27FC236}">
-                <a16:creationId xmlns:a16="http://schemas.microsoft.com/office/drawing/2014/main" id="{9909E367-C232-F8D9-9E16-57CEC232B45C}"/>
+                <a16:creationId xmlns:a16="http://schemas.microsoft.com/office/drawing/2014/main" id="{571608ED-DE4C-CDF5-E922-1E67908825CE}"/>
               </a:ext>
             </a:extLst>
           </p:cNvPr>
@@ -10143,13 +10406,13 @@
               <a:gd name="csX12" fmla="*/ 651459 w 6858000"/>
               <a:gd name="csY12" fmla="*/ 672371 h 9144000"/>
               <a:gd name="csX13" fmla="*/ 537486 w 6858000"/>
-              <a:gd name="csY13" fmla="*/ 446937 h 9144000"/>
+              <a:gd name="csY13" fmla="*/ 434745 h 9144000"/>
               <a:gd name="csX14" fmla="*/ 537486 w 6858000"/>
-              <a:gd name="csY14" fmla="*/ 500937 h 9144000"/>
+              <a:gd name="csY14" fmla="*/ 488745 h 9144000"/>
               <a:gd name="csX15" fmla="*/ 6293679 w 6858000"/>
-              <a:gd name="csY15" fmla="*/ 500937 h 9144000"/>
+              <a:gd name="csY15" fmla="*/ 488745 h 9144000"/>
               <a:gd name="csX16" fmla="*/ 6293679 w 6858000"/>
-              <a:gd name="csY16" fmla="*/ 446937 h 9144000"/>
+              <a:gd name="csY16" fmla="*/ 434745 h 9144000"/>
               <a:gd name="csX17" fmla="*/ 0 w 6858000"/>
               <a:gd name="csY17" fmla="*/ 0 h 9144000"/>
               <a:gd name="csX18" fmla="*/ 6858000 w 6858000"/>
@@ -10279,16 +10542,16 @@
                 </a:cubicBezTo>
                 <a:close/>
                 <a:moveTo>
-                  <a:pt x="537486" y="446937"/>
+                  <a:pt x="537486" y="434745"/>
                 </a:moveTo>
                 <a:lnTo>
-                  <a:pt x="537486" y="500937"/>
+                  <a:pt x="537486" y="488745"/>
                 </a:lnTo>
                 <a:lnTo>
-                  <a:pt x="6293679" y="500937"/>
+                  <a:pt x="6293679" y="488745"/>
                 </a:lnTo>
                 <a:lnTo>
-                  <a:pt x="6293679" y="446937"/>
+                  <a:pt x="6293679" y="434745"/>
                 </a:lnTo>
                 <a:close/>
                 <a:moveTo>
@@ -10346,7 +10609,7 @@
           <p:cNvPr id="17" name="テキスト ボックス 16">
             <a:extLst>
               <a:ext uri="{FF2B5EF4-FFF2-40B4-BE49-F238E27FC236}">
-                <a16:creationId xmlns:a16="http://schemas.microsoft.com/office/drawing/2014/main" id="{CF4FD039-D677-D485-74F5-B3E184B86557}"/>
+                <a16:creationId xmlns:a16="http://schemas.microsoft.com/office/drawing/2014/main" id="{08F8CD14-4822-98FE-7615-3E24E131D4E6}"/>
               </a:ext>
             </a:extLst>
           </p:cNvPr>
@@ -10371,10 +10634,15 @@
           <a:p>
             <a:pPr algn="ctr"/>
             <a:r>
-              <a:rPr kumimoji="1" lang="en-US" altLang="ja-JP" dirty="0"/>
+              <a:rPr kumimoji="1" lang="en-US" altLang="ja-JP" dirty="0">
+                <a:latin typeface="Jost" pitchFamily="2" charset="0"/>
+                <a:ea typeface="Jost" pitchFamily="2" charset="0"/>
+              </a:rPr>
               <a:t>3</a:t>
             </a:r>
-            <a:endParaRPr kumimoji="1" lang="ja-JP" altLang="en-US" dirty="0"/>
+            <a:endParaRPr kumimoji="1" lang="ja-JP" altLang="en-US" dirty="0">
+              <a:latin typeface="Jost" pitchFamily="2" charset="0"/>
+            </a:endParaRPr>
           </a:p>
         </p:txBody>
       </p:sp>
@@ -10383,7 +10651,7 @@
           <p:cNvPr id="31" name="テキスト ボックス 30">
             <a:extLst>
               <a:ext uri="{FF2B5EF4-FFF2-40B4-BE49-F238E27FC236}">
-                <a16:creationId xmlns:a16="http://schemas.microsoft.com/office/drawing/2014/main" id="{402917BB-FF52-F269-CC95-0E12909AB302}"/>
+                <a16:creationId xmlns:a16="http://schemas.microsoft.com/office/drawing/2014/main" id="{5D5B0321-E888-C769-46F5-C749D5258E43}"/>
               </a:ext>
             </a:extLst>
           </p:cNvPr>
@@ -10393,7 +10661,7 @@
         <p:spPr>
           <a:xfrm>
             <a:off x="770844" y="610017"/>
-            <a:ext cx="2739853" cy="400110"/>
+            <a:ext cx="2497800" cy="400110"/>
           </a:xfrm>
           <a:prstGeom prst="rect">
             <a:avLst/>
@@ -10408,13 +10676,13 @@
           <a:p>
             <a:r>
               <a:rPr lang="en-US" altLang="ja-JP" sz="2000" dirty="0">
-                <a:latin typeface="IBM Plex Sans JP SemiBold" panose="020B0703050203000203" pitchFamily="50" charset="-128"/>
-                <a:ea typeface="IBM Plex Sans JP SemiBold" panose="020B0703050203000203" pitchFamily="50" charset="-128"/>
+                <a:latin typeface="Jost Medium" pitchFamily="2" charset="0"/>
+                <a:ea typeface="Jost Medium" pitchFamily="2" charset="0"/>
               </a:rPr>
               <a:t>5. Gradient Filament</a:t>
             </a:r>
             <a:endParaRPr kumimoji="1" lang="ja-JP" altLang="en-US" sz="2400" b="1" dirty="0">
-              <a:latin typeface="IBM Plex Sans JP SemiBold" panose="020B0703050203000203" pitchFamily="50" charset="-128"/>
+              <a:latin typeface="Jost Medium" pitchFamily="2" charset="0"/>
               <a:ea typeface="IBM Plex Sans JP SemiBold" panose="020B0703050203000203" pitchFamily="50" charset="-128"/>
             </a:endParaRPr>
           </a:p>
@@ -10425,7 +10693,7 @@
           <p:cNvPr id="33" name="テキスト ボックス 32">
             <a:extLst>
               <a:ext uri="{FF2B5EF4-FFF2-40B4-BE49-F238E27FC236}">
-                <a16:creationId xmlns:a16="http://schemas.microsoft.com/office/drawing/2014/main" id="{9C424B16-8EDA-50E2-DF24-F9EDAC56C05B}"/>
+                <a16:creationId xmlns:a16="http://schemas.microsoft.com/office/drawing/2014/main" id="{81620E93-4564-F614-C1BE-6F8ED53CA3F0}"/>
               </a:ext>
             </a:extLst>
           </p:cNvPr>
@@ -10434,7 +10702,7 @@
         </p:nvSpPr>
         <p:spPr>
           <a:xfrm>
-            <a:off x="675778" y="4341274"/>
+            <a:off x="675778" y="4121818"/>
             <a:ext cx="5642222" cy="246221"/>
           </a:xfrm>
           <a:prstGeom prst="rect">
@@ -10450,115 +10718,34 @@
           <a:p>
             <a:r>
               <a:rPr lang="en-US" altLang="ja-JP" sz="1000" dirty="0">
-                <a:latin typeface="IBM Plex Sans JP" panose="020B0503050203000203" pitchFamily="50" charset="-128"/>
-                <a:ea typeface="IBM Plex Sans JP" panose="020B0503050203000203" pitchFamily="50" charset="-128"/>
-              </a:rPr>
-              <a:t>The following is the model configuration for Gradient Filament.</a:t>
-            </a:r>
-          </a:p>
-        </p:txBody>
-      </p:sp>
-      <p:sp>
-        <p:nvSpPr>
-          <p:cNvPr id="19" name="テキスト ボックス 18">
-            <a:extLst>
-              <a:ext uri="{FF2B5EF4-FFF2-40B4-BE49-F238E27FC236}">
-                <a16:creationId xmlns:a16="http://schemas.microsoft.com/office/drawing/2014/main" id="{EC269278-E84C-3A0D-7F7F-F9CC24F59D7B}"/>
-              </a:ext>
-            </a:extLst>
-          </p:cNvPr>
-          <p:cNvSpPr txBox="1"/>
-          <p:nvPr/>
-        </p:nvSpPr>
-        <p:spPr>
-          <a:xfrm>
-            <a:off x="668508" y="1032957"/>
-            <a:ext cx="5649491" cy="2031325"/>
-          </a:xfrm>
-          <a:prstGeom prst="rect">
-            <a:avLst/>
-          </a:prstGeom>
-          <a:noFill/>
-        </p:spPr>
-        <p:txBody>
-          <a:bodyPr wrap="square" rtlCol="0">
-            <a:spAutoFit/>
-          </a:bodyPr>
-          <a:lstStyle/>
-          <a:p>
+                <a:latin typeface="Jost" pitchFamily="2" charset="0"/>
+                <a:ea typeface="Jost" pitchFamily="2" charset="0"/>
+              </a:rPr>
+              <a:t>The following is the model configuration for </a:t>
+            </a:r>
             <a:r>
               <a:rPr lang="en-US" altLang="ja-JP" sz="1000" dirty="0">
-                <a:latin typeface="IBM Plex Sans JP" panose="020B0503050203000203" pitchFamily="50" charset="-128"/>
-                <a:ea typeface="IBM Plex Sans JP" panose="020B0503050203000203" pitchFamily="50" charset="-128"/>
-              </a:rPr>
-              <a:t>The Gradient Filament Series provides multiple color-changing Profiles and Plates with different cycle counts. Details vary by model, so please refer to each model’s description.</a:t>
-            </a:r>
-          </a:p>
-          <a:p>
-            <a:endParaRPr lang="en-US" altLang="ja-JP" sz="1000" dirty="0">
-              <a:latin typeface="IBM Plex Sans JP" panose="020B0503050203000203" pitchFamily="50" charset="-128"/>
-              <a:ea typeface="IBM Plex Sans JP" panose="020B0503050203000203" pitchFamily="50" charset="-128"/>
-            </a:endParaRPr>
-          </a:p>
-          <a:p>
-            <a:pPr marL="171450" indent="-171450">
-              <a:buFont typeface="Arial" panose="020B0604020202020204" pitchFamily="34" charset="0"/>
-              <a:buChar char="•"/>
-            </a:pPr>
+                <a:latin typeface="Jost Medium" pitchFamily="2" charset="0"/>
+                <a:ea typeface="Jost Medium" pitchFamily="2" charset="0"/>
+              </a:rPr>
+              <a:t>Gradient Filament</a:t>
+            </a:r>
             <a:r>
               <a:rPr lang="en-US" altLang="ja-JP" sz="1000" dirty="0">
-                <a:latin typeface="IBM Plex Sans JP" panose="020B0503050203000203" pitchFamily="50" charset="-128"/>
-                <a:ea typeface="IBM Plex Sans JP" panose="020B0503050203000203" pitchFamily="50" charset="-128"/>
-              </a:rPr>
-              <a:t>Color Curve: Settings based on color combinations. This option allows you to select the optimal gradient for each color—for example, “Vivid” for cyan and yellow, or “Contrast” for white and magenta.</a:t>
-            </a:r>
-          </a:p>
-          <a:p>
-            <a:endParaRPr lang="en-US" altLang="ja-JP" sz="600" dirty="0">
-              <a:latin typeface="IBM Plex Sans JP" panose="020B0503050203000203" pitchFamily="50" charset="-128"/>
-              <a:ea typeface="IBM Plex Sans JP" panose="020B0503050203000203" pitchFamily="50" charset="-128"/>
-            </a:endParaRPr>
-          </a:p>
-          <a:p>
-            <a:pPr marL="171450" indent="-171450">
-              <a:buFont typeface="Arial" panose="020B0604020202020204" pitchFamily="34" charset="0"/>
-              <a:buChar char="•"/>
-            </a:pPr>
-            <a:r>
-              <a:rPr lang="en-US" altLang="ja-JP" sz="1000" dirty="0">
-                <a:latin typeface="IBM Plex Sans JP" panose="020B0503050203000203" pitchFamily="50" charset="-128"/>
-                <a:ea typeface="IBM Plex Sans JP" panose="020B0503050203000203" pitchFamily="50" charset="-128"/>
-              </a:rPr>
-              <a:t>Number of cycles: The number that determines the frequency of the gradient. One cycle is counted as one complete cycle in which the filament changes from A to B to A and back.</a:t>
-            </a:r>
-          </a:p>
-          <a:p>
-            <a:endParaRPr lang="en-US" altLang="ja-JP" sz="1000" dirty="0">
-              <a:latin typeface="IBM Plex Sans JP" panose="020B0503050203000203" pitchFamily="50" charset="-128"/>
-              <a:ea typeface="IBM Plex Sans JP" panose="020B0503050203000203" pitchFamily="50" charset="-128"/>
-            </a:endParaRPr>
-          </a:p>
-          <a:p>
-            <a:r>
-              <a:rPr lang="en-US" altLang="ja-JP" sz="1000" dirty="0">
-                <a:latin typeface="IBM Plex Sans JP" panose="020B0503050203000203" pitchFamily="50" charset="-128"/>
-                <a:ea typeface="IBM Plex Sans JP" panose="020B0503050203000203" pitchFamily="50" charset="-128"/>
-              </a:rPr>
-              <a:t>Example: To create a fast-cycle gradient filament using cyan and magenta, select an S4 Model, choose a 4-cycle Plate, and use the Vivid curve Profile due to the high color contrast.</a:t>
-            </a:r>
-            <a:endParaRPr kumimoji="1" lang="ja-JP" altLang="en-US" sz="1000" b="1" dirty="0">
-              <a:latin typeface="IBM Plex Sans JP" panose="020B0503050203000203" pitchFamily="50" charset="-128"/>
-              <a:ea typeface="IBM Plex Sans JP" panose="020B0503050203000203" pitchFamily="50" charset="-128"/>
-            </a:endParaRPr>
+                <a:latin typeface="Jost" pitchFamily="2" charset="0"/>
+                <a:ea typeface="Jost" pitchFamily="2" charset="0"/>
+              </a:rPr>
+              <a:t>.</a:t>
+            </a:r>
           </a:p>
         </p:txBody>
       </p:sp>
       <p:pic>
         <p:nvPicPr>
-          <p:cNvPr id="3" name="図 2">
+          <p:cNvPr id="4" name="図 3">
             <a:extLst>
               <a:ext uri="{FF2B5EF4-FFF2-40B4-BE49-F238E27FC236}">
-                <a16:creationId xmlns:a16="http://schemas.microsoft.com/office/drawing/2014/main" id="{4056AD40-236C-4314-6A42-E6C5542DF647}"/>
+                <a16:creationId xmlns:a16="http://schemas.microsoft.com/office/drawing/2014/main" id="{67F27874-8D02-9DEA-92B7-2713D1A882B7}"/>
               </a:ext>
             </a:extLst>
           </p:cNvPr>
@@ -10575,7 +10762,7 @@
         </p:blipFill>
         <p:spPr>
           <a:xfrm>
-            <a:off x="694906" y="4667054"/>
+            <a:off x="666614" y="4447598"/>
             <a:ext cx="5521536" cy="3874587"/>
           </a:xfrm>
           <a:prstGeom prst="rect">
@@ -10583,12 +10770,135 @@
           </a:prstGeom>
         </p:spPr>
       </p:pic>
+      <p:sp>
+        <p:nvSpPr>
+          <p:cNvPr id="19" name="テキスト ボックス 18">
+            <a:extLst>
+              <a:ext uri="{FF2B5EF4-FFF2-40B4-BE49-F238E27FC236}">
+                <a16:creationId xmlns:a16="http://schemas.microsoft.com/office/drawing/2014/main" id="{0E801F1B-F4B1-8C9F-E15C-60A385EE7CA4}"/>
+              </a:ext>
+            </a:extLst>
+          </p:cNvPr>
+          <p:cNvSpPr txBox="1"/>
+          <p:nvPr/>
+        </p:nvSpPr>
+        <p:spPr>
+          <a:xfrm>
+            <a:off x="668508" y="1032957"/>
+            <a:ext cx="5649491" cy="1877437"/>
+          </a:xfrm>
+          <a:prstGeom prst="rect">
+            <a:avLst/>
+          </a:prstGeom>
+          <a:noFill/>
+        </p:spPr>
+        <p:txBody>
+          <a:bodyPr wrap="square" rtlCol="0">
+            <a:spAutoFit/>
+          </a:bodyPr>
+          <a:lstStyle/>
+          <a:p>
+            <a:r>
+              <a:rPr lang="en-US" altLang="ja-JP" sz="1000" dirty="0">
+                <a:latin typeface="Jost" pitchFamily="2" charset="0"/>
+                <a:ea typeface="Jost" pitchFamily="2" charset="0"/>
+              </a:rPr>
+              <a:t>The </a:t>
+            </a:r>
+            <a:r>
+              <a:rPr lang="en-US" altLang="ja-JP" sz="1000" dirty="0">
+                <a:latin typeface="Jost Medium" pitchFamily="2" charset="0"/>
+                <a:ea typeface="Jost Medium" pitchFamily="2" charset="0"/>
+              </a:rPr>
+              <a:t>Gradient Filament</a:t>
+            </a:r>
+            <a:r>
+              <a:rPr lang="en-US" altLang="ja-JP" sz="1000" dirty="0">
+                <a:latin typeface="Jost" pitchFamily="2" charset="0"/>
+                <a:ea typeface="Jost" pitchFamily="2" charset="0"/>
+              </a:rPr>
+              <a:t> Series provides multiple color-changing Profiles and Plates with different cycle counts. Details vary by model, so please refer to each model’s description.</a:t>
+            </a:r>
+          </a:p>
+          <a:p>
+            <a:endParaRPr lang="en-US" altLang="ja-JP" sz="1000" dirty="0">
+              <a:latin typeface="Jost" pitchFamily="2" charset="0"/>
+              <a:ea typeface="Jost" pitchFamily="2" charset="0"/>
+            </a:endParaRPr>
+          </a:p>
+          <a:p>
+            <a:pPr marL="171450" indent="-171450">
+              <a:buFont typeface="Arial" panose="020B0604020202020204" pitchFamily="34" charset="0"/>
+              <a:buChar char="•"/>
+            </a:pPr>
+            <a:r>
+              <a:rPr lang="en-US" altLang="ja-JP" sz="1000" dirty="0">
+                <a:latin typeface="Jost" pitchFamily="2" charset="0"/>
+                <a:ea typeface="Jost" pitchFamily="2" charset="0"/>
+              </a:rPr>
+              <a:t>Color Curve: Settings based on color combinations. This option allows you to select the optimal gradient for each color—for example, “Vivid” for cyan and yellow, or “Contrast” for white and magenta.</a:t>
+            </a:r>
+          </a:p>
+          <a:p>
+            <a:endParaRPr lang="en-US" altLang="ja-JP" sz="600" dirty="0">
+              <a:latin typeface="Jost" pitchFamily="2" charset="0"/>
+              <a:ea typeface="Jost" pitchFamily="2" charset="0"/>
+            </a:endParaRPr>
+          </a:p>
+          <a:p>
+            <a:pPr marL="171450" indent="-171450">
+              <a:buFont typeface="Arial" panose="020B0604020202020204" pitchFamily="34" charset="0"/>
+              <a:buChar char="•"/>
+            </a:pPr>
+            <a:r>
+              <a:rPr lang="en-US" altLang="ja-JP" sz="1000" dirty="0">
+                <a:latin typeface="Jost" pitchFamily="2" charset="0"/>
+                <a:ea typeface="Jost" pitchFamily="2" charset="0"/>
+              </a:rPr>
+              <a:t>Number of cycles: The number that determines the frequency of the gradient. One cycle is counted as one complete cycle in which the filament changes from A to B to A and back.</a:t>
+            </a:r>
+          </a:p>
+          <a:p>
+            <a:endParaRPr lang="en-US" altLang="ja-JP" sz="1000" dirty="0">
+              <a:latin typeface="Jost" pitchFamily="2" charset="0"/>
+              <a:ea typeface="Jost" pitchFamily="2" charset="0"/>
+            </a:endParaRPr>
+          </a:p>
+          <a:p>
+            <a:r>
+              <a:rPr lang="en-US" altLang="ja-JP" sz="1000" dirty="0">
+                <a:latin typeface="Jost" pitchFamily="2" charset="0"/>
+                <a:ea typeface="Jost" pitchFamily="2" charset="0"/>
+              </a:rPr>
+              <a:t>Example: To create a fast-cycle </a:t>
+            </a:r>
+            <a:r>
+              <a:rPr lang="en-US" altLang="ja-JP" sz="1000" dirty="0">
+                <a:latin typeface="Jost Medium" pitchFamily="2" charset="0"/>
+                <a:ea typeface="Jost Medium" pitchFamily="2" charset="0"/>
+              </a:rPr>
+              <a:t>gradient filament</a:t>
+            </a:r>
+            <a:r>
+              <a:rPr lang="en-US" altLang="ja-JP" sz="1000" dirty="0">
+                <a:latin typeface="Jost" pitchFamily="2" charset="0"/>
+                <a:ea typeface="Jost" pitchFamily="2" charset="0"/>
+              </a:rPr>
+              <a:t> using cyan and magenta, select an S4 Model, choose a 4-cycle Plate, and use the Vivid curve Profile due to the high color contrast.</a:t>
+            </a:r>
+            <a:endParaRPr kumimoji="1" lang="ja-JP" altLang="en-US" sz="1000" b="1" dirty="0">
+              <a:latin typeface="Jost" pitchFamily="2" charset="0"/>
+              <a:ea typeface="IBM Plex Sans JP" panose="020B0503050203000203" pitchFamily="50" charset="-128"/>
+            </a:endParaRPr>
+          </a:p>
+        </p:txBody>
+      </p:sp>
       <p:pic>
         <p:nvPicPr>
-          <p:cNvPr id="6" name="図 5">
+          <p:cNvPr id="2" name="図 1">
             <a:extLst>
               <a:ext uri="{FF2B5EF4-FFF2-40B4-BE49-F238E27FC236}">
-                <a16:creationId xmlns:a16="http://schemas.microsoft.com/office/drawing/2014/main" id="{64E9B330-3307-650C-201B-5C7CE0AF0A63}"/>
+                <a16:creationId xmlns:a16="http://schemas.microsoft.com/office/drawing/2014/main" id="{A3C23D8A-9444-D2FD-03C4-56DBB93F3C0C}"/>
               </a:ext>
             </a:extLst>
           </p:cNvPr>
@@ -10612,7 +10922,7 @@
         </p:blipFill>
         <p:spPr bwMode="auto">
           <a:xfrm>
-            <a:off x="638918" y="3243238"/>
+            <a:off x="620249" y="3048166"/>
             <a:ext cx="5614266" cy="919080"/>
           </a:xfrm>
           <a:prstGeom prst="rect">
@@ -10633,7 +10943,7 @@
     </p:spTree>
     <p:extLst>
       <p:ext uri="{BB962C8B-B14F-4D97-AF65-F5344CB8AC3E}">
-        <p14:creationId xmlns:p14="http://schemas.microsoft.com/office/powerpoint/2010/main" val="4292805330"/>
+        <p14:creationId xmlns:p14="http://schemas.microsoft.com/office/powerpoint/2010/main" val="1165516691"/>
       </p:ext>
     </p:extLst>
   </p:cSld>
@@ -10651,7 +10961,7 @@
         <p:cNvPr id="1" name="">
           <a:extLst>
             <a:ext uri="{FF2B5EF4-FFF2-40B4-BE49-F238E27FC236}">
-              <a16:creationId xmlns:a16="http://schemas.microsoft.com/office/drawing/2014/main" id="{7125A6E3-FC4A-AC00-A897-53FC35BE1199}"/>
+              <a16:creationId xmlns:a16="http://schemas.microsoft.com/office/drawing/2014/main" id="{C3501251-86CB-DBBA-1B7B-B580454E9712}"/>
             </a:ext>
           </a:extLst>
         </p:cNvPr>
@@ -10671,7 +10981,7 @@
           <p:cNvPr id="30" name="正方形/長方形 29">
             <a:extLst>
               <a:ext uri="{FF2B5EF4-FFF2-40B4-BE49-F238E27FC236}">
-                <a16:creationId xmlns:a16="http://schemas.microsoft.com/office/drawing/2014/main" id="{53908D35-F986-58BC-278C-A39AF70B18D9}"/>
+                <a16:creationId xmlns:a16="http://schemas.microsoft.com/office/drawing/2014/main" id="{6EE26175-C68E-765D-05A2-E9D1F0570E98}"/>
               </a:ext>
             </a:extLst>
           </p:cNvPr>
@@ -10734,7 +11044,7 @@
           <p:cNvPr id="12" name="フリーフォーム: 図形 11">
             <a:extLst>
               <a:ext uri="{FF2B5EF4-FFF2-40B4-BE49-F238E27FC236}">
-                <a16:creationId xmlns:a16="http://schemas.microsoft.com/office/drawing/2014/main" id="{B1005370-E423-EBFF-F31C-32291B3DE46C}"/>
+                <a16:creationId xmlns:a16="http://schemas.microsoft.com/office/drawing/2014/main" id="{ED1F1C13-3E9A-2224-0EBF-ED61B4586D28}"/>
               </a:ext>
             </a:extLst>
           </p:cNvPr>
@@ -10776,13 +11086,13 @@
               <a:gd name="csX12" fmla="*/ 631632 w 6858000"/>
               <a:gd name="csY12" fmla="*/ 811545 h 9144000"/>
               <a:gd name="csX13" fmla="*/ 537486 w 6858000"/>
-              <a:gd name="csY13" fmla="*/ 446937 h 9144000"/>
+              <a:gd name="csY13" fmla="*/ 434745 h 9144000"/>
               <a:gd name="csX14" fmla="*/ 537486 w 6858000"/>
-              <a:gd name="csY14" fmla="*/ 500937 h 9144000"/>
+              <a:gd name="csY14" fmla="*/ 488745 h 9144000"/>
               <a:gd name="csX15" fmla="*/ 6293679 w 6858000"/>
-              <a:gd name="csY15" fmla="*/ 500937 h 9144000"/>
+              <a:gd name="csY15" fmla="*/ 488745 h 9144000"/>
               <a:gd name="csX16" fmla="*/ 6293679 w 6858000"/>
-              <a:gd name="csY16" fmla="*/ 446937 h 9144000"/>
+              <a:gd name="csY16" fmla="*/ 434745 h 9144000"/>
               <a:gd name="csX17" fmla="*/ 0 w 6858000"/>
               <a:gd name="csY17" fmla="*/ 0 h 9144000"/>
               <a:gd name="csX18" fmla="*/ 6858000 w 6858000"/>
@@ -10912,16 +11222,16 @@
                 </a:cubicBezTo>
                 <a:close/>
                 <a:moveTo>
-                  <a:pt x="537486" y="446937"/>
+                  <a:pt x="537486" y="434745"/>
                 </a:moveTo>
                 <a:lnTo>
-                  <a:pt x="537486" y="500937"/>
+                  <a:pt x="537486" y="488745"/>
                 </a:lnTo>
                 <a:lnTo>
-                  <a:pt x="6293679" y="500937"/>
+                  <a:pt x="6293679" y="488745"/>
                 </a:lnTo>
                 <a:lnTo>
-                  <a:pt x="6293679" y="446937"/>
+                  <a:pt x="6293679" y="434745"/>
                 </a:lnTo>
                 <a:close/>
                 <a:moveTo>
@@ -10979,7 +11289,7 @@
           <p:cNvPr id="17" name="テキスト ボックス 16">
             <a:extLst>
               <a:ext uri="{FF2B5EF4-FFF2-40B4-BE49-F238E27FC236}">
-                <a16:creationId xmlns:a16="http://schemas.microsoft.com/office/drawing/2014/main" id="{6F944542-F688-AA88-F03D-72137284BC20}"/>
+                <a16:creationId xmlns:a16="http://schemas.microsoft.com/office/drawing/2014/main" id="{C626FF6B-F561-C55E-58FD-38BB7511D092}"/>
               </a:ext>
             </a:extLst>
           </p:cNvPr>
@@ -11004,10 +11314,15 @@
           <a:p>
             <a:pPr algn="ctr"/>
             <a:r>
-              <a:rPr kumimoji="1" lang="en-US" altLang="ja-JP" dirty="0"/>
+              <a:rPr kumimoji="1" lang="en-US" altLang="ja-JP" dirty="0">
+                <a:latin typeface="Jost" pitchFamily="2" charset="0"/>
+                <a:ea typeface="Jost" pitchFamily="2" charset="0"/>
+              </a:rPr>
               <a:t>4</a:t>
             </a:r>
-            <a:endParaRPr kumimoji="1" lang="ja-JP" altLang="en-US" dirty="0"/>
+            <a:endParaRPr kumimoji="1" lang="ja-JP" altLang="en-US" dirty="0">
+              <a:latin typeface="Jost" pitchFamily="2" charset="0"/>
+            </a:endParaRPr>
           </a:p>
         </p:txBody>
       </p:sp>
@@ -11016,7 +11331,7 @@
           <p:cNvPr id="34" name="テキスト ボックス 33">
             <a:extLst>
               <a:ext uri="{FF2B5EF4-FFF2-40B4-BE49-F238E27FC236}">
-                <a16:creationId xmlns:a16="http://schemas.microsoft.com/office/drawing/2014/main" id="{5C2CABC6-218E-C4AF-5D73-A13394AD5453}"/>
+                <a16:creationId xmlns:a16="http://schemas.microsoft.com/office/drawing/2014/main" id="{342A7B74-6A88-0D93-AB89-DDED0831AB32}"/>
               </a:ext>
             </a:extLst>
           </p:cNvPr>
@@ -11026,7 +11341,7 @@
         <p:spPr>
           <a:xfrm>
             <a:off x="778114" y="784294"/>
-            <a:ext cx="1923925" cy="338554"/>
+            <a:ext cx="1715534" cy="338554"/>
           </a:xfrm>
           <a:prstGeom prst="rect">
             <a:avLst/>
@@ -11041,13 +11356,13 @@
           <a:p>
             <a:r>
               <a:rPr lang="en-US" altLang="ja-JP" sz="1600" dirty="0">
-                <a:latin typeface="IBM Plex Sans JP SemiBold" panose="020B0703050203000203" pitchFamily="50" charset="-128"/>
-                <a:ea typeface="IBM Plex Sans JP SemiBold" panose="020B0703050203000203" pitchFamily="50" charset="-128"/>
+                <a:latin typeface="Jost" pitchFamily="2" charset="0"/>
+                <a:ea typeface="Jost" pitchFamily="2" charset="0"/>
               </a:rPr>
               <a:t>6. Update History</a:t>
             </a:r>
             <a:endParaRPr kumimoji="1" lang="ja-JP" altLang="en-US" b="1" dirty="0">
-              <a:latin typeface="IBM Plex Sans JP SemiBold" panose="020B0703050203000203" pitchFamily="50" charset="-128"/>
+              <a:latin typeface="Jost" pitchFamily="2" charset="0"/>
               <a:ea typeface="IBM Plex Sans JP SemiBold" panose="020B0703050203000203" pitchFamily="50" charset="-128"/>
             </a:endParaRPr>
           </a:p>
@@ -11058,7 +11373,7 @@
           <p:cNvPr id="35" name="テキスト ボックス 34">
             <a:extLst>
               <a:ext uri="{FF2B5EF4-FFF2-40B4-BE49-F238E27FC236}">
-                <a16:creationId xmlns:a16="http://schemas.microsoft.com/office/drawing/2014/main" id="{5FE1D15C-58BD-0ED2-6FA9-EDDD3C3FFB7D}"/>
+                <a16:creationId xmlns:a16="http://schemas.microsoft.com/office/drawing/2014/main" id="{B753C125-1CB6-7E3A-FE2E-1843A9373113}"/>
               </a:ext>
             </a:extLst>
           </p:cNvPr>
@@ -11068,7 +11383,7 @@
         <p:spPr>
           <a:xfrm>
             <a:off x="638323" y="1115240"/>
-            <a:ext cx="5649491" cy="507831"/>
+            <a:ext cx="5649491" cy="646331"/>
           </a:xfrm>
           <a:prstGeom prst="rect">
             <a:avLst/>
@@ -11083,8 +11398,8 @@
           <a:p>
             <a:r>
               <a:rPr lang="en-US" altLang="ja-JP" sz="900" dirty="0">
-                <a:latin typeface="IBM Plex Sans JP" panose="020B0503050203000203" pitchFamily="50" charset="-128"/>
-                <a:ea typeface="IBM Plex Sans JP" panose="020B0503050203000203" pitchFamily="50" charset="-128"/>
+                <a:latin typeface="Jost" pitchFamily="2" charset="0"/>
+                <a:ea typeface="Jost" pitchFamily="2" charset="0"/>
               </a:rPr>
               <a:t>Ver.1.00  2026-07-02  First Edition Published</a:t>
             </a:r>
@@ -11092,8 +11407,8 @@
           <a:p>
             <a:r>
               <a:rPr lang="en-US" altLang="ja-JP" sz="900" dirty="0">
-                <a:latin typeface="IBM Plex Sans JP" panose="020B0503050203000203" pitchFamily="50" charset="-128"/>
-                <a:ea typeface="IBM Plex Sans JP" panose="020B0503050203000203" pitchFamily="50" charset="-128"/>
+                <a:latin typeface="Jost" pitchFamily="2" charset="0"/>
+                <a:ea typeface="Jost" pitchFamily="2" charset="0"/>
               </a:rPr>
               <a:t>Ver.1.10  2026-07-22  Revisions for Integrated Design</a:t>
             </a:r>
@@ -11101,10 +11416,19 @@
           <a:p>
             <a:r>
               <a:rPr lang="en-US" altLang="ja-JP" sz="900" dirty="0">
-                <a:latin typeface="IBM Plex Sans JP" panose="020B0503050203000203" pitchFamily="50" charset="-128"/>
-                <a:ea typeface="IBM Plex Sans JP" panose="020B0503050203000203" pitchFamily="50" charset="-128"/>
+                <a:latin typeface="Jost" pitchFamily="2" charset="0"/>
+                <a:ea typeface="Jost" pitchFamily="2" charset="0"/>
               </a:rPr>
               <a:t>Ver.1.11  2026-08-08  Revisions to align with the Japanese version</a:t>
+            </a:r>
+          </a:p>
+          <a:p>
+            <a:r>
+              <a:rPr lang="en-US" altLang="ja-JP" sz="900" dirty="0">
+                <a:latin typeface="Jost" pitchFamily="2" charset="0"/>
+                <a:ea typeface="Jost" pitchFamily="2" charset="0"/>
+              </a:rPr>
+              <a:t>Ver.1.12  2026-09-16  Applying the Brand Typeface</a:t>
             </a:r>
           </a:p>
         </p:txBody>
@@ -11112,7 +11436,7 @@
     </p:spTree>
     <p:extLst>
       <p:ext uri="{BB962C8B-B14F-4D97-AF65-F5344CB8AC3E}">
-        <p14:creationId xmlns:p14="http://schemas.microsoft.com/office/powerpoint/2010/main" val="3082964952"/>
+        <p14:creationId xmlns:p14="http://schemas.microsoft.com/office/powerpoint/2010/main" val="917024834"/>
       </p:ext>
     </p:extLst>
   </p:cSld>
